--- a/reports/presentation/humanforyou-attrition.pptx
+++ b/reports/presentation/humanforyou-attrition.pptx
@@ -45,11 +45,11 @@
     <p:sldId id="263" r:id="rId36"/>
     <p:sldId id="305" r:id="rId37"/>
     <p:sldId id="296" r:id="rId38"/>
-    <p:sldId id="264" r:id="rId39"/>
-    <p:sldId id="304" r:id="rId40"/>
-    <p:sldId id="297" r:id="rId41"/>
-    <p:sldId id="266" r:id="rId42"/>
-    <p:sldId id="306" r:id="rId43"/>
+    <p:sldId id="304" r:id="rId39"/>
+    <p:sldId id="297" r:id="rId40"/>
+    <p:sldId id="266" r:id="rId41"/>
+    <p:sldId id="306" r:id="rId42"/>
+    <p:sldId id="311" r:id="rId43"/>
   </p:sldIdLst>
   <p:sldSz cx="12192000" cy="6858000"/>
   <p:notesSz cx="6858000" cy="9144000"/>
@@ -170,8 +170,8 @@
 <file path=ppt/revisionInfo.xml><?xml version="1.0" encoding="utf-8"?>
 <p1510:revInfo xmlns:a="http://schemas.openxmlformats.org/drawingml/2006/main" xmlns:r="http://schemas.openxmlformats.org/officeDocument/2006/relationships" xmlns:p1510="http://schemas.microsoft.com/office/powerpoint/2015/10/main">
   <p1510:revLst>
-    <p1510:client id="{176C4302-E756-4553-99DC-E5E3BB5B2498}" v="700" dt="2026-02-27T07:47:31.570"/>
-    <p1510:client id="{B89E1F90-9CFB-4C70-8C0D-63EA826CDF31}" v="2076" dt="2026-02-27T08:09:51.407"/>
+    <p1510:client id="{176C4302-E756-4553-99DC-E5E3BB5B2498}" v="769" dt="2026-02-27T08:53:24.890"/>
+    <p1510:client id="{B89E1F90-9CFB-4C70-8C0D-63EA826CDF31}" v="2149" dt="2026-02-27T09:57:50.689"/>
     <p1510:client id="{BD46037F-4058-4267-AA8C-87F2B3030C92}" v="963" dt="2026-02-27T07:59:51.784"/>
   </p1510:revLst>
 </p1510:revInfo>
@@ -762,37 +762,37 @@
           <a:lstStyle/>
           <a:p>
             <a:r>
-              <a:rPr lang="fr-FR" dirty="0"/>
-              <a:t>Aujourd’hui nous allons vous présenter notre projet d’intelligence artificielle réalisé pour l’entreprise </a:t>
-            </a:r>
-            <a:r>
-              <a:rPr lang="fr-FR" b="1" dirty="0" err="1"/>
+              <a:rPr lang="fr-FR"/>
+              <a:t>Aujourd’hui nous allons vous présenter notre projet IA réalisé pour l’entreprise </a:t>
+            </a:r>
+            <a:r>
+              <a:rPr lang="fr-FR" b="1" err="1"/>
               <a:t>HumanForYou</a:t>
             </a:r>
             <a:r>
-              <a:rPr lang="fr-FR" dirty="0"/>
+              <a:rPr lang="fr-FR"/>
               <a:t>.</a:t>
             </a:r>
           </a:p>
           <a:p>
             <a:r>
-              <a:rPr lang="fr-FR" dirty="0"/>
+              <a:rPr lang="fr-FR"/>
               <a:t>Ce projet porte sur l’analyse du </a:t>
             </a:r>
             <a:r>
-              <a:rPr lang="fr-FR" b="1" dirty="0"/>
+              <a:rPr lang="fr-FR" b="1"/>
               <a:t>phénomène d’attrition des employés</a:t>
             </a:r>
             <a:r>
-              <a:rPr lang="fr-FR" dirty="0"/>
-              <a:t>, c’est-à-dire le départ volontaire des salariés, à travers une approche basée sur la data science et le machine </a:t>
-            </a:r>
-            <a:r>
-              <a:rPr lang="fr-FR" dirty="0" err="1"/>
+              <a:rPr lang="fr-FR"/>
+              <a:t>, c’est-à-dire le départ des salariés, à travers une approche basée sur la data science et le machine </a:t>
+            </a:r>
+            <a:r>
+              <a:rPr lang="fr-FR" err="1"/>
               <a:t>learning</a:t>
             </a:r>
             <a:r>
-              <a:rPr lang="fr-FR" dirty="0"/>
+              <a:rPr lang="fr-FR"/>
               <a:t>.</a:t>
             </a:r>
           </a:p>
@@ -879,16 +879,8 @@
           <a:lstStyle/>
           <a:p>
             <a:r>
-              <a:rPr lang="fr-FR" dirty="0"/>
-              <a:t>Après l’exploration initiale, la phase suivante consiste à transformer les données brutes en un jeu exploitable pour le machine </a:t>
-            </a:r>
-            <a:r>
-              <a:rPr lang="fr-FR" dirty="0" err="1"/>
-              <a:t>learning</a:t>
-            </a:r>
-            <a:r>
-              <a:rPr lang="fr-FR" dirty="0"/>
-              <a:t>.</a:t>
+              <a:rPr lang="fr-FR"/>
+              <a:t>Après l’exploration initiale, la phase suivante consiste à transformer les données brutes en un jeu exploitable</a:t>
             </a:r>
           </a:p>
         </p:txBody>
@@ -974,119 +966,29 @@
           <a:lstStyle/>
           <a:p>
             <a:r>
-              <a:rPr lang="fr-FR" dirty="0"/>
+              <a:rPr lang="fr-FR"/>
               <a:t>Plusieurs opérations ont été réalisées.</a:t>
             </a:r>
           </a:p>
           <a:p>
             <a:r>
-              <a:rPr lang="fr-FR" dirty="0"/>
-              <a:t>Les trois tables RH ont été </a:t>
-            </a:r>
-            <a:r>
-              <a:rPr lang="fr-FR" b="1" dirty="0"/>
-              <a:t>fusionnées via la clé </a:t>
-            </a:r>
-            <a:r>
-              <a:rPr lang="fr-FR" b="1" dirty="0" err="1"/>
-              <a:t>EmployeeID</a:t>
-            </a:r>
-            <a:r>
-              <a:rPr lang="fr-FR" dirty="0"/>
-              <a:t> afin d’obtenir une vision unifiée de chaque employé.</a:t>
-            </a:r>
-          </a:p>
-          <a:p>
-            <a:r>
-              <a:rPr lang="fr-FR" dirty="0"/>
-              <a:t>Certaines colonnes constantes, comme </a:t>
-            </a:r>
-            <a:r>
-              <a:rPr lang="fr-FR" i="1" dirty="0" err="1"/>
-              <a:t>EmployeeCount</a:t>
-            </a:r>
-            <a:r>
-              <a:rPr lang="fr-FR" dirty="0"/>
-              <a:t>, </a:t>
-            </a:r>
-            <a:r>
-              <a:rPr lang="fr-FR" i="1" dirty="0"/>
-              <a:t>Over18</a:t>
-            </a:r>
-            <a:r>
-              <a:rPr lang="fr-FR" dirty="0"/>
-              <a:t> ou </a:t>
-            </a:r>
-            <a:r>
-              <a:rPr lang="fr-FR" i="1" dirty="0" err="1"/>
-              <a:t>StandardHours</a:t>
-            </a:r>
-            <a:r>
-              <a:rPr lang="fr-FR" dirty="0"/>
-              <a:t>, ont été supprimées car elles n’apportaient aucune information utile.</a:t>
-            </a:r>
-          </a:p>
-          <a:p>
-            <a:endParaRPr lang="fr-FR" dirty="0"/>
-          </a:p>
-          <a:p>
-            <a:r>
-              <a:rPr lang="fr-FR" dirty="0"/>
-              <a:t>Les valeurs manquantes ont été imputées :</a:t>
-            </a:r>
-          </a:p>
-          <a:p>
-            <a:r>
-              <a:rPr lang="fr-FR" dirty="0"/>
-              <a:t>médiane pour les variables numériques,</a:t>
-            </a:r>
-          </a:p>
-          <a:p>
-            <a:r>
-              <a:rPr lang="fr-FR" dirty="0"/>
-              <a:t>mode pour les variables catégorielles.</a:t>
-            </a:r>
-          </a:p>
-          <a:p>
-            <a:endParaRPr lang="fr-FR" dirty="0"/>
-          </a:p>
-          <a:p>
-            <a:r>
-              <a:rPr lang="fr-FR" dirty="0"/>
-              <a:t>Un travail de </a:t>
-            </a:r>
-            <a:r>
-              <a:rPr lang="fr-FR" b="1" dirty="0" err="1"/>
-              <a:t>feature</a:t>
-            </a:r>
-            <a:r>
-              <a:rPr lang="fr-FR" b="1" dirty="0"/>
-              <a:t> engineering</a:t>
-            </a:r>
-            <a:r>
-              <a:rPr lang="fr-FR" dirty="0"/>
-              <a:t> a également été réalisé sur les données de badgeuse.</a:t>
-            </a:r>
-          </a:p>
-          <a:p>
-            <a:r>
-              <a:rPr lang="fr-FR" dirty="0"/>
+              <a:rPr lang="fr-FR"/>
               <a:t>Le </a:t>
             </a:r>
             <a:r>
-              <a:rPr lang="fr-FR" dirty="0" err="1"/>
+              <a:rPr lang="fr-FR" err="1"/>
               <a:t>dataset</a:t>
             </a:r>
             <a:r>
-              <a:rPr lang="fr-FR" dirty="0"/>
+              <a:rPr lang="fr-FR"/>
               <a:t> final contient </a:t>
             </a:r>
             <a:r>
-              <a:rPr lang="fr-FR" b="1" dirty="0"/>
+              <a:rPr lang="fr-FR" b="1"/>
               <a:t>4 410 lignes et 27 colonnes</a:t>
             </a:r>
             <a:r>
-              <a:rPr lang="fr-FR" dirty="0"/>
+              <a:rPr lang="fr-FR"/>
               <a:t>, sans aucune valeur manquante.</a:t>
             </a:r>
           </a:p>
@@ -1173,37 +1075,57 @@
           <a:lstStyle/>
           <a:p>
             <a:r>
-              <a:rPr lang="fr-FR" dirty="0"/>
-              <a:t>Afin d’assurer la reproductibilité du projet, nous avons structuré un pipeline clair comprenant :</a:t>
-            </a:r>
-          </a:p>
-          <a:p>
-            <a:r>
-              <a:rPr lang="fr-FR" dirty="0"/>
+              <a:rPr lang="fr-FR"/>
+              <a:t>Nous avons structuré un pipeline clair comprenant :</a:t>
+            </a:r>
+          </a:p>
+          <a:p>
+            <a:pPr marL="171450" indent="-171450">
+              <a:buFont typeface="Arial" panose="020B0604020202020204" pitchFamily="34" charset="0"/>
+              <a:buChar char="•"/>
+            </a:pPr>
+            <a:r>
+              <a:rPr lang="fr-FR"/>
               <a:t>fusion des données,</a:t>
             </a:r>
           </a:p>
           <a:p>
-            <a:r>
-              <a:rPr lang="fr-FR" dirty="0"/>
+            <a:pPr marL="171450" indent="-171450">
+              <a:buFont typeface="Arial" panose="020B0604020202020204" pitchFamily="34" charset="0"/>
+              <a:buChar char="•"/>
+            </a:pPr>
+            <a:r>
+              <a:rPr lang="fr-FR"/>
               <a:t>nettoyage,</a:t>
             </a:r>
           </a:p>
           <a:p>
-            <a:r>
-              <a:rPr lang="fr-FR" dirty="0"/>
+            <a:pPr marL="171450" indent="-171450">
+              <a:buFont typeface="Arial" panose="020B0604020202020204" pitchFamily="34" charset="0"/>
+              <a:buChar char="•"/>
+            </a:pPr>
+            <a:r>
+              <a:rPr lang="fr-FR"/>
               <a:t>imputation,</a:t>
             </a:r>
           </a:p>
           <a:p>
-            <a:r>
-              <a:rPr lang="fr-FR" dirty="0"/>
+            <a:pPr marL="171450" indent="-171450">
+              <a:buFont typeface="Arial" panose="020B0604020202020204" pitchFamily="34" charset="0"/>
+              <a:buChar char="•"/>
+            </a:pPr>
+            <a:r>
+              <a:rPr lang="fr-FR"/>
               <a:t>transformation,</a:t>
             </a:r>
           </a:p>
           <a:p>
-            <a:r>
-              <a:rPr lang="fr-FR" dirty="0"/>
+            <a:pPr marL="171450" indent="-171450">
+              <a:buFont typeface="Arial" panose="020B0604020202020204" pitchFamily="34" charset="0"/>
+              <a:buChar char="•"/>
+            </a:pPr>
+            <a:r>
+              <a:rPr lang="fr-FR"/>
               <a:t>puis préparation pour les algorithmes.</a:t>
             </a:r>
           </a:p>
@@ -1290,54 +1212,42 @@
           <a:lstStyle/>
           <a:p>
             <a:r>
-              <a:rPr lang="fr-FR" dirty="0"/>
+              <a:rPr lang="fr-FR"/>
               <a:t>Les données badgeuses initiales contenaient plusieurs centaines de mesures journalières.</a:t>
             </a:r>
           </a:p>
           <a:p>
             <a:r>
-              <a:rPr lang="fr-FR" dirty="0"/>
+              <a:rPr lang="fr-FR"/>
               <a:t>Nous avons donc réalisé une agrégation statistique permettant de calculer une </a:t>
             </a:r>
             <a:r>
-              <a:rPr lang="fr-FR" b="1" dirty="0"/>
+              <a:rPr lang="fr-FR" b="1"/>
               <a:t>moyenne de temps de travail journalier</a:t>
             </a:r>
             <a:r>
-              <a:rPr lang="fr-FR" dirty="0"/>
+              <a:rPr lang="fr-FR"/>
               <a:t>.</a:t>
             </a:r>
             <a:br>
-              <a:rPr lang="fr-FR" dirty="0"/>
+              <a:rPr lang="fr-FR"/>
             </a:br>
-            <a:endParaRPr lang="fr-FR" dirty="0"/>
-          </a:p>
-          <a:p>
-            <a:r>
-              <a:rPr lang="fr-FR" dirty="0"/>
+            <a:endParaRPr lang="fr-FR"/>
+          </a:p>
+          <a:p>
+            <a:r>
+              <a:rPr lang="fr-FR"/>
               <a:t>Cette approche permet :</a:t>
             </a:r>
           </a:p>
           <a:p>
             <a:r>
-              <a:rPr lang="fr-FR" dirty="0"/>
-              <a:t>de réduire la dimensionnalité,</a:t>
-            </a:r>
-          </a:p>
-          <a:p>
-            <a:r>
-              <a:rPr lang="fr-FR" dirty="0"/>
+              <a:rPr lang="fr-FR"/>
               <a:t>limiter le bruit,</a:t>
             </a:r>
           </a:p>
           <a:p>
-            <a:r>
-              <a:rPr lang="fr-FR" dirty="0"/>
-              <a:t>tout en conservant une information comportementale pertinente.</a:t>
-            </a:r>
-          </a:p>
-          <a:p>
-            <a:endParaRPr lang="fr-FR" dirty="0"/>
+            <a:endParaRPr lang="fr-FR"/>
           </a:p>
         </p:txBody>
       </p:sp>
@@ -1422,34 +1332,34 @@
           <a:lstStyle/>
           <a:p>
             <a:r>
-              <a:rPr lang="fr-FR" dirty="0"/>
+              <a:rPr lang="fr-FR"/>
               <a:t>Les variables catégorielles ont ensuite été transformées via un </a:t>
             </a:r>
             <a:r>
-              <a:rPr lang="fr-FR" b="1" dirty="0"/>
+              <a:rPr lang="fr-FR" b="1"/>
               <a:t>encodage </a:t>
             </a:r>
             <a:r>
-              <a:rPr lang="fr-FR" b="1" dirty="0" err="1"/>
+              <a:rPr lang="fr-FR" b="1" err="1"/>
               <a:t>One-Hot</a:t>
             </a:r>
             <a:r>
-              <a:rPr lang="fr-FR" dirty="0"/>
+              <a:rPr lang="fr-FR"/>
               <a:t>.</a:t>
             </a:r>
           </a:p>
           <a:p>
             <a:r>
-              <a:rPr lang="fr-FR" dirty="0"/>
+              <a:rPr lang="fr-FR"/>
               <a:t>Cela permet aux algorithmes de machine </a:t>
             </a:r>
             <a:r>
-              <a:rPr lang="fr-FR" dirty="0" err="1"/>
+              <a:rPr lang="fr-FR" err="1"/>
               <a:t>learning</a:t>
             </a:r>
             <a:r>
-              <a:rPr lang="fr-FR" dirty="0"/>
-              <a:t> de traiter correctement les catégories sans introduire de hiérarchie artificielle entre elles.</a:t>
+              <a:rPr lang="fr-FR"/>
+              <a:t> de traiter correctement les catégories</a:t>
             </a:r>
           </a:p>
         </p:txBody>
@@ -1535,43 +1445,42 @@
           <a:lstStyle/>
           <a:p>
             <a:r>
-              <a:rPr lang="fr-FR" dirty="0"/>
+              <a:rPr lang="fr-FR"/>
               <a:t>Le </a:t>
             </a:r>
             <a:r>
-              <a:rPr lang="fr-FR" dirty="0" err="1"/>
+              <a:rPr lang="fr-FR" err="1"/>
               <a:t>dataset</a:t>
             </a:r>
             <a:r>
-              <a:rPr lang="fr-FR" dirty="0"/>
+              <a:rPr lang="fr-FR"/>
               <a:t> final a été séparé en deux parties :</a:t>
             </a:r>
           </a:p>
           <a:p>
-            <a:r>
-              <a:rPr lang="fr-FR" dirty="0"/>
+            <a:pPr marL="171450" indent="-171450">
+              <a:buFont typeface="Arial" panose="020B0604020202020204" pitchFamily="34" charset="0"/>
+              <a:buChar char="•"/>
+            </a:pPr>
+            <a:r>
+              <a:rPr lang="fr-FR"/>
               <a:t>un jeu d’entraînement pour apprendre les modèles,</a:t>
             </a:r>
           </a:p>
           <a:p>
-            <a:r>
-              <a:rPr lang="fr-FR" dirty="0"/>
+            <a:pPr marL="171450" indent="-171450">
+              <a:buFont typeface="Arial" panose="020B0604020202020204" pitchFamily="34" charset="0"/>
+              <a:buChar char="•"/>
+            </a:pPr>
+            <a:r>
+              <a:rPr lang="fr-FR"/>
               <a:t>un jeu de test pour évaluer leurs performances.</a:t>
             </a:r>
           </a:p>
           <a:p>
-            <a:endParaRPr lang="fr-FR" dirty="0"/>
-          </a:p>
-          <a:p>
-            <a:r>
-              <a:rPr lang="fr-FR" dirty="0"/>
+            <a:r>
+              <a:rPr lang="fr-FR"/>
               <a:t>Cette séparation garantit une évaluation fiable et évite les biais liés au sur-apprentissage.</a:t>
-            </a:r>
-          </a:p>
-          <a:p>
-            <a:r>
-              <a:rPr lang="fr-FR" dirty="0"/>
-              <a:t>À ce stade, nous disposons donc d’un jeu de données propre, structuré et prêt pour l’analyse avancée.</a:t>
             </a:r>
           </a:p>
         </p:txBody>
@@ -2082,62 +1991,62 @@
           <a:lstStyle/>
           <a:p>
             <a:r>
-              <a:rPr lang="fr-FR" dirty="0"/>
+              <a:rPr lang="fr-FR"/>
               <a:t>Notre </a:t>
             </a:r>
             <a:r>
-              <a:rPr lang="fr-FR" dirty="0" err="1"/>
+              <a:rPr lang="fr-FR" err="1"/>
               <a:t>presentation</a:t>
             </a:r>
             <a:r>
-              <a:rPr lang="fr-FR" dirty="0"/>
+              <a:rPr lang="fr-FR"/>
               <a:t> est organisée en plusieurs étapes :</a:t>
             </a:r>
           </a:p>
           <a:p>
             <a:r>
-              <a:rPr lang="fr-FR" dirty="0"/>
+              <a:rPr lang="fr-FR"/>
               <a:t>compréhension du contexte,</a:t>
             </a:r>
           </a:p>
           <a:p>
             <a:r>
-              <a:rPr lang="fr-FR" dirty="0"/>
+              <a:rPr lang="fr-FR"/>
               <a:t>analyse des données disponibles,</a:t>
             </a:r>
           </a:p>
           <a:p>
             <a:r>
-              <a:rPr lang="fr-FR" dirty="0"/>
+              <a:rPr lang="fr-FR"/>
               <a:t>préparation et transformation,</a:t>
             </a:r>
           </a:p>
           <a:p>
             <a:r>
-              <a:rPr lang="fr-FR" dirty="0"/>
+              <a:rPr lang="fr-FR"/>
               <a:t>clustering,</a:t>
             </a:r>
           </a:p>
           <a:p>
             <a:r>
-              <a:rPr lang="fr-FR" dirty="0"/>
+              <a:rPr lang="fr-FR"/>
               <a:t>modélisation,</a:t>
             </a:r>
           </a:p>
           <a:p>
             <a:r>
-              <a:rPr lang="fr-FR" dirty="0"/>
+              <a:rPr lang="fr-FR"/>
               <a:t>réflexion éthique,</a:t>
             </a:r>
           </a:p>
           <a:p>
             <a:r>
-              <a:rPr lang="fr-FR" dirty="0"/>
+              <a:rPr lang="fr-FR"/>
               <a:t>puis conclusion.</a:t>
             </a:r>
           </a:p>
           <a:p>
-            <a:endParaRPr lang="fr-FR" dirty="0"/>
+            <a:endParaRPr lang="fr-FR"/>
           </a:p>
         </p:txBody>
       </p:sp>
@@ -2242,91 +2151,7 @@
           <a:p>
             <a:fld id="{BE52B670-D7FF-4D2A-A702-B36F595A107F}" type="slidenum">
               <a:rPr lang="fr-FR" smtClean="0"/>
-              <a:t>35</a:t>
-            </a:fld>
-            <a:endParaRPr lang="fr-FR"/>
-          </a:p>
-        </p:txBody>
-      </p:sp>
-    </p:spTree>
-    <p:extLst>
-      <p:ext uri="{BB962C8B-B14F-4D97-AF65-F5344CB8AC3E}">
-        <p14:creationId xmlns:p14="http://schemas.microsoft.com/office/powerpoint/2010/main" val="3965944418"/>
-      </p:ext>
-    </p:extLst>
-  </p:cSld>
-  <p:clrMapOvr>
-    <a:masterClrMapping/>
-  </p:clrMapOvr>
-</p:notes>
-</file>
-
-<file path=ppt/notesSlides/notesSlide21.xml><?xml version="1.0" encoding="utf-8"?>
-<p:notes xmlns:a="http://schemas.openxmlformats.org/drawingml/2006/main" xmlns:r="http://schemas.openxmlformats.org/officeDocument/2006/relationships" xmlns:p="http://schemas.openxmlformats.org/presentationml/2006/main">
-  <p:cSld>
-    <p:spTree>
-      <p:nvGrpSpPr>
-        <p:cNvPr id="1" name=""/>
-        <p:cNvGrpSpPr/>
-        <p:nvPr/>
-      </p:nvGrpSpPr>
-      <p:grpSpPr>
-        <a:xfrm>
-          <a:off x="0" y="0"/>
-          <a:ext cx="0" cy="0"/>
-          <a:chOff x="0" y="0"/>
-          <a:chExt cx="0" cy="0"/>
-        </a:xfrm>
-      </p:grpSpPr>
-      <p:sp>
-        <p:nvSpPr>
-          <p:cNvPr id="2" name="Espace réservé de l'image des diapositives 1"/>
-          <p:cNvSpPr>
-            <a:spLocks noGrp="1" noRot="1" noChangeAspect="1"/>
-          </p:cNvSpPr>
-          <p:nvPr>
-            <p:ph type="sldImg"/>
-          </p:nvPr>
-        </p:nvSpPr>
-        <p:spPr/>
-      </p:sp>
-      <p:sp>
-        <p:nvSpPr>
-          <p:cNvPr id="3" name="Espace réservé des notes 2"/>
-          <p:cNvSpPr>
-            <a:spLocks noGrp="1"/>
-          </p:cNvSpPr>
-          <p:nvPr>
-            <p:ph type="body" idx="1"/>
-          </p:nvPr>
-        </p:nvSpPr>
-        <p:spPr/>
-        <p:txBody>
-          <a:bodyPr/>
-          <a:lstStyle/>
-          <a:p>
-            <a:endParaRPr lang="fr-FR"/>
-          </a:p>
-        </p:txBody>
-      </p:sp>
-      <p:sp>
-        <p:nvSpPr>
-          <p:cNvPr id="4" name="Espace réservé du numéro de diapositive 3"/>
-          <p:cNvSpPr>
-            <a:spLocks noGrp="1"/>
-          </p:cNvSpPr>
-          <p:nvPr>
-            <p:ph type="sldNum" sz="quarter" idx="5"/>
-          </p:nvPr>
-        </p:nvSpPr>
-        <p:spPr/>
-        <p:txBody>
-          <a:bodyPr/>
-          <a:lstStyle/>
-          <a:p>
-            <a:fld id="{BE52B670-D7FF-4D2A-A702-B36F595A107F}" type="slidenum">
-              <a:rPr lang="fr-FR" smtClean="0"/>
-              <a:t>38</a:t>
+              <a:t>37</a:t>
             </a:fld>
             <a:endParaRPr lang="fr-FR"/>
           </a:p>
@@ -2389,34 +2214,7 @@
           <a:bodyPr/>
           <a:lstStyle/>
           <a:p>
-            <a:r>
-              <a:rPr lang="fr-FR" dirty="0"/>
-              <a:t>Je vais présenter la première partie correspondant au </a:t>
-            </a:r>
-            <a:r>
-              <a:rPr lang="fr-FR" b="1" dirty="0"/>
-              <a:t>contexte</a:t>
-            </a:r>
-            <a:r>
-              <a:rPr lang="fr-FR" dirty="0"/>
-              <a:t>, aux </a:t>
-            </a:r>
-            <a:r>
-              <a:rPr lang="fr-FR" b="1" dirty="0"/>
-              <a:t>données</a:t>
-            </a:r>
-            <a:r>
-              <a:rPr lang="fr-FR" dirty="0"/>
-              <a:t>, et à la </a:t>
-            </a:r>
-            <a:r>
-              <a:rPr lang="fr-FR" b="1" dirty="0"/>
-              <a:t>préparation du jeu de données</a:t>
-            </a:r>
-            <a:r>
-              <a:rPr lang="fr-FR" dirty="0"/>
-              <a:t>.</a:t>
-            </a:r>
+            <a:endParaRPr lang="fr-FR"/>
           </a:p>
         </p:txBody>
       </p:sp>
@@ -2519,104 +2317,55 @@
           <a:lstStyle/>
           <a:p>
             <a:r>
-              <a:rPr lang="fr-FR" dirty="0" err="1"/>
+              <a:rPr lang="fr-FR" err="1"/>
               <a:t>HumanForYou</a:t>
             </a:r>
             <a:r>
-              <a:rPr lang="fr-FR" dirty="0"/>
+              <a:rPr lang="fr-FR"/>
               <a:t> est une entreprise du secteur </a:t>
             </a:r>
             <a:r>
-              <a:rPr lang="fr-FR" b="1" dirty="0"/>
+              <a:rPr lang="fr-FR" b="1"/>
               <a:t>pharmaceutique</a:t>
             </a:r>
             <a:r>
-              <a:rPr lang="fr-FR" dirty="0"/>
+              <a:rPr lang="fr-FR"/>
               <a:t>, implantée en Inde, comptant </a:t>
             </a:r>
             <a:r>
-              <a:rPr lang="fr-FR" b="1" dirty="0"/>
+              <a:rPr lang="fr-FR" b="1"/>
               <a:t>4 410 employés</a:t>
             </a:r>
             <a:r>
-              <a:rPr lang="fr-FR" dirty="0"/>
+              <a:rPr lang="fr-FR"/>
               <a:t>.</a:t>
             </a:r>
           </a:p>
           <a:p>
-            <a:r>
-              <a:rPr lang="fr-FR" dirty="0"/>
-              <a:t>L’entreprise observe un </a:t>
-            </a:r>
-            <a:r>
-              <a:rPr lang="fr-FR" b="1" dirty="0"/>
-              <a:t>taux d’attrition annuel de 16,12 %</a:t>
-            </a:r>
-            <a:r>
-              <a:rPr lang="fr-FR" dirty="0"/>
-              <a:t>, soit </a:t>
-            </a:r>
-            <a:r>
-              <a:rPr lang="fr-FR" b="1" dirty="0"/>
-              <a:t>711 départs sur une seule année</a:t>
-            </a:r>
-            <a:r>
-              <a:rPr lang="fr-FR" dirty="0"/>
-              <a:t>, contre </a:t>
-            </a:r>
-            <a:r>
-              <a:rPr lang="fr-FR" b="1" dirty="0"/>
-              <a:t>3 699 employés restés en poste</a:t>
-            </a:r>
-            <a:r>
-              <a:rPr lang="fr-FR" dirty="0"/>
-              <a:t>.</a:t>
-            </a:r>
-            <a:br>
-              <a:rPr lang="fr-FR" dirty="0"/>
-            </a:br>
-            <a:endParaRPr lang="fr-FR" dirty="0"/>
-          </a:p>
-          <a:p>
-            <a:r>
-              <a:rPr lang="fr-FR" dirty="0"/>
+            <a:endParaRPr lang="fr-FR"/>
+          </a:p>
+          <a:p>
+            <a:r>
+              <a:rPr lang="fr-FR"/>
               <a:t>Ce taux représente un enjeu majeur pour l’entreprise car il entraîne :</a:t>
             </a:r>
           </a:p>
           <a:p>
             <a:r>
-              <a:rPr lang="fr-FR" dirty="0"/>
+              <a:rPr lang="fr-FR"/>
               <a:t>une perte de compétences,</a:t>
             </a:r>
           </a:p>
           <a:p>
             <a:r>
-              <a:rPr lang="fr-FR" dirty="0"/>
+              <a:rPr lang="fr-FR"/>
               <a:t>un ralentissement des projets,</a:t>
             </a:r>
           </a:p>
           <a:p>
             <a:r>
-              <a:rPr lang="fr-FR" dirty="0"/>
+              <a:rPr lang="fr-FR"/>
               <a:t>et des coûts importants liés au recrutement et à la formation.</a:t>
-            </a:r>
-            <a:br>
-              <a:rPr lang="fr-FR" dirty="0"/>
-            </a:br>
-            <a:endParaRPr lang="fr-FR" dirty="0"/>
-          </a:p>
-          <a:p>
-            <a:r>
-              <a:rPr lang="fr-FR" dirty="0"/>
-              <a:t>L’objectif du projet est donc d’exploiter les données RH afin </a:t>
-            </a:r>
-            <a:r>
-              <a:rPr lang="fr-FR" b="1" dirty="0"/>
-              <a:t>d’identifier les facteurs influençant l’attrition et prédire le risque de départ des employés</a:t>
-            </a:r>
-            <a:r>
-              <a:rPr lang="fr-FR" dirty="0"/>
-              <a:t>.</a:t>
             </a:r>
           </a:p>
         </p:txBody>
@@ -2708,7 +2457,7 @@
           <a:lstStyle/>
           <a:p>
             <a:r>
-              <a:rPr lang="fr-FR" dirty="0"/>
+              <a:rPr lang="fr-FR"/>
               <a:t>Dans cette seconde partie, nous allons présenter les différentes sources de données utilisées dans le projet.</a:t>
             </a:r>
           </a:p>
@@ -2795,105 +2544,21 @@
           <a:lstStyle/>
           <a:p>
             <a:r>
-              <a:rPr lang="fr-FR" dirty="0"/>
+              <a:rPr lang="fr-FR"/>
               <a:t>Quatre sources principales nous ont été fournies.</a:t>
             </a:r>
-            <a:br>
-              <a:rPr lang="fr-FR" dirty="0"/>
-            </a:br>
-            <a:endParaRPr lang="fr-FR" dirty="0"/>
-          </a:p>
-          <a:p>
-            <a:r>
-              <a:rPr lang="fr-FR" dirty="0"/>
-              <a:t>Premièrement, le fichier </a:t>
-            </a:r>
-            <a:r>
-              <a:rPr lang="fr-FR" b="1" dirty="0"/>
-              <a:t>General Data</a:t>
-            </a:r>
-            <a:r>
-              <a:rPr lang="fr-FR" dirty="0"/>
-              <a:t>, contenant les informations principales des employés : âge, salaire, poste ou expérience professionnelle.</a:t>
-            </a:r>
-            <a:br>
-              <a:rPr lang="fr-FR" dirty="0"/>
-            </a:br>
-            <a:endParaRPr lang="fr-FR" dirty="0"/>
-          </a:p>
-          <a:p>
-            <a:r>
-              <a:rPr lang="fr-FR" dirty="0"/>
-              <a:t>Deuxièmement, </a:t>
-            </a:r>
-            <a:r>
-              <a:rPr lang="fr-FR" b="1" dirty="0" err="1"/>
-              <a:t>Employee</a:t>
-            </a:r>
-            <a:r>
-              <a:rPr lang="fr-FR" b="1" dirty="0"/>
-              <a:t> Survey</a:t>
-            </a:r>
-            <a:r>
-              <a:rPr lang="fr-FR" dirty="0"/>
-              <a:t>, une enquête interne mesurant la satisfaction et l’équilibre vie professionnelle / vie personnelle.</a:t>
-            </a:r>
-            <a:br>
-              <a:rPr lang="fr-FR" dirty="0"/>
-            </a:br>
-            <a:endParaRPr lang="fr-FR" dirty="0"/>
-          </a:p>
-          <a:p>
-            <a:r>
-              <a:rPr lang="fr-FR" dirty="0"/>
-              <a:t>Troisièmement, </a:t>
-            </a:r>
-            <a:r>
-              <a:rPr lang="fr-FR" b="1" dirty="0"/>
-              <a:t>Manager Survey</a:t>
-            </a:r>
-            <a:r>
-              <a:rPr lang="fr-FR" dirty="0"/>
-              <a:t>, regroupant les évaluations réalisées par les managers concernant la performance et l’implication.</a:t>
-            </a:r>
-            <a:br>
-              <a:rPr lang="fr-FR" dirty="0"/>
-            </a:br>
-            <a:endParaRPr lang="fr-FR" dirty="0"/>
-          </a:p>
-          <a:p>
-            <a:r>
-              <a:rPr lang="fr-FR" dirty="0"/>
-              <a:t>Enfin, les données </a:t>
-            </a:r>
-            <a:r>
-              <a:rPr lang="fr-FR" b="1" dirty="0"/>
-              <a:t>In/Out Time</a:t>
-            </a:r>
-            <a:r>
-              <a:rPr lang="fr-FR" dirty="0"/>
-              <a:t>, issues des badgeuses, représentant les horaires journaliers de présence sur </a:t>
-            </a:r>
-            <a:r>
-              <a:rPr lang="fr-FR" b="1" dirty="0"/>
-              <a:t>262 jours ouvrés</a:t>
-            </a:r>
-            <a:r>
-              <a:rPr lang="fr-FR" dirty="0"/>
-              <a:t>.</a:t>
-            </a:r>
-          </a:p>
-          <a:p>
-            <a:r>
-              <a:rPr lang="fr-FR" dirty="0"/>
+          </a:p>
+          <a:p>
+            <a:r>
+              <a:rPr lang="fr-FR"/>
               <a:t>Au total, cela représente </a:t>
             </a:r>
             <a:r>
-              <a:rPr lang="fr-FR" b="1" dirty="0"/>
+              <a:rPr lang="fr-FR" b="1"/>
               <a:t>4 410 employés pour 293 variables brutes</a:t>
             </a:r>
             <a:r>
-              <a:rPr lang="fr-FR" dirty="0"/>
+              <a:rPr lang="fr-FR"/>
               <a:t>.</a:t>
             </a:r>
           </a:p>
@@ -2980,25 +2645,13 @@
           <a:lstStyle/>
           <a:p>
             <a:r>
-              <a:rPr lang="fr-FR" dirty="0"/>
+              <a:rPr lang="fr-FR"/>
               <a:t>Cette étape consiste à analyser la qualité initiale des données.</a:t>
             </a:r>
           </a:p>
           <a:p>
             <a:r>
-              <a:rPr lang="fr-FR" dirty="0"/>
-              <a:t>Certaines valeurs manquantes apparaissent principalement dans les enquêtes de satisfaction, car la participation des employés n’était pas obligatoire.</a:t>
-            </a:r>
-          </a:p>
-          <a:p>
-            <a:r>
-              <a:rPr lang="fr-FR" dirty="0"/>
-              <a:t>Nous avons donc identifié puis traité ces valeurs afin d’éviter toute dégradation des modèles futurs.</a:t>
-            </a:r>
-          </a:p>
-          <a:p>
-            <a:r>
-              <a:rPr lang="fr-FR" dirty="0"/>
+              <a:rPr lang="fr-FR"/>
               <a:t>Les choix d’imputation seront détaillés dans la phase de préparation des données.</a:t>
             </a:r>
           </a:p>
@@ -3085,80 +2738,18 @@
           <a:lstStyle/>
           <a:p>
             <a:r>
-              <a:rPr lang="fr-FR" dirty="0"/>
+              <a:rPr lang="fr-FR"/>
               <a:t>Nous avons ensuite réalisé une analyse statistique des principales variables numériques.</a:t>
             </a:r>
-            <a:br>
-              <a:rPr lang="fr-FR" dirty="0"/>
-            </a:br>
-            <a:endParaRPr lang="fr-FR" dirty="0"/>
-          </a:p>
-          <a:p>
-            <a:r>
-              <a:rPr lang="fr-FR" dirty="0"/>
-              <a:t>On observe notamment :</a:t>
-            </a:r>
-          </a:p>
-          <a:p>
-            <a:r>
-              <a:rPr lang="fr-FR" dirty="0"/>
-              <a:t>un âge moyen d’environ </a:t>
-            </a:r>
-            <a:r>
-              <a:rPr lang="fr-FR" b="1" dirty="0"/>
-              <a:t>37 ans</a:t>
-            </a:r>
-            <a:r>
-              <a:rPr lang="fr-FR" dirty="0"/>
-              <a:t>,</a:t>
-            </a:r>
-          </a:p>
-          <a:p>
-            <a:r>
-              <a:rPr lang="fr-FR" dirty="0"/>
-              <a:t>un revenu mensuel très dispersé,</a:t>
-            </a:r>
-          </a:p>
-          <a:p>
-            <a:r>
-              <a:rPr lang="fr-FR" dirty="0"/>
-              <a:t>une ancienneté moyenne proche de </a:t>
-            </a:r>
-            <a:r>
-              <a:rPr lang="fr-FR" b="1" dirty="0"/>
-              <a:t>7 ans</a:t>
-            </a:r>
-            <a:r>
-              <a:rPr lang="fr-FR" dirty="0"/>
-              <a:t>,</a:t>
-            </a:r>
-          </a:p>
-          <a:p>
-            <a:r>
-              <a:rPr lang="fr-FR" dirty="0"/>
-              <a:t>et une distance domicile-travail moyenne de </a:t>
-            </a:r>
-            <a:r>
-              <a:rPr lang="fr-FR" b="1" dirty="0"/>
-              <a:t>9 km</a:t>
-            </a:r>
-            <a:r>
-              <a:rPr lang="fr-FR" dirty="0"/>
-              <a:t>.</a:t>
-            </a:r>
-            <a:br>
-              <a:rPr lang="fr-FR" dirty="0"/>
-            </a:br>
-            <a:endParaRPr lang="fr-FR" dirty="0"/>
-          </a:p>
-          <a:p>
-            <a:r>
-              <a:rPr lang="fr-FR" dirty="0"/>
+          </a:p>
+          <a:p>
+            <a:r>
+              <a:rPr lang="fr-FR"/>
               <a:t>Cette analyse permet de mieux comprendre la structure globale de la population étudiée avant toute phase de modélisation.</a:t>
             </a:r>
           </a:p>
           <a:p>
-            <a:endParaRPr lang="fr-FR" dirty="0"/>
+            <a:endParaRPr lang="fr-FR"/>
           </a:p>
         </p:txBody>
       </p:sp>
@@ -3243,92 +2834,18 @@
           <a:lstStyle/>
           <a:p>
             <a:r>
-              <a:rPr lang="fr-FR" dirty="0"/>
+              <a:rPr lang="fr-FR"/>
               <a:t>Nous avons également étudié la répartition des variables qualitatives.</a:t>
             </a:r>
           </a:p>
           <a:p>
-            <a:endParaRPr lang="fr-FR" dirty="0"/>
-          </a:p>
-          <a:p>
-            <a:r>
-              <a:rPr lang="fr-FR" dirty="0"/>
-              <a:t>Le </a:t>
-            </a:r>
-            <a:r>
-              <a:rPr lang="fr-FR" dirty="0" err="1"/>
-              <a:t>dataset</a:t>
-            </a:r>
-            <a:r>
-              <a:rPr lang="fr-FR" dirty="0"/>
-              <a:t> montre :</a:t>
-            </a:r>
-          </a:p>
-          <a:p>
-            <a:r>
-              <a:rPr lang="fr-FR" dirty="0"/>
-              <a:t>un taux d’attrition de </a:t>
-            </a:r>
-            <a:r>
-              <a:rPr lang="fr-FR" b="1" dirty="0"/>
-              <a:t>16,1 %</a:t>
-            </a:r>
-            <a:r>
-              <a:rPr lang="fr-FR" dirty="0"/>
-              <a:t>,</a:t>
-            </a:r>
-          </a:p>
-          <a:p>
-            <a:r>
-              <a:rPr lang="fr-FR" dirty="0"/>
-              <a:t>une majorité d’employés travaillant en </a:t>
-            </a:r>
-            <a:r>
-              <a:rPr lang="fr-FR" b="1" dirty="0"/>
-              <a:t>R&amp;D</a:t>
-            </a:r>
-            <a:r>
-              <a:rPr lang="fr-FR" dirty="0"/>
-              <a:t>,</a:t>
-            </a:r>
-          </a:p>
-          <a:p>
-            <a:r>
-              <a:rPr lang="fr-FR" dirty="0"/>
-              <a:t>une population composée d’environ </a:t>
-            </a:r>
-            <a:r>
-              <a:rPr lang="fr-FR" b="1" dirty="0"/>
-              <a:t>60 % d’hommes</a:t>
-            </a:r>
-            <a:r>
-              <a:rPr lang="fr-FR" dirty="0"/>
-              <a:t>,</a:t>
-            </a:r>
-          </a:p>
-          <a:p>
-            <a:r>
-              <a:rPr lang="fr-FR" dirty="0"/>
-              <a:t>une proportion importante d’employés mariés,</a:t>
-            </a:r>
-          </a:p>
-          <a:p>
-            <a:endParaRPr lang="fr-FR" dirty="0"/>
-          </a:p>
-          <a:p>
-            <a:r>
-              <a:rPr lang="fr-FR" dirty="0"/>
-              <a:t>et des déplacements professionnels majoritairement occasionnels.</a:t>
-            </a:r>
-          </a:p>
-          <a:p>
-            <a:r>
-              <a:rPr lang="fr-FR" dirty="0"/>
+            <a:r>
+              <a:rPr lang="fr-FR"/>
               <a:t>Cette étape permet d’identifier les premières tendances comportementales présentes dans les données.</a:t>
             </a:r>
           </a:p>
           <a:p>
-            <a:endParaRPr lang="fr-FR" dirty="0"/>
+            <a:endParaRPr lang="fr-FR"/>
           </a:p>
         </p:txBody>
       </p:sp>
@@ -8176,7 +7693,7 @@
               </a:spcAft>
             </a:pPr>
             <a:r>
-              <a:rPr sz="1400" b="0" dirty="0" err="1">
+              <a:rPr sz="1400" b="0" err="1">
                 <a:solidFill>
                   <a:srgbClr val="D1D5DB"/>
                 </a:solidFill>
@@ -8185,7 +7702,7 @@
               <a:t>Médiane</a:t>
             </a:r>
             <a:r>
-              <a:rPr sz="1400" b="0" dirty="0">
+              <a:rPr sz="1400" b="0">
                 <a:solidFill>
                   <a:srgbClr val="D1D5DB"/>
                 </a:solidFill>
@@ -8194,7 +7711,7 @@
               <a:t> pour </a:t>
             </a:r>
             <a:r>
-              <a:rPr sz="1400" b="0" dirty="0" err="1">
+              <a:rPr sz="1400" b="0" err="1">
                 <a:solidFill>
                   <a:srgbClr val="D1D5DB"/>
                 </a:solidFill>
@@ -8203,7 +7720,7 @@
               <a:t>numériques</a:t>
             </a:r>
             <a:r>
-              <a:rPr lang="fr-FR" sz="1400" b="0" dirty="0">
+              <a:rPr lang="fr-FR" sz="1400" b="0">
                 <a:solidFill>
                   <a:srgbClr val="D1D5DB"/>
                 </a:solidFill>
@@ -8211,7 +7728,7 @@
               </a:rPr>
               <a:t>, mode pour catégorielles</a:t>
             </a:r>
-            <a:endParaRPr sz="1400" b="0" dirty="0">
+            <a:endParaRPr sz="1400" b="0">
               <a:solidFill>
                 <a:srgbClr val="D1D5DB"/>
               </a:solidFill>
@@ -10952,8 +10469,8 @@
         </p:nvSpPr>
         <p:spPr>
           <a:xfrm>
-            <a:off x="2353868" y="5958475"/>
-            <a:ext cx="3791359" cy="315984"/>
+            <a:off x="2346053" y="5956145"/>
+            <a:ext cx="3945332" cy="315984"/>
           </a:xfrm>
           <a:prstGeom prst="rect">
             <a:avLst/>
@@ -10961,7 +10478,7 @@
           <a:noFill/>
         </p:spPr>
         <p:txBody>
-          <a:bodyPr wrap="none" lIns="73152" tIns="54864" rIns="73152" bIns="54864" anchor="ctr">
+          <a:bodyPr wrap="square" lIns="73152" tIns="54864" rIns="73152" bIns="54864" anchor="ctr">
             <a:spAutoFit/>
           </a:bodyPr>
           <a:lstStyle/>
@@ -10994,168 +10511,6 @@
                 <a:latin typeface="Roboto"/>
               </a:rPr>
               <a:t>atio 16% Attrition conservé dans train et test</a:t>
-            </a:r>
-          </a:p>
-        </p:txBody>
-      </p:sp>
-      <p:sp>
-        <p:nvSpPr>
-          <p:cNvPr id="11" name="Rectangle 10">
-            <a:extLst>
-              <a:ext uri="{FF2B5EF4-FFF2-40B4-BE49-F238E27FC236}">
-                <a16:creationId xmlns:a16="http://schemas.microsoft.com/office/drawing/2014/main" id="{8F93A183-BA60-80B4-E51F-48E1CD1424A5}"/>
-              </a:ext>
-            </a:extLst>
-          </p:cNvPr>
-          <p:cNvSpPr/>
-          <p:nvPr/>
-        </p:nvSpPr>
-        <p:spPr>
-          <a:xfrm>
-            <a:off x="6143634" y="5967692"/>
-            <a:ext cx="9524" cy="304800"/>
-          </a:xfrm>
-          <a:prstGeom prst="rect">
-            <a:avLst/>
-          </a:prstGeom>
-          <a:solidFill>
-            <a:srgbClr val="FFFFFF">
-              <a:alpha val="30000"/>
-            </a:srgbClr>
-          </a:solidFill>
-          <a:ln>
-            <a:noFill/>
-          </a:ln>
-        </p:spPr>
-        <p:style>
-          <a:lnRef idx="1">
-            <a:schemeClr val="accent1"/>
-          </a:lnRef>
-          <a:fillRef idx="3">
-            <a:schemeClr val="accent1"/>
-          </a:fillRef>
-          <a:effectRef idx="2">
-            <a:schemeClr val="accent1"/>
-          </a:effectRef>
-          <a:fontRef idx="minor">
-            <a:schemeClr val="lt1"/>
-          </a:fontRef>
-        </p:style>
-        <p:txBody>
-          <a:bodyPr rtlCol="0" anchor="ctr"/>
-          <a:lstStyle/>
-          <a:p>
-            <a:pPr algn="ctr"/>
-            <a:endParaRPr/>
-          </a:p>
-        </p:txBody>
-      </p:sp>
-      <p:pic>
-        <p:nvPicPr>
-          <p:cNvPr id="12" name="Picture 10" descr="image.png">
-            <a:extLst>
-              <a:ext uri="{FF2B5EF4-FFF2-40B4-BE49-F238E27FC236}">
-                <a16:creationId xmlns:a16="http://schemas.microsoft.com/office/drawing/2014/main" id="{18AB5207-5DEA-5C6A-3D6D-1E1A420D6AA9}"/>
-              </a:ext>
-            </a:extLst>
-          </p:cNvPr>
-          <p:cNvPicPr>
-            <a:picLocks noChangeAspect="1"/>
-          </p:cNvPicPr>
-          <p:nvPr/>
-        </p:nvPicPr>
-        <p:blipFill>
-          <a:blip r:embed="rId5">
-            <a:alphaModFix/>
-          </a:blip>
-          <a:stretch>
-            <a:fillRect/>
-          </a:stretch>
-        </p:blipFill>
-        <p:spPr>
-          <a:xfrm>
-            <a:off x="6457952" y="6030445"/>
-            <a:ext cx="190495" cy="179294"/>
-          </a:xfrm>
-          <a:prstGeom prst="rect">
-            <a:avLst/>
-          </a:prstGeom>
-        </p:spPr>
-      </p:pic>
-      <p:sp>
-        <p:nvSpPr>
-          <p:cNvPr id="13" name="TextBox 11">
-            <a:extLst>
-              <a:ext uri="{FF2B5EF4-FFF2-40B4-BE49-F238E27FC236}">
-                <a16:creationId xmlns:a16="http://schemas.microsoft.com/office/drawing/2014/main" id="{46256678-6E33-FC1A-CDDA-970B02D244EE}"/>
-              </a:ext>
-            </a:extLst>
-          </p:cNvPr>
-          <p:cNvSpPr txBox="1"/>
-          <p:nvPr/>
-        </p:nvSpPr>
-        <p:spPr>
-          <a:xfrm>
-            <a:off x="6724645" y="5962102"/>
-            <a:ext cx="3461140" cy="315984"/>
-          </a:xfrm>
-          <a:prstGeom prst="rect">
-            <a:avLst/>
-          </a:prstGeom>
-          <a:noFill/>
-        </p:spPr>
-        <p:txBody>
-          <a:bodyPr wrap="none" lIns="73152" tIns="54864" rIns="73152" bIns="54864" anchor="ctr">
-            <a:spAutoFit/>
-          </a:bodyPr>
-          <a:lstStyle/>
-          <a:p>
-            <a:pPr algn="l">
-              <a:lnSpc>
-                <a:spcPts val="1560"/>
-              </a:lnSpc>
-              <a:spcBef>
-                <a:spcPts val="0"/>
-              </a:spcBef>
-              <a:spcAft>
-                <a:spcPts val="0"/>
-              </a:spcAft>
-            </a:pPr>
-            <a:r>
-              <a:rPr lang="fr-FR" sz="1400" b="0" err="1">
-                <a:solidFill>
-                  <a:srgbClr val="FFFFFF"/>
-                </a:solidFill>
-                <a:latin typeface="Roboto"/>
-              </a:rPr>
-              <a:t>StandardScaler</a:t>
-            </a:r>
-            <a:r>
-              <a:rPr lang="fr-FR" sz="1400" b="0">
-                <a:solidFill>
-                  <a:srgbClr val="FFFFFF"/>
-                </a:solidFill>
-                <a:latin typeface="Roboto"/>
-              </a:rPr>
-              <a:t> fit </a:t>
-            </a:r>
-            <a:r>
-              <a:rPr lang="fr-FR" sz="1400" b="0" err="1">
-                <a:solidFill>
-                  <a:srgbClr val="FFFFFF"/>
-                </a:solidFill>
-                <a:latin typeface="Roboto"/>
-              </a:rPr>
-              <a:t>uniquement</a:t>
-            </a:r>
-            <a:r>
-              <a:rPr lang="fr-FR" sz="1400" b="0">
-                <a:solidFill>
-                  <a:srgbClr val="FFFFFF"/>
-                </a:solidFill>
-                <a:latin typeface="Roboto"/>
-              </a:rPr>
-              <a:t> sur le train</a:t>
             </a:r>
           </a:p>
         </p:txBody>
@@ -11707,610 +11062,6 @@
           </a:p>
         </p:txBody>
       </p:sp>
-      <p:sp>
-        <p:nvSpPr>
-          <p:cNvPr id="4" name="Rectangle 1">
-            <a:extLst>
-              <a:ext uri="{FF2B5EF4-FFF2-40B4-BE49-F238E27FC236}">
-                <a16:creationId xmlns:a16="http://schemas.microsoft.com/office/drawing/2014/main" id="{D19FAC69-84B5-A64B-C411-E8E0E74D3EBA}"/>
-              </a:ext>
-            </a:extLst>
-          </p:cNvPr>
-          <p:cNvSpPr>
-            <a:spLocks noChangeArrowheads="1"/>
-          </p:cNvSpPr>
-          <p:nvPr/>
-        </p:nvSpPr>
-        <p:spPr bwMode="auto">
-          <a:xfrm>
-            <a:off x="0" y="0"/>
-            <a:ext cx="1681163" cy="0"/>
-          </a:xfrm>
-          <a:prstGeom prst="rect">
-            <a:avLst/>
-          </a:prstGeom>
-          <a:noFill/>
-          <a:ln>
-            <a:noFill/>
-          </a:ln>
-          <a:effectLst/>
-          <a:extLst>
-            <a:ext uri="{909E8E84-426E-40DD-AFC4-6F175D3DCCD1}">
-              <a14:hiddenFill xmlns:a14="http://schemas.microsoft.com/office/drawing/2010/main">
-                <a:solidFill>
-                  <a:schemeClr val="accent1"/>
-                </a:solidFill>
-              </a14:hiddenFill>
-            </a:ext>
-            <a:ext uri="{91240B29-F687-4F45-9708-019B960494DF}">
-              <a14:hiddenLine xmlns:a14="http://schemas.microsoft.com/office/drawing/2010/main" w="9525">
-                <a:solidFill>
-                  <a:schemeClr val="tx1"/>
-                </a:solidFill>
-                <a:miter lim="800000"/>
-                <a:headEnd/>
-                <a:tailEnd/>
-              </a14:hiddenLine>
-            </a:ext>
-            <a:ext uri="{AF507438-7753-43E0-B8FC-AC1667EBCBE1}">
-              <a14:hiddenEffects xmlns:a14="http://schemas.microsoft.com/office/drawing/2010/main">
-                <a:effectLst>
-                  <a:outerShdw dist="35921" dir="2700000" algn="ctr" rotWithShape="0">
-                    <a:schemeClr val="bg2"/>
-                  </a:outerShdw>
-                </a:effectLst>
-              </a14:hiddenEffects>
-            </a:ext>
-          </a:extLst>
-        </p:spPr>
-        <p:txBody>
-          <a:bodyPr vert="horz" wrap="none" lIns="0" tIns="0" rIns="0" bIns="0" numCol="1" anchor="ctr" anchorCtr="0" compatLnSpc="1">
-            <a:prstTxWarp prst="textNoShape">
-              <a:avLst/>
-            </a:prstTxWarp>
-            <a:spAutoFit/>
-          </a:bodyPr>
-          <a:lstStyle>
-            <a:lvl1pPr eaLnBrk="0" fontAlgn="base" hangingPunct="0">
-              <a:spcBef>
-                <a:spcPct val="0"/>
-              </a:spcBef>
-              <a:spcAft>
-                <a:spcPct val="0"/>
-              </a:spcAft>
-              <a:defRPr>
-                <a:solidFill>
-                  <a:schemeClr val="tx1"/>
-                </a:solidFill>
-                <a:latin typeface="Arial" panose="020B0604020202020204" pitchFamily="34" charset="0"/>
-              </a:defRPr>
-            </a:lvl1pPr>
-            <a:lvl2pPr eaLnBrk="0" fontAlgn="base" hangingPunct="0">
-              <a:spcBef>
-                <a:spcPct val="0"/>
-              </a:spcBef>
-              <a:spcAft>
-                <a:spcPct val="0"/>
-              </a:spcAft>
-              <a:defRPr>
-                <a:solidFill>
-                  <a:schemeClr val="tx1"/>
-                </a:solidFill>
-                <a:latin typeface="Arial" panose="020B0604020202020204" pitchFamily="34" charset="0"/>
-              </a:defRPr>
-            </a:lvl2pPr>
-            <a:lvl3pPr eaLnBrk="0" fontAlgn="base" hangingPunct="0">
-              <a:spcBef>
-                <a:spcPct val="0"/>
-              </a:spcBef>
-              <a:spcAft>
-                <a:spcPct val="0"/>
-              </a:spcAft>
-              <a:defRPr>
-                <a:solidFill>
-                  <a:schemeClr val="tx1"/>
-                </a:solidFill>
-                <a:latin typeface="Arial" panose="020B0604020202020204" pitchFamily="34" charset="0"/>
-              </a:defRPr>
-            </a:lvl3pPr>
-            <a:lvl4pPr eaLnBrk="0" fontAlgn="base" hangingPunct="0">
-              <a:spcBef>
-                <a:spcPct val="0"/>
-              </a:spcBef>
-              <a:spcAft>
-                <a:spcPct val="0"/>
-              </a:spcAft>
-              <a:defRPr>
-                <a:solidFill>
-                  <a:schemeClr val="tx1"/>
-                </a:solidFill>
-                <a:latin typeface="Arial" panose="020B0604020202020204" pitchFamily="34" charset="0"/>
-              </a:defRPr>
-            </a:lvl4pPr>
-            <a:lvl5pPr eaLnBrk="0" fontAlgn="base" hangingPunct="0">
-              <a:spcBef>
-                <a:spcPct val="0"/>
-              </a:spcBef>
-              <a:spcAft>
-                <a:spcPct val="0"/>
-              </a:spcAft>
-              <a:defRPr>
-                <a:solidFill>
-                  <a:schemeClr val="tx1"/>
-                </a:solidFill>
-                <a:latin typeface="Arial" panose="020B0604020202020204" pitchFamily="34" charset="0"/>
-              </a:defRPr>
-            </a:lvl5pPr>
-            <a:lvl6pPr eaLnBrk="0" fontAlgn="base" hangingPunct="0">
-              <a:spcBef>
-                <a:spcPct val="0"/>
-              </a:spcBef>
-              <a:spcAft>
-                <a:spcPct val="0"/>
-              </a:spcAft>
-              <a:defRPr>
-                <a:solidFill>
-                  <a:schemeClr val="tx1"/>
-                </a:solidFill>
-                <a:latin typeface="Arial" panose="020B0604020202020204" pitchFamily="34" charset="0"/>
-              </a:defRPr>
-            </a:lvl6pPr>
-            <a:lvl7pPr eaLnBrk="0" fontAlgn="base" hangingPunct="0">
-              <a:spcBef>
-                <a:spcPct val="0"/>
-              </a:spcBef>
-              <a:spcAft>
-                <a:spcPct val="0"/>
-              </a:spcAft>
-              <a:defRPr>
-                <a:solidFill>
-                  <a:schemeClr val="tx1"/>
-                </a:solidFill>
-                <a:latin typeface="Arial" panose="020B0604020202020204" pitchFamily="34" charset="0"/>
-              </a:defRPr>
-            </a:lvl7pPr>
-            <a:lvl8pPr eaLnBrk="0" fontAlgn="base" hangingPunct="0">
-              <a:spcBef>
-                <a:spcPct val="0"/>
-              </a:spcBef>
-              <a:spcAft>
-                <a:spcPct val="0"/>
-              </a:spcAft>
-              <a:defRPr>
-                <a:solidFill>
-                  <a:schemeClr val="tx1"/>
-                </a:solidFill>
-                <a:latin typeface="Arial" panose="020B0604020202020204" pitchFamily="34" charset="0"/>
-              </a:defRPr>
-            </a:lvl8pPr>
-            <a:lvl9pPr eaLnBrk="0" fontAlgn="base" hangingPunct="0">
-              <a:spcBef>
-                <a:spcPct val="0"/>
-              </a:spcBef>
-              <a:spcAft>
-                <a:spcPct val="0"/>
-              </a:spcAft>
-              <a:defRPr>
-                <a:solidFill>
-                  <a:schemeClr val="tx1"/>
-                </a:solidFill>
-                <a:latin typeface="Arial" panose="020B0604020202020204" pitchFamily="34" charset="0"/>
-              </a:defRPr>
-            </a:lvl9pPr>
-          </a:lstStyle>
-          <a:p>
-            <a:pPr marL="0" marR="0" lvl="0" indent="0" algn="l" defTabSz="914400" rtl="0" eaLnBrk="0" fontAlgn="base" latinLnBrk="0" hangingPunct="0">
-              <a:lnSpc>
-                <a:spcPct val="100000"/>
-              </a:lnSpc>
-              <a:spcBef>
-                <a:spcPct val="0"/>
-              </a:spcBef>
-              <a:spcAft>
-                <a:spcPct val="0"/>
-              </a:spcAft>
-              <a:buClrTx/>
-              <a:buSzTx/>
-              <a:buFontTx/>
-              <a:buNone/>
-              <a:tabLst/>
-            </a:pPr>
-            <a:endParaRPr kumimoji="0" lang="fr-FR" altLang="fr-FR" sz="1800" b="0" i="0" u="none" strike="noStrike" cap="none" normalizeH="0" baseline="0">
-              <a:ln>
-                <a:noFill/>
-              </a:ln>
-              <a:solidFill>
-                <a:schemeClr val="tx1"/>
-              </a:solidFill>
-              <a:effectLst/>
-              <a:latin typeface="Arial" panose="020B0604020202020204" pitchFamily="34" charset="0"/>
-            </a:endParaRPr>
-          </a:p>
-          <a:p>
-            <a:pPr marL="0" marR="0" lvl="0" indent="0" algn="l" defTabSz="914400" rtl="0" eaLnBrk="0" fontAlgn="base" latinLnBrk="0" hangingPunct="0">
-              <a:lnSpc>
-                <a:spcPct val="100000"/>
-              </a:lnSpc>
-              <a:spcBef>
-                <a:spcPct val="0"/>
-              </a:spcBef>
-              <a:spcAft>
-                <a:spcPct val="0"/>
-              </a:spcAft>
-              <a:buClrTx/>
-              <a:buSzTx/>
-              <a:buFontTx/>
-              <a:buAutoNum type="arabicPeriod"/>
-              <a:tabLst/>
-            </a:pPr>
-            <a:r>
-              <a:rPr kumimoji="0" lang="fr-FR" altLang="fr-FR" sz="900" b="1" i="0" u="none" strike="noStrike" cap="none" normalizeH="0" baseline="0">
-                <a:ln>
-                  <a:noFill/>
-                </a:ln>
-                <a:solidFill>
-                  <a:schemeClr val="tx1"/>
-                </a:solidFill>
-                <a:effectLst/>
-                <a:latin typeface="Arial" panose="020B0604020202020204" pitchFamily="34" charset="0"/>
-              </a:rPr>
-              <a:t>Méthodologie IA</a:t>
-            </a:r>
-            <a:endParaRPr kumimoji="0" lang="fr-FR" altLang="fr-FR" sz="900" b="0" i="0" u="none" strike="noStrike" cap="none" normalizeH="0" baseline="0">
-              <a:ln>
-                <a:noFill/>
-              </a:ln>
-              <a:solidFill>
-                <a:schemeClr val="tx1"/>
-              </a:solidFill>
-              <a:effectLst/>
-              <a:latin typeface="Arial" panose="020B0604020202020204" pitchFamily="34" charset="0"/>
-            </a:endParaRPr>
-          </a:p>
-          <a:p>
-            <a:pPr marL="0" marR="0" lvl="0" indent="0" algn="l" defTabSz="914400" rtl="0" eaLnBrk="0" fontAlgn="base" latinLnBrk="0" hangingPunct="0">
-              <a:lnSpc>
-                <a:spcPct val="100000"/>
-              </a:lnSpc>
-              <a:spcBef>
-                <a:spcPct val="0"/>
-              </a:spcBef>
-              <a:spcAft>
-                <a:spcPct val="0"/>
-              </a:spcAft>
-              <a:buClrTx/>
-              <a:buSzTx/>
-              <a:buFontTx/>
-              <a:buNone/>
-              <a:tabLst/>
-            </a:pPr>
-            <a:br>
-              <a:rPr kumimoji="0" lang="fr-FR" altLang="fr-FR" sz="900" b="0" i="0" u="none" strike="noStrike" cap="none" normalizeH="0" baseline="0">
-                <a:ln>
-                  <a:noFill/>
-                </a:ln>
-                <a:solidFill>
-                  <a:srgbClr val="CCCCCC"/>
-                </a:solidFill>
-                <a:effectLst/>
-                <a:latin typeface="Segoe WPC"/>
-              </a:rPr>
-            </a:br>
-            <a:endParaRPr kumimoji="0" lang="fr-FR" altLang="fr-FR" sz="1800" b="0" i="0" u="none" strike="noStrike" cap="none" normalizeH="0" baseline="0">
-              <a:ln>
-                <a:noFill/>
-              </a:ln>
-              <a:solidFill>
-                <a:schemeClr val="tx1"/>
-              </a:solidFill>
-              <a:effectLst/>
-              <a:latin typeface="Arial" panose="020B0604020202020204" pitchFamily="34" charset="0"/>
-            </a:endParaRPr>
-          </a:p>
-        </p:txBody>
-      </p:sp>
-      <p:sp>
-        <p:nvSpPr>
-          <p:cNvPr id="10" name="Rectangle 2">
-            <a:extLst>
-              <a:ext uri="{FF2B5EF4-FFF2-40B4-BE49-F238E27FC236}">
-                <a16:creationId xmlns:a16="http://schemas.microsoft.com/office/drawing/2014/main" id="{486C9E98-2F0A-4F04-9CD0-9D7678913991}"/>
-              </a:ext>
-            </a:extLst>
-          </p:cNvPr>
-          <p:cNvSpPr>
-            <a:spLocks noChangeArrowheads="1"/>
-          </p:cNvSpPr>
-          <p:nvPr/>
-        </p:nvSpPr>
-        <p:spPr bwMode="auto">
-          <a:xfrm>
-            <a:off x="152400" y="152400"/>
-            <a:ext cx="1681163" cy="0"/>
-          </a:xfrm>
-          <a:prstGeom prst="rect">
-            <a:avLst/>
-          </a:prstGeom>
-          <a:noFill/>
-          <a:ln>
-            <a:noFill/>
-          </a:ln>
-          <a:effectLst/>
-          <a:extLst>
-            <a:ext uri="{909E8E84-426E-40DD-AFC4-6F175D3DCCD1}">
-              <a14:hiddenFill xmlns:a14="http://schemas.microsoft.com/office/drawing/2010/main">
-                <a:solidFill>
-                  <a:schemeClr val="accent1"/>
-                </a:solidFill>
-              </a14:hiddenFill>
-            </a:ext>
-            <a:ext uri="{91240B29-F687-4F45-9708-019B960494DF}">
-              <a14:hiddenLine xmlns:a14="http://schemas.microsoft.com/office/drawing/2010/main" w="9525">
-                <a:solidFill>
-                  <a:schemeClr val="tx1"/>
-                </a:solidFill>
-                <a:miter lim="800000"/>
-                <a:headEnd/>
-                <a:tailEnd/>
-              </a14:hiddenLine>
-            </a:ext>
-            <a:ext uri="{AF507438-7753-43E0-B8FC-AC1667EBCBE1}">
-              <a14:hiddenEffects xmlns:a14="http://schemas.microsoft.com/office/drawing/2010/main">
-                <a:effectLst>
-                  <a:outerShdw dist="35921" dir="2700000" algn="ctr" rotWithShape="0">
-                    <a:schemeClr val="bg2"/>
-                  </a:outerShdw>
-                </a:effectLst>
-              </a14:hiddenEffects>
-            </a:ext>
-          </a:extLst>
-        </p:spPr>
-        <p:txBody>
-          <a:bodyPr vert="horz" wrap="none" lIns="0" tIns="0" rIns="0" bIns="0" numCol="1" anchor="ctr" anchorCtr="0" compatLnSpc="1">
-            <a:prstTxWarp prst="textNoShape">
-              <a:avLst/>
-            </a:prstTxWarp>
-            <a:spAutoFit/>
-          </a:bodyPr>
-          <a:lstStyle>
-            <a:lvl1pPr eaLnBrk="0" fontAlgn="base" hangingPunct="0">
-              <a:spcBef>
-                <a:spcPct val="0"/>
-              </a:spcBef>
-              <a:spcAft>
-                <a:spcPct val="0"/>
-              </a:spcAft>
-              <a:defRPr>
-                <a:solidFill>
-                  <a:schemeClr val="tx1"/>
-                </a:solidFill>
-                <a:latin typeface="Arial" panose="020B0604020202020204" pitchFamily="34" charset="0"/>
-              </a:defRPr>
-            </a:lvl1pPr>
-            <a:lvl2pPr eaLnBrk="0" fontAlgn="base" hangingPunct="0">
-              <a:spcBef>
-                <a:spcPct val="0"/>
-              </a:spcBef>
-              <a:spcAft>
-                <a:spcPct val="0"/>
-              </a:spcAft>
-              <a:defRPr>
-                <a:solidFill>
-                  <a:schemeClr val="tx1"/>
-                </a:solidFill>
-                <a:latin typeface="Arial" panose="020B0604020202020204" pitchFamily="34" charset="0"/>
-              </a:defRPr>
-            </a:lvl2pPr>
-            <a:lvl3pPr eaLnBrk="0" fontAlgn="base" hangingPunct="0">
-              <a:spcBef>
-                <a:spcPct val="0"/>
-              </a:spcBef>
-              <a:spcAft>
-                <a:spcPct val="0"/>
-              </a:spcAft>
-              <a:defRPr>
-                <a:solidFill>
-                  <a:schemeClr val="tx1"/>
-                </a:solidFill>
-                <a:latin typeface="Arial" panose="020B0604020202020204" pitchFamily="34" charset="0"/>
-              </a:defRPr>
-            </a:lvl3pPr>
-            <a:lvl4pPr eaLnBrk="0" fontAlgn="base" hangingPunct="0">
-              <a:spcBef>
-                <a:spcPct val="0"/>
-              </a:spcBef>
-              <a:spcAft>
-                <a:spcPct val="0"/>
-              </a:spcAft>
-              <a:defRPr>
-                <a:solidFill>
-                  <a:schemeClr val="tx1"/>
-                </a:solidFill>
-                <a:latin typeface="Arial" panose="020B0604020202020204" pitchFamily="34" charset="0"/>
-              </a:defRPr>
-            </a:lvl4pPr>
-            <a:lvl5pPr eaLnBrk="0" fontAlgn="base" hangingPunct="0">
-              <a:spcBef>
-                <a:spcPct val="0"/>
-              </a:spcBef>
-              <a:spcAft>
-                <a:spcPct val="0"/>
-              </a:spcAft>
-              <a:defRPr>
-                <a:solidFill>
-                  <a:schemeClr val="tx1"/>
-                </a:solidFill>
-                <a:latin typeface="Arial" panose="020B0604020202020204" pitchFamily="34" charset="0"/>
-              </a:defRPr>
-            </a:lvl5pPr>
-            <a:lvl6pPr eaLnBrk="0" fontAlgn="base" hangingPunct="0">
-              <a:spcBef>
-                <a:spcPct val="0"/>
-              </a:spcBef>
-              <a:spcAft>
-                <a:spcPct val="0"/>
-              </a:spcAft>
-              <a:defRPr>
-                <a:solidFill>
-                  <a:schemeClr val="tx1"/>
-                </a:solidFill>
-                <a:latin typeface="Arial" panose="020B0604020202020204" pitchFamily="34" charset="0"/>
-              </a:defRPr>
-            </a:lvl6pPr>
-            <a:lvl7pPr eaLnBrk="0" fontAlgn="base" hangingPunct="0">
-              <a:spcBef>
-                <a:spcPct val="0"/>
-              </a:spcBef>
-              <a:spcAft>
-                <a:spcPct val="0"/>
-              </a:spcAft>
-              <a:defRPr>
-                <a:solidFill>
-                  <a:schemeClr val="tx1"/>
-                </a:solidFill>
-                <a:latin typeface="Arial" panose="020B0604020202020204" pitchFamily="34" charset="0"/>
-              </a:defRPr>
-            </a:lvl7pPr>
-            <a:lvl8pPr eaLnBrk="0" fontAlgn="base" hangingPunct="0">
-              <a:spcBef>
-                <a:spcPct val="0"/>
-              </a:spcBef>
-              <a:spcAft>
-                <a:spcPct val="0"/>
-              </a:spcAft>
-              <a:defRPr>
-                <a:solidFill>
-                  <a:schemeClr val="tx1"/>
-                </a:solidFill>
-                <a:latin typeface="Arial" panose="020B0604020202020204" pitchFamily="34" charset="0"/>
-              </a:defRPr>
-            </a:lvl8pPr>
-            <a:lvl9pPr eaLnBrk="0" fontAlgn="base" hangingPunct="0">
-              <a:spcBef>
-                <a:spcPct val="0"/>
-              </a:spcBef>
-              <a:spcAft>
-                <a:spcPct val="0"/>
-              </a:spcAft>
-              <a:defRPr>
-                <a:solidFill>
-                  <a:schemeClr val="tx1"/>
-                </a:solidFill>
-                <a:latin typeface="Arial" panose="020B0604020202020204" pitchFamily="34" charset="0"/>
-              </a:defRPr>
-            </a:lvl9pPr>
-          </a:lstStyle>
-          <a:p>
-            <a:pPr marL="0" marR="0" lvl="0" indent="0" algn="l" defTabSz="914400" rtl="0" eaLnBrk="0" fontAlgn="base" latinLnBrk="0" hangingPunct="0">
-              <a:lnSpc>
-                <a:spcPct val="100000"/>
-              </a:lnSpc>
-              <a:spcBef>
-                <a:spcPct val="0"/>
-              </a:spcBef>
-              <a:spcAft>
-                <a:spcPct val="0"/>
-              </a:spcAft>
-              <a:buClrTx/>
-              <a:buSzTx/>
-              <a:buFontTx/>
-              <a:buNone/>
-              <a:tabLst/>
-            </a:pPr>
-            <a:endParaRPr kumimoji="0" lang="fr-FR" altLang="fr-FR" sz="1800" b="0" i="0" u="none" strike="noStrike" cap="none" normalizeH="0" baseline="0">
-              <a:ln>
-                <a:noFill/>
-              </a:ln>
-              <a:solidFill>
-                <a:schemeClr val="tx1"/>
-              </a:solidFill>
-              <a:effectLst/>
-              <a:latin typeface="Arial" panose="020B0604020202020204" pitchFamily="34" charset="0"/>
-            </a:endParaRPr>
-          </a:p>
-          <a:p>
-            <a:pPr marL="0" marR="0" lvl="0" indent="0" algn="l" defTabSz="914400" rtl="0" eaLnBrk="0" fontAlgn="base" latinLnBrk="0" hangingPunct="0">
-              <a:lnSpc>
-                <a:spcPct val="100000"/>
-              </a:lnSpc>
-              <a:spcBef>
-                <a:spcPct val="0"/>
-              </a:spcBef>
-              <a:spcAft>
-                <a:spcPct val="0"/>
-              </a:spcAft>
-              <a:buClrTx/>
-              <a:buSzTx/>
-              <a:buFontTx/>
-              <a:buAutoNum type="arabicPeriod"/>
-              <a:tabLst/>
-            </a:pPr>
-            <a:r>
-              <a:rPr kumimoji="0" lang="fr-FR" altLang="fr-FR" sz="900" b="1" i="0" u="none" strike="noStrike" cap="none" normalizeH="0" baseline="0">
-                <a:ln>
-                  <a:noFill/>
-                </a:ln>
-                <a:solidFill>
-                  <a:schemeClr val="tx1"/>
-                </a:solidFill>
-                <a:effectLst/>
-                <a:latin typeface="Arial" panose="020B0604020202020204" pitchFamily="34" charset="0"/>
-              </a:rPr>
-              <a:t>Méthodologie IA</a:t>
-            </a:r>
-            <a:endParaRPr kumimoji="0" lang="fr-FR" altLang="fr-FR" sz="900" b="0" i="0" u="none" strike="noStrike" cap="none" normalizeH="0" baseline="0">
-              <a:ln>
-                <a:noFill/>
-              </a:ln>
-              <a:solidFill>
-                <a:schemeClr val="tx1"/>
-              </a:solidFill>
-              <a:effectLst/>
-              <a:latin typeface="Arial" panose="020B0604020202020204" pitchFamily="34" charset="0"/>
-            </a:endParaRPr>
-          </a:p>
-          <a:p>
-            <a:pPr marL="0" marR="0" lvl="0" indent="0" algn="l" defTabSz="914400" rtl="0" eaLnBrk="0" fontAlgn="base" latinLnBrk="0" hangingPunct="0">
-              <a:lnSpc>
-                <a:spcPct val="100000"/>
-              </a:lnSpc>
-              <a:spcBef>
-                <a:spcPct val="0"/>
-              </a:spcBef>
-              <a:spcAft>
-                <a:spcPct val="0"/>
-              </a:spcAft>
-              <a:buClrTx/>
-              <a:buSzTx/>
-              <a:buFontTx/>
-              <a:buNone/>
-              <a:tabLst/>
-            </a:pPr>
-            <a:br>
-              <a:rPr kumimoji="0" lang="fr-FR" altLang="fr-FR" sz="900" b="0" i="0" u="none" strike="noStrike" cap="none" normalizeH="0" baseline="0">
-                <a:ln>
-                  <a:noFill/>
-                </a:ln>
-                <a:solidFill>
-                  <a:srgbClr val="CCCCCC"/>
-                </a:solidFill>
-                <a:effectLst/>
-                <a:latin typeface="Segoe WPC"/>
-              </a:rPr>
-            </a:br>
-            <a:endParaRPr kumimoji="0" lang="fr-FR" altLang="fr-FR" sz="1800" b="0" i="0" u="none" strike="noStrike" cap="none" normalizeH="0" baseline="0">
-              <a:ln>
-                <a:noFill/>
-              </a:ln>
-              <a:solidFill>
-                <a:schemeClr val="tx1"/>
-              </a:solidFill>
-              <a:effectLst/>
-              <a:latin typeface="Arial" panose="020B0604020202020204" pitchFamily="34" charset="0"/>
-            </a:endParaRPr>
-          </a:p>
-        </p:txBody>
-      </p:sp>
     </p:spTree>
   </p:cSld>
   <p:clrMapOvr>
@@ -13843,7 +12594,7 @@
         <p:spPr>
           <a:xfrm>
             <a:off x="6648283" y="4788596"/>
-            <a:ext cx="3844258" cy="328808"/>
+            <a:ext cx="4823693" cy="328808"/>
           </a:xfrm>
           <a:prstGeom prst="rect">
             <a:avLst/>
@@ -13874,7 +12625,25 @@
                 </a:solidFill>
                 <a:latin typeface="Roboto"/>
               </a:rPr>
-              <a:t>Classification • Prédiction du risque de départ</a:t>
+              <a:t>Classification/</a:t>
+            </a:r>
+            <a:r>
+              <a:rPr lang="fr-FR" sz="1400" b="1" err="1">
+                <a:solidFill>
+                  <a:srgbClr val="E1F5FE"/>
+                </a:solidFill>
+                <a:latin typeface="Roboto"/>
+              </a:rPr>
+              <a:t>Regréssion</a:t>
+            </a:r>
+            <a:r>
+              <a:rPr lang="fr-FR" sz="1400" b="1">
+                <a:solidFill>
+                  <a:srgbClr val="E1F5FE"/>
+                </a:solidFill>
+                <a:latin typeface="Roboto"/>
+              </a:rPr>
+              <a:t> • Prédiction du risque de départ</a:t>
             </a:r>
           </a:p>
         </p:txBody>
@@ -15942,7 +14711,7 @@
               </a:spcAft>
             </a:pPr>
             <a:r>
-              <a:rPr lang="fr-FR" sz="2800" b="1" dirty="0">
+              <a:rPr lang="fr-FR" sz="2800" b="1">
                 <a:solidFill>
                   <a:srgbClr val="00BCD4"/>
                 </a:solidFill>
@@ -15950,7 +14719,7 @@
               </a:rPr>
               <a:t>09</a:t>
             </a:r>
-            <a:endParaRPr sz="3200" b="1" dirty="0">
+            <a:endParaRPr sz="3200" b="1">
               <a:solidFill>
                 <a:srgbClr val="00BCD4"/>
               </a:solidFill>
@@ -27251,14 +26020,1753 @@
       </p:grpSpPr>
       <p:sp>
         <p:nvSpPr>
-          <p:cNvPr id="2" name="TextBox 1"/>
+          <p:cNvPr id="3" name="Rounded Rectangle 2">
+            <a:extLst>
+              <a:ext uri="{FF2B5EF4-FFF2-40B4-BE49-F238E27FC236}">
+                <a16:creationId xmlns:a16="http://schemas.microsoft.com/office/drawing/2014/main" id="{1ECA997D-D45A-8B7C-D1CD-6DD020F14D5B}"/>
+              </a:ext>
+            </a:extLst>
+          </p:cNvPr>
+          <p:cNvSpPr/>
+          <p:nvPr/>
+        </p:nvSpPr>
+        <p:spPr>
+          <a:xfrm>
+            <a:off x="609584" y="1114425"/>
+            <a:ext cx="5371965" cy="1657350"/>
+          </a:xfrm>
+          <a:prstGeom prst="roundRect">
+            <a:avLst>
+              <a:gd name="adj" fmla="val 13793"/>
+            </a:avLst>
+          </a:prstGeom>
+          <a:solidFill>
+            <a:srgbClr val="FFFFFF">
+              <a:alpha val="5000"/>
+            </a:srgbClr>
+          </a:solidFill>
+          <a:ln>
+            <a:noFill/>
+          </a:ln>
+        </p:spPr>
+        <p:style>
+          <a:lnRef idx="1">
+            <a:schemeClr val="accent1"/>
+          </a:lnRef>
+          <a:fillRef idx="3">
+            <a:schemeClr val="accent1"/>
+          </a:fillRef>
+          <a:effectRef idx="2">
+            <a:schemeClr val="accent1"/>
+          </a:effectRef>
+          <a:fontRef idx="minor">
+            <a:schemeClr val="lt1"/>
+          </a:fontRef>
+        </p:style>
+        <p:txBody>
+          <a:bodyPr rtlCol="0" anchor="ctr"/>
+          <a:lstStyle/>
+          <a:p>
+            <a:pPr algn="ctr"/>
+            <a:endParaRPr/>
+          </a:p>
+        </p:txBody>
+      </p:sp>
+      <p:sp>
+        <p:nvSpPr>
+          <p:cNvPr id="4" name="Round Same Side Corner Rectangle 3">
+            <a:extLst>
+              <a:ext uri="{FF2B5EF4-FFF2-40B4-BE49-F238E27FC236}">
+                <a16:creationId xmlns:a16="http://schemas.microsoft.com/office/drawing/2014/main" id="{31C36D48-E167-CC2A-174D-466019753571}"/>
+              </a:ext>
+            </a:extLst>
+          </p:cNvPr>
+          <p:cNvSpPr/>
+          <p:nvPr/>
+        </p:nvSpPr>
+        <p:spPr>
+          <a:xfrm rot="16200000">
+            <a:off x="-153051" y="1877060"/>
+            <a:ext cx="1657350" cy="132080"/>
+          </a:xfrm>
+          <a:prstGeom prst="round2SameRect">
+            <a:avLst>
+              <a:gd name="adj1" fmla="val 50000"/>
+              <a:gd name="adj2" fmla="val 0"/>
+            </a:avLst>
+          </a:prstGeom>
+          <a:solidFill>
+            <a:srgbClr val="14B8A6"/>
+          </a:solidFill>
+          <a:ln>
+            <a:noFill/>
+          </a:ln>
+        </p:spPr>
+        <p:style>
+          <a:lnRef idx="1">
+            <a:schemeClr val="accent1"/>
+          </a:lnRef>
+          <a:fillRef idx="3">
+            <a:schemeClr val="accent1"/>
+          </a:fillRef>
+          <a:effectRef idx="2">
+            <a:schemeClr val="accent1"/>
+          </a:effectRef>
+          <a:fontRef idx="minor">
+            <a:schemeClr val="lt1"/>
+          </a:fontRef>
+        </p:style>
+        <p:txBody>
+          <a:bodyPr rtlCol="0" anchor="ctr"/>
+          <a:lstStyle/>
+          <a:p>
+            <a:pPr algn="ctr"/>
+            <a:endParaRPr/>
+          </a:p>
+        </p:txBody>
+      </p:sp>
+      <p:pic>
+        <p:nvPicPr>
+          <p:cNvPr id="5" name="Picture 4" descr="image.png">
+            <a:extLst>
+              <a:ext uri="{FF2B5EF4-FFF2-40B4-BE49-F238E27FC236}">
+                <a16:creationId xmlns:a16="http://schemas.microsoft.com/office/drawing/2014/main" id="{35EF93B1-683E-0509-41BB-0802ED6C3EBC}"/>
+              </a:ext>
+            </a:extLst>
+          </p:cNvPr>
+          <p:cNvPicPr>
+            <a:picLocks noChangeAspect="1"/>
+          </p:cNvPicPr>
+          <p:nvPr/>
+        </p:nvPicPr>
+        <p:blipFill>
+          <a:blip r:embed="rId2">
+            <a:alphaModFix/>
+          </a:blip>
+          <a:stretch>
+            <a:fillRect/>
+          </a:stretch>
+        </p:blipFill>
+        <p:spPr>
+          <a:xfrm>
+            <a:off x="876278" y="1364045"/>
+            <a:ext cx="342891" cy="224658"/>
+          </a:xfrm>
+          <a:prstGeom prst="rect">
+            <a:avLst/>
+          </a:prstGeom>
+        </p:spPr>
+      </p:pic>
+      <p:sp>
+        <p:nvSpPr>
+          <p:cNvPr id="6" name="TextBox 5">
+            <a:extLst>
+              <a:ext uri="{FF2B5EF4-FFF2-40B4-BE49-F238E27FC236}">
+                <a16:creationId xmlns:a16="http://schemas.microsoft.com/office/drawing/2014/main" id="{5314BAA2-76B9-D406-5E3B-32458CC82B51}"/>
+              </a:ext>
+            </a:extLst>
+          </p:cNvPr>
           <p:cNvSpPr txBox="1"/>
           <p:nvPr/>
         </p:nvSpPr>
         <p:spPr>
           <a:xfrm>
+            <a:off x="1371565" y="1284720"/>
+            <a:ext cx="1426929" cy="383310"/>
+          </a:xfrm>
+          <a:prstGeom prst="rect">
+            <a:avLst/>
+          </a:prstGeom>
+          <a:noFill/>
+        </p:spPr>
+        <p:txBody>
+          <a:bodyPr wrap="none" lIns="73152" tIns="54864" rIns="73152" bIns="54864" anchor="ctr">
+            <a:spAutoFit/>
+          </a:bodyPr>
+          <a:lstStyle/>
+          <a:p>
+            <a:pPr algn="l">
+              <a:lnSpc>
+                <a:spcPts val="2340"/>
+              </a:lnSpc>
+              <a:spcBef>
+                <a:spcPts val="0"/>
+              </a:spcBef>
+              <a:spcAft>
+                <a:spcPts val="520"/>
+              </a:spcAft>
+            </a:pPr>
+            <a:r>
+              <a:rPr sz="1600" b="1">
+                <a:solidFill>
+                  <a:srgbClr val="FFFFFF"/>
+                </a:solidFill>
+                <a:latin typeface="Roboto"/>
+              </a:rPr>
+              <a:t>Transparence</a:t>
+            </a:r>
+          </a:p>
+        </p:txBody>
+      </p:sp>
+      <p:sp>
+        <p:nvSpPr>
+          <p:cNvPr id="7" name="TextBox 6">
+            <a:extLst>
+              <a:ext uri="{FF2B5EF4-FFF2-40B4-BE49-F238E27FC236}">
+                <a16:creationId xmlns:a16="http://schemas.microsoft.com/office/drawing/2014/main" id="{9E5AECDA-2E4C-173E-B16F-B579E9442E4A}"/>
+              </a:ext>
+            </a:extLst>
+          </p:cNvPr>
+          <p:cNvSpPr txBox="1"/>
+          <p:nvPr/>
+        </p:nvSpPr>
+        <p:spPr>
+          <a:xfrm>
+            <a:off x="1371565" y="1707512"/>
+            <a:ext cx="4381390" cy="604524"/>
+          </a:xfrm>
+          <a:prstGeom prst="rect">
+            <a:avLst/>
+          </a:prstGeom>
+          <a:noFill/>
+        </p:spPr>
+        <p:txBody>
+          <a:bodyPr wrap="square" lIns="73152" tIns="54864" rIns="73152" bIns="54864" anchor="ctr">
+            <a:spAutoFit/>
+          </a:bodyPr>
+          <a:lstStyle/>
+          <a:p>
+            <a:pPr algn="l">
+              <a:lnSpc>
+                <a:spcPts val="1950"/>
+              </a:lnSpc>
+              <a:spcBef>
+                <a:spcPts val="0"/>
+              </a:spcBef>
+              <a:spcAft>
+                <a:spcPts val="0"/>
+              </a:spcAft>
+            </a:pPr>
+            <a:r>
+              <a:rPr sz="1400" b="0" err="1">
+                <a:solidFill>
+                  <a:srgbClr val="D1D5DB"/>
+                </a:solidFill>
+                <a:latin typeface="Roboto"/>
+              </a:rPr>
+              <a:t>Modèles</a:t>
+            </a:r>
+            <a:r>
+              <a:rPr sz="1400" b="0">
+                <a:solidFill>
+                  <a:srgbClr val="D1D5DB"/>
+                </a:solidFill>
+                <a:latin typeface="Roboto"/>
+              </a:rPr>
+              <a:t> </a:t>
+            </a:r>
+            <a:r>
+              <a:rPr sz="1400" b="0" err="1">
+                <a:solidFill>
+                  <a:srgbClr val="D1D5DB"/>
+                </a:solidFill>
+                <a:latin typeface="Roboto"/>
+              </a:rPr>
+              <a:t>explicables</a:t>
+            </a:r>
+            <a:r>
+              <a:rPr sz="1400" b="0">
+                <a:solidFill>
+                  <a:srgbClr val="D1D5DB"/>
+                </a:solidFill>
+                <a:latin typeface="Roboto"/>
+              </a:rPr>
+              <a:t>, documentation </a:t>
+            </a:r>
+            <a:r>
+              <a:rPr sz="1400" b="0" err="1">
+                <a:solidFill>
+                  <a:srgbClr val="D1D5DB"/>
+                </a:solidFill>
+                <a:latin typeface="Roboto"/>
+              </a:rPr>
+              <a:t>complète</a:t>
+            </a:r>
+            <a:r>
+              <a:rPr sz="1400" b="0">
+                <a:solidFill>
+                  <a:srgbClr val="D1D5DB"/>
+                </a:solidFill>
+                <a:latin typeface="Roboto"/>
+              </a:rPr>
+              <a:t>, </a:t>
+            </a:r>
+            <a:r>
+              <a:rPr sz="1400" b="0" err="1">
+                <a:solidFill>
+                  <a:srgbClr val="D1D5DB"/>
+                </a:solidFill>
+                <a:latin typeface="Roboto"/>
+              </a:rPr>
+              <a:t>corrélation</a:t>
+            </a:r>
+            <a:r>
+              <a:rPr sz="1400" b="0">
+                <a:solidFill>
+                  <a:srgbClr val="D1D5DB"/>
+                </a:solidFill>
+                <a:latin typeface="Roboto"/>
+              </a:rPr>
+              <a:t> ≠ </a:t>
+            </a:r>
+            <a:r>
+              <a:rPr sz="1400" b="0" err="1">
+                <a:solidFill>
+                  <a:srgbClr val="D1D5DB"/>
+                </a:solidFill>
+                <a:latin typeface="Roboto"/>
+              </a:rPr>
+              <a:t>causalité</a:t>
+            </a:r>
+            <a:endParaRPr sz="1400" b="0">
+              <a:solidFill>
+                <a:srgbClr val="D1D5DB"/>
+              </a:solidFill>
+              <a:latin typeface="Roboto"/>
+            </a:endParaRPr>
+          </a:p>
+        </p:txBody>
+      </p:sp>
+      <p:sp>
+        <p:nvSpPr>
+          <p:cNvPr id="8" name="Rounded Rectangle 7">
+            <a:extLst>
+              <a:ext uri="{FF2B5EF4-FFF2-40B4-BE49-F238E27FC236}">
+                <a16:creationId xmlns:a16="http://schemas.microsoft.com/office/drawing/2014/main" id="{3CBC1501-EDC1-FA8E-073B-F0FDA8572244}"/>
+              </a:ext>
+            </a:extLst>
+          </p:cNvPr>
+          <p:cNvSpPr/>
+          <p:nvPr/>
+        </p:nvSpPr>
+        <p:spPr>
+          <a:xfrm>
+            <a:off x="6210144" y="1114425"/>
+            <a:ext cx="5371965" cy="1657350"/>
+          </a:xfrm>
+          <a:prstGeom prst="roundRect">
+            <a:avLst>
+              <a:gd name="adj" fmla="val 13793"/>
+            </a:avLst>
+          </a:prstGeom>
+          <a:solidFill>
+            <a:srgbClr val="FFFFFF">
+              <a:alpha val="5000"/>
+            </a:srgbClr>
+          </a:solidFill>
+          <a:ln>
+            <a:noFill/>
+          </a:ln>
+        </p:spPr>
+        <p:style>
+          <a:lnRef idx="1">
+            <a:schemeClr val="accent1"/>
+          </a:lnRef>
+          <a:fillRef idx="3">
+            <a:schemeClr val="accent1"/>
+          </a:fillRef>
+          <a:effectRef idx="2">
+            <a:schemeClr val="accent1"/>
+          </a:effectRef>
+          <a:fontRef idx="minor">
+            <a:schemeClr val="lt1"/>
+          </a:fontRef>
+        </p:style>
+        <p:txBody>
+          <a:bodyPr rtlCol="0" anchor="ctr"/>
+          <a:lstStyle/>
+          <a:p>
+            <a:pPr algn="ctr"/>
+            <a:endParaRPr/>
+          </a:p>
+        </p:txBody>
+      </p:sp>
+      <p:sp>
+        <p:nvSpPr>
+          <p:cNvPr id="9" name="Round Same Side Corner Rectangle 8">
+            <a:extLst>
+              <a:ext uri="{FF2B5EF4-FFF2-40B4-BE49-F238E27FC236}">
+                <a16:creationId xmlns:a16="http://schemas.microsoft.com/office/drawing/2014/main" id="{F65E2879-F219-026E-49DF-917EF095B492}"/>
+              </a:ext>
+            </a:extLst>
+          </p:cNvPr>
+          <p:cNvSpPr/>
+          <p:nvPr/>
+        </p:nvSpPr>
+        <p:spPr>
+          <a:xfrm rot="16200000">
+            <a:off x="5447509" y="1877060"/>
+            <a:ext cx="1657350" cy="132080"/>
+          </a:xfrm>
+          <a:prstGeom prst="round2SameRect">
+            <a:avLst>
+              <a:gd name="adj1" fmla="val 50000"/>
+              <a:gd name="adj2" fmla="val 0"/>
+            </a:avLst>
+          </a:prstGeom>
+          <a:solidFill>
+            <a:srgbClr val="F97316"/>
+          </a:solidFill>
+          <a:ln>
+            <a:noFill/>
+          </a:ln>
+        </p:spPr>
+        <p:style>
+          <a:lnRef idx="1">
+            <a:schemeClr val="accent1"/>
+          </a:lnRef>
+          <a:fillRef idx="3">
+            <a:schemeClr val="accent1"/>
+          </a:fillRef>
+          <a:effectRef idx="2">
+            <a:schemeClr val="accent1"/>
+          </a:effectRef>
+          <a:fontRef idx="minor">
+            <a:schemeClr val="lt1"/>
+          </a:fontRef>
+        </p:style>
+        <p:txBody>
+          <a:bodyPr rtlCol="0" anchor="ctr"/>
+          <a:lstStyle/>
+          <a:p>
+            <a:pPr algn="ctr"/>
+            <a:endParaRPr/>
+          </a:p>
+        </p:txBody>
+      </p:sp>
+      <p:pic>
+        <p:nvPicPr>
+          <p:cNvPr id="10" name="Picture 9" descr="image.png">
+            <a:extLst>
+              <a:ext uri="{FF2B5EF4-FFF2-40B4-BE49-F238E27FC236}">
+                <a16:creationId xmlns:a16="http://schemas.microsoft.com/office/drawing/2014/main" id="{0B1A5C51-5B1C-F7D9-FE96-8927BC1BCF56}"/>
+              </a:ext>
+            </a:extLst>
+          </p:cNvPr>
+          <p:cNvPicPr>
+            <a:picLocks noChangeAspect="1"/>
+          </p:cNvPicPr>
+          <p:nvPr/>
+        </p:nvPicPr>
+        <p:blipFill>
+          <a:blip r:embed="rId3">
+            <a:alphaModFix/>
+          </a:blip>
+          <a:stretch>
+            <a:fillRect/>
+          </a:stretch>
+        </p:blipFill>
+        <p:spPr>
+          <a:xfrm>
+            <a:off x="6476838" y="1316749"/>
+            <a:ext cx="342891" cy="319251"/>
+          </a:xfrm>
+          <a:prstGeom prst="rect">
+            <a:avLst/>
+          </a:prstGeom>
+        </p:spPr>
+      </p:pic>
+      <p:sp>
+        <p:nvSpPr>
+          <p:cNvPr id="11" name="TextBox 10">
+            <a:extLst>
+              <a:ext uri="{FF2B5EF4-FFF2-40B4-BE49-F238E27FC236}">
+                <a16:creationId xmlns:a16="http://schemas.microsoft.com/office/drawing/2014/main" id="{0D6C5A4F-DFC3-ACE5-4E41-DF30F6E9D273}"/>
+              </a:ext>
+            </a:extLst>
+          </p:cNvPr>
+          <p:cNvSpPr txBox="1"/>
+          <p:nvPr/>
+        </p:nvSpPr>
+        <p:spPr>
+          <a:xfrm>
+            <a:off x="6972125" y="1284720"/>
+            <a:ext cx="1491049" cy="383310"/>
+          </a:xfrm>
+          <a:prstGeom prst="rect">
+            <a:avLst/>
+          </a:prstGeom>
+          <a:noFill/>
+        </p:spPr>
+        <p:txBody>
+          <a:bodyPr wrap="none" lIns="73152" tIns="54864" rIns="73152" bIns="54864" anchor="ctr">
+            <a:spAutoFit/>
+          </a:bodyPr>
+          <a:lstStyle/>
+          <a:p>
+            <a:pPr algn="l">
+              <a:lnSpc>
+                <a:spcPts val="2340"/>
+              </a:lnSpc>
+              <a:spcBef>
+                <a:spcPts val="0"/>
+              </a:spcBef>
+              <a:spcAft>
+                <a:spcPts val="520"/>
+              </a:spcAft>
+            </a:pPr>
+            <a:r>
+              <a:rPr sz="1600" b="1">
+                <a:solidFill>
+                  <a:srgbClr val="FFFFFF"/>
+                </a:solidFill>
+                <a:latin typeface="Roboto"/>
+              </a:rPr>
+              <a:t>Discrimination</a:t>
+            </a:r>
+          </a:p>
+        </p:txBody>
+      </p:sp>
+      <p:sp>
+        <p:nvSpPr>
+          <p:cNvPr id="12" name="TextBox 11">
+            <a:extLst>
+              <a:ext uri="{FF2B5EF4-FFF2-40B4-BE49-F238E27FC236}">
+                <a16:creationId xmlns:a16="http://schemas.microsoft.com/office/drawing/2014/main" id="{7165182E-404C-C024-E65C-E53C40F571CE}"/>
+              </a:ext>
+            </a:extLst>
+          </p:cNvPr>
+          <p:cNvSpPr txBox="1"/>
+          <p:nvPr/>
+        </p:nvSpPr>
+        <p:spPr>
+          <a:xfrm>
+            <a:off x="6972125" y="1722147"/>
+            <a:ext cx="4381390" cy="861005"/>
+          </a:xfrm>
+          <a:prstGeom prst="rect">
+            <a:avLst/>
+          </a:prstGeom>
+          <a:noFill/>
+        </p:spPr>
+        <p:txBody>
+          <a:bodyPr wrap="square" lIns="73152" tIns="54864" rIns="73152" bIns="54864" anchor="ctr">
+            <a:spAutoFit/>
+          </a:bodyPr>
+          <a:lstStyle/>
+          <a:p>
+            <a:pPr algn="l">
+              <a:lnSpc>
+                <a:spcPts val="1950"/>
+              </a:lnSpc>
+              <a:spcBef>
+                <a:spcPts val="0"/>
+              </a:spcBef>
+              <a:spcAft>
+                <a:spcPts val="0"/>
+              </a:spcAft>
+            </a:pPr>
+            <a:r>
+              <a:rPr sz="1400" b="0">
+                <a:solidFill>
+                  <a:srgbClr val="D1D5DB"/>
+                </a:solidFill>
+                <a:latin typeface="Roboto"/>
+              </a:rPr>
+              <a:t>Audit fairness par sous-</a:t>
+            </a:r>
+            <a:r>
+              <a:rPr sz="1400" b="0" err="1">
+                <a:solidFill>
+                  <a:srgbClr val="D1D5DB"/>
+                </a:solidFill>
+                <a:latin typeface="Roboto"/>
+              </a:rPr>
+              <a:t>groupes</a:t>
+            </a:r>
+            <a:r>
+              <a:rPr sz="1400" b="0">
+                <a:solidFill>
+                  <a:srgbClr val="D1D5DB"/>
+                </a:solidFill>
+                <a:latin typeface="Roboto"/>
+              </a:rPr>
+              <a:t> (</a:t>
+            </a:r>
+            <a:r>
+              <a:rPr sz="1400" b="0" err="1">
+                <a:solidFill>
+                  <a:srgbClr val="D1D5DB"/>
+                </a:solidFill>
+                <a:latin typeface="Roboto"/>
+              </a:rPr>
+              <a:t>célibataires</a:t>
+            </a:r>
+            <a:r>
+              <a:rPr sz="1400" b="0">
+                <a:solidFill>
+                  <a:srgbClr val="D1D5DB"/>
+                </a:solidFill>
+                <a:latin typeface="Roboto"/>
+              </a:rPr>
+              <a:t> 25.5% vs </a:t>
+            </a:r>
+            <a:r>
+              <a:rPr sz="1400" b="0" err="1">
+                <a:solidFill>
+                  <a:srgbClr val="D1D5DB"/>
+                </a:solidFill>
+                <a:latin typeface="Roboto"/>
+              </a:rPr>
+              <a:t>mariés</a:t>
+            </a:r>
+            <a:r>
+              <a:rPr sz="1400" b="0">
+                <a:solidFill>
+                  <a:srgbClr val="D1D5DB"/>
+                </a:solidFill>
+                <a:latin typeface="Roboto"/>
+              </a:rPr>
+              <a:t> 12.5% attrition), tests avec/sans variables </a:t>
+            </a:r>
+            <a:r>
+              <a:rPr sz="1400" b="0" err="1">
+                <a:solidFill>
+                  <a:srgbClr val="D1D5DB"/>
+                </a:solidFill>
+                <a:latin typeface="Roboto"/>
+              </a:rPr>
+              <a:t>sensibles</a:t>
+            </a:r>
+            <a:endParaRPr sz="1400" b="0">
+              <a:solidFill>
+                <a:srgbClr val="D1D5DB"/>
+              </a:solidFill>
+              <a:latin typeface="Roboto"/>
+            </a:endParaRPr>
+          </a:p>
+        </p:txBody>
+      </p:sp>
+      <p:sp>
+        <p:nvSpPr>
+          <p:cNvPr id="13" name="Rounded Rectangle 12">
+            <a:extLst>
+              <a:ext uri="{FF2B5EF4-FFF2-40B4-BE49-F238E27FC236}">
+                <a16:creationId xmlns:a16="http://schemas.microsoft.com/office/drawing/2014/main" id="{2536A1F7-E26E-E455-F125-A88CDFDF0BC4}"/>
+              </a:ext>
+            </a:extLst>
+          </p:cNvPr>
+          <p:cNvSpPr/>
+          <p:nvPr/>
+        </p:nvSpPr>
+        <p:spPr>
+          <a:xfrm>
+            <a:off x="609584" y="3000375"/>
+            <a:ext cx="5371965" cy="1657350"/>
+          </a:xfrm>
+          <a:prstGeom prst="roundRect">
+            <a:avLst>
+              <a:gd name="adj" fmla="val 13793"/>
+            </a:avLst>
+          </a:prstGeom>
+          <a:solidFill>
+            <a:srgbClr val="FFFFFF">
+              <a:alpha val="5000"/>
+            </a:srgbClr>
+          </a:solidFill>
+          <a:ln>
+            <a:noFill/>
+          </a:ln>
+        </p:spPr>
+        <p:style>
+          <a:lnRef idx="1">
+            <a:schemeClr val="accent1"/>
+          </a:lnRef>
+          <a:fillRef idx="3">
+            <a:schemeClr val="accent1"/>
+          </a:fillRef>
+          <a:effectRef idx="2">
+            <a:schemeClr val="accent1"/>
+          </a:effectRef>
+          <a:fontRef idx="minor">
+            <a:schemeClr val="lt1"/>
+          </a:fontRef>
+        </p:style>
+        <p:txBody>
+          <a:bodyPr rtlCol="0" anchor="ctr"/>
+          <a:lstStyle/>
+          <a:p>
+            <a:pPr algn="ctr"/>
+            <a:endParaRPr/>
+          </a:p>
+        </p:txBody>
+      </p:sp>
+      <p:sp>
+        <p:nvSpPr>
+          <p:cNvPr id="14" name="Round Same Side Corner Rectangle 13">
+            <a:extLst>
+              <a:ext uri="{FF2B5EF4-FFF2-40B4-BE49-F238E27FC236}">
+                <a16:creationId xmlns:a16="http://schemas.microsoft.com/office/drawing/2014/main" id="{94D4AB43-45D4-A890-B03C-819E056FB1B1}"/>
+              </a:ext>
+            </a:extLst>
+          </p:cNvPr>
+          <p:cNvSpPr/>
+          <p:nvPr/>
+        </p:nvSpPr>
+        <p:spPr>
+          <a:xfrm rot="16200000">
+            <a:off x="-153051" y="3763010"/>
+            <a:ext cx="1657350" cy="132080"/>
+          </a:xfrm>
+          <a:prstGeom prst="round2SameRect">
+            <a:avLst>
+              <a:gd name="adj1" fmla="val 50000"/>
+              <a:gd name="adj2" fmla="val 0"/>
+            </a:avLst>
+          </a:prstGeom>
+          <a:solidFill>
+            <a:srgbClr val="A855F7"/>
+          </a:solidFill>
+          <a:ln>
+            <a:noFill/>
+          </a:ln>
+        </p:spPr>
+        <p:style>
+          <a:lnRef idx="1">
+            <a:schemeClr val="accent1"/>
+          </a:lnRef>
+          <a:fillRef idx="3">
+            <a:schemeClr val="accent1"/>
+          </a:fillRef>
+          <a:effectRef idx="2">
+            <a:schemeClr val="accent1"/>
+          </a:effectRef>
+          <a:fontRef idx="minor">
+            <a:schemeClr val="lt1"/>
+          </a:fontRef>
+        </p:style>
+        <p:txBody>
+          <a:bodyPr rtlCol="0" anchor="ctr"/>
+          <a:lstStyle/>
+          <a:p>
+            <a:pPr algn="ctr"/>
+            <a:endParaRPr/>
+          </a:p>
+        </p:txBody>
+      </p:sp>
+      <p:pic>
+        <p:nvPicPr>
+          <p:cNvPr id="15" name="Picture 14" descr="image.png">
+            <a:extLst>
+              <a:ext uri="{FF2B5EF4-FFF2-40B4-BE49-F238E27FC236}">
+                <a16:creationId xmlns:a16="http://schemas.microsoft.com/office/drawing/2014/main" id="{391ACEF2-A7C4-A4BD-972E-637F8BC70F5D}"/>
+              </a:ext>
+            </a:extLst>
+          </p:cNvPr>
+          <p:cNvPicPr>
+            <a:picLocks noChangeAspect="1"/>
+          </p:cNvPicPr>
+          <p:nvPr/>
+        </p:nvPicPr>
+        <p:blipFill>
+          <a:blip r:embed="rId4">
+            <a:alphaModFix/>
+          </a:blip>
+          <a:stretch>
+            <a:fillRect/>
+          </a:stretch>
+        </p:blipFill>
+        <p:spPr>
+          <a:xfrm>
+            <a:off x="876278" y="3229303"/>
+            <a:ext cx="342891" cy="266043"/>
+          </a:xfrm>
+          <a:prstGeom prst="rect">
+            <a:avLst/>
+          </a:prstGeom>
+        </p:spPr>
+      </p:pic>
+      <p:sp>
+        <p:nvSpPr>
+          <p:cNvPr id="16" name="TextBox 15">
+            <a:extLst>
+              <a:ext uri="{FF2B5EF4-FFF2-40B4-BE49-F238E27FC236}">
+                <a16:creationId xmlns:a16="http://schemas.microsoft.com/office/drawing/2014/main" id="{AFFFF5CB-A902-BA05-B90D-03505B8C1A9C}"/>
+              </a:ext>
+            </a:extLst>
+          </p:cNvPr>
+          <p:cNvSpPr txBox="1"/>
+          <p:nvPr/>
+        </p:nvSpPr>
+        <p:spPr>
+          <a:xfrm>
+            <a:off x="1371565" y="3170669"/>
+            <a:ext cx="1757148" cy="383310"/>
+          </a:xfrm>
+          <a:prstGeom prst="rect">
+            <a:avLst/>
+          </a:prstGeom>
+          <a:noFill/>
+        </p:spPr>
+        <p:txBody>
+          <a:bodyPr wrap="none" lIns="73152" tIns="54864" rIns="73152" bIns="54864" anchor="ctr">
+            <a:spAutoFit/>
+          </a:bodyPr>
+          <a:lstStyle/>
+          <a:p>
+            <a:pPr algn="l">
+              <a:lnSpc>
+                <a:spcPts val="2340"/>
+              </a:lnSpc>
+              <a:spcBef>
+                <a:spcPts val="0"/>
+              </a:spcBef>
+              <a:spcAft>
+                <a:spcPts val="520"/>
+              </a:spcAft>
+            </a:pPr>
+            <a:r>
+              <a:rPr sz="1600" b="1" err="1">
+                <a:solidFill>
+                  <a:srgbClr val="FFFFFF"/>
+                </a:solidFill>
+                <a:latin typeface="Roboto"/>
+              </a:rPr>
+              <a:t>Déshumanisation</a:t>
+            </a:r>
+            <a:endParaRPr sz="1600" b="1">
+              <a:solidFill>
+                <a:srgbClr val="FFFFFF"/>
+              </a:solidFill>
+              <a:latin typeface="Roboto"/>
+            </a:endParaRPr>
+          </a:p>
+        </p:txBody>
+      </p:sp>
+      <p:sp>
+        <p:nvSpPr>
+          <p:cNvPr id="17" name="TextBox 16">
+            <a:extLst>
+              <a:ext uri="{FF2B5EF4-FFF2-40B4-BE49-F238E27FC236}">
+                <a16:creationId xmlns:a16="http://schemas.microsoft.com/office/drawing/2014/main" id="{7B1D4B2A-790F-04CB-9E7E-70CF85DB7569}"/>
+              </a:ext>
+            </a:extLst>
+          </p:cNvPr>
+          <p:cNvSpPr txBox="1"/>
+          <p:nvPr/>
+        </p:nvSpPr>
+        <p:spPr>
+          <a:xfrm>
+            <a:off x="1371565" y="3736338"/>
+            <a:ext cx="4381390" cy="604524"/>
+          </a:xfrm>
+          <a:prstGeom prst="rect">
+            <a:avLst/>
+          </a:prstGeom>
+          <a:noFill/>
+        </p:spPr>
+        <p:txBody>
+          <a:bodyPr wrap="square" lIns="73152" tIns="54864" rIns="73152" bIns="54864" anchor="ctr">
+            <a:spAutoFit/>
+          </a:bodyPr>
+          <a:lstStyle/>
+          <a:p>
+            <a:pPr algn="l">
+              <a:lnSpc>
+                <a:spcPts val="1950"/>
+              </a:lnSpc>
+              <a:spcBef>
+                <a:spcPts val="0"/>
+              </a:spcBef>
+              <a:spcAft>
+                <a:spcPts val="0"/>
+              </a:spcAft>
+            </a:pPr>
+            <a:r>
+              <a:rPr sz="1400" b="0" err="1">
+                <a:solidFill>
+                  <a:srgbClr val="D1D5DB"/>
+                </a:solidFill>
+                <a:latin typeface="Roboto"/>
+              </a:rPr>
+              <a:t>Outil</a:t>
+            </a:r>
+            <a:r>
+              <a:rPr sz="1400" b="0">
+                <a:solidFill>
+                  <a:srgbClr val="D1D5DB"/>
+                </a:solidFill>
+                <a:latin typeface="Roboto"/>
+              </a:rPr>
+              <a:t> </a:t>
+            </a:r>
+            <a:r>
+              <a:rPr sz="1400" b="0" err="1">
+                <a:solidFill>
+                  <a:srgbClr val="D1D5DB"/>
+                </a:solidFill>
+                <a:latin typeface="Roboto"/>
+              </a:rPr>
+              <a:t>d'aide</a:t>
+            </a:r>
+            <a:r>
+              <a:rPr sz="1400" b="0">
+                <a:solidFill>
+                  <a:srgbClr val="D1D5DB"/>
+                </a:solidFill>
+                <a:latin typeface="Roboto"/>
+              </a:rPr>
+              <a:t> à la </a:t>
+            </a:r>
+            <a:r>
+              <a:rPr sz="1400" b="0" err="1">
+                <a:solidFill>
+                  <a:srgbClr val="D1D5DB"/>
+                </a:solidFill>
+                <a:latin typeface="Roboto"/>
+              </a:rPr>
+              <a:t>décision</a:t>
+            </a:r>
+            <a:r>
+              <a:rPr sz="1400" b="0">
+                <a:solidFill>
+                  <a:srgbClr val="D1D5DB"/>
+                </a:solidFill>
+                <a:latin typeface="Roboto"/>
+              </a:rPr>
+              <a:t> </a:t>
+            </a:r>
+            <a:r>
+              <a:rPr sz="1400" b="0" err="1">
+                <a:solidFill>
+                  <a:srgbClr val="D1D5DB"/>
+                </a:solidFill>
+                <a:latin typeface="Roboto"/>
+              </a:rPr>
+              <a:t>uniquement</a:t>
+            </a:r>
+            <a:r>
+              <a:rPr sz="1400" b="0">
+                <a:solidFill>
+                  <a:srgbClr val="D1D5DB"/>
+                </a:solidFill>
+                <a:latin typeface="Roboto"/>
+              </a:rPr>
+              <a:t>, revue humaine </a:t>
+            </a:r>
+            <a:r>
+              <a:rPr sz="1400" b="0" err="1">
+                <a:solidFill>
+                  <a:srgbClr val="D1D5DB"/>
+                </a:solidFill>
+                <a:latin typeface="Roboto"/>
+              </a:rPr>
+              <a:t>obligatoire</a:t>
+            </a:r>
+            <a:r>
+              <a:rPr sz="1400" b="0">
+                <a:solidFill>
+                  <a:srgbClr val="D1D5DB"/>
+                </a:solidFill>
+                <a:latin typeface="Roboto"/>
+              </a:rPr>
+              <a:t>, </a:t>
+            </a:r>
+            <a:r>
+              <a:rPr sz="1400" b="0" err="1">
+                <a:solidFill>
+                  <a:srgbClr val="D1D5DB"/>
+                </a:solidFill>
+                <a:latin typeface="Roboto"/>
+              </a:rPr>
+              <a:t>aucun</a:t>
+            </a:r>
+            <a:r>
+              <a:rPr sz="1400" b="0">
+                <a:solidFill>
+                  <a:srgbClr val="D1D5DB"/>
+                </a:solidFill>
+                <a:latin typeface="Roboto"/>
+              </a:rPr>
+              <a:t> scoring </a:t>
+            </a:r>
+            <a:r>
+              <a:rPr sz="1400" b="0" err="1">
+                <a:solidFill>
+                  <a:srgbClr val="D1D5DB"/>
+                </a:solidFill>
+                <a:latin typeface="Roboto"/>
+              </a:rPr>
+              <a:t>individuel</a:t>
+            </a:r>
+            <a:r>
+              <a:rPr sz="1400" b="0">
+                <a:solidFill>
+                  <a:srgbClr val="D1D5DB"/>
+                </a:solidFill>
+                <a:latin typeface="Roboto"/>
+              </a:rPr>
+              <a:t> communiqué</a:t>
+            </a:r>
+          </a:p>
+        </p:txBody>
+      </p:sp>
+      <p:sp>
+        <p:nvSpPr>
+          <p:cNvPr id="18" name="Rounded Rectangle 17">
+            <a:extLst>
+              <a:ext uri="{FF2B5EF4-FFF2-40B4-BE49-F238E27FC236}">
+                <a16:creationId xmlns:a16="http://schemas.microsoft.com/office/drawing/2014/main" id="{223B4F0F-DBB5-DB1B-1236-60F907391A00}"/>
+              </a:ext>
+            </a:extLst>
+          </p:cNvPr>
+          <p:cNvSpPr/>
+          <p:nvPr/>
+        </p:nvSpPr>
+        <p:spPr>
+          <a:xfrm>
+            <a:off x="6210144" y="3000375"/>
+            <a:ext cx="5371965" cy="1657350"/>
+          </a:xfrm>
+          <a:prstGeom prst="roundRect">
+            <a:avLst>
+              <a:gd name="adj" fmla="val 13793"/>
+            </a:avLst>
+          </a:prstGeom>
+          <a:solidFill>
+            <a:srgbClr val="FFFFFF">
+              <a:alpha val="5000"/>
+            </a:srgbClr>
+          </a:solidFill>
+          <a:ln>
+            <a:noFill/>
+          </a:ln>
+        </p:spPr>
+        <p:style>
+          <a:lnRef idx="1">
+            <a:schemeClr val="accent1"/>
+          </a:lnRef>
+          <a:fillRef idx="3">
+            <a:schemeClr val="accent1"/>
+          </a:fillRef>
+          <a:effectRef idx="2">
+            <a:schemeClr val="accent1"/>
+          </a:effectRef>
+          <a:fontRef idx="minor">
+            <a:schemeClr val="lt1"/>
+          </a:fontRef>
+        </p:style>
+        <p:txBody>
+          <a:bodyPr rtlCol="0" anchor="ctr"/>
+          <a:lstStyle/>
+          <a:p>
+            <a:pPr algn="ctr"/>
+            <a:endParaRPr/>
+          </a:p>
+        </p:txBody>
+      </p:sp>
+      <p:sp>
+        <p:nvSpPr>
+          <p:cNvPr id="19" name="Round Same Side Corner Rectangle 18">
+            <a:extLst>
+              <a:ext uri="{FF2B5EF4-FFF2-40B4-BE49-F238E27FC236}">
+                <a16:creationId xmlns:a16="http://schemas.microsoft.com/office/drawing/2014/main" id="{34DCD1DC-560D-F137-A4A1-753037B53E64}"/>
+              </a:ext>
+            </a:extLst>
+          </p:cNvPr>
+          <p:cNvSpPr/>
+          <p:nvPr/>
+        </p:nvSpPr>
+        <p:spPr>
+          <a:xfrm rot="16200000">
+            <a:off x="5447509" y="3763010"/>
+            <a:ext cx="1657350" cy="132080"/>
+          </a:xfrm>
+          <a:prstGeom prst="round2SameRect">
+            <a:avLst>
+              <a:gd name="adj1" fmla="val 50000"/>
+              <a:gd name="adj2" fmla="val 0"/>
+            </a:avLst>
+          </a:prstGeom>
+          <a:solidFill>
+            <a:srgbClr val="3B82F6"/>
+          </a:solidFill>
+          <a:ln>
+            <a:noFill/>
+          </a:ln>
+        </p:spPr>
+        <p:style>
+          <a:lnRef idx="1">
+            <a:schemeClr val="accent1"/>
+          </a:lnRef>
+          <a:fillRef idx="3">
+            <a:schemeClr val="accent1"/>
+          </a:fillRef>
+          <a:effectRef idx="2">
+            <a:schemeClr val="accent1"/>
+          </a:effectRef>
+          <a:fontRef idx="minor">
+            <a:schemeClr val="lt1"/>
+          </a:fontRef>
+        </p:style>
+        <p:txBody>
+          <a:bodyPr rtlCol="0" anchor="ctr"/>
+          <a:lstStyle/>
+          <a:p>
+            <a:pPr algn="ctr"/>
+            <a:endParaRPr/>
+          </a:p>
+        </p:txBody>
+      </p:sp>
+      <p:pic>
+        <p:nvPicPr>
+          <p:cNvPr id="20" name="Picture 19" descr="image.png">
+            <a:extLst>
+              <a:ext uri="{FF2B5EF4-FFF2-40B4-BE49-F238E27FC236}">
+                <a16:creationId xmlns:a16="http://schemas.microsoft.com/office/drawing/2014/main" id="{A4F037B6-F7C1-CFE2-28CC-430937C5FC7D}"/>
+              </a:ext>
+            </a:extLst>
+          </p:cNvPr>
+          <p:cNvPicPr>
+            <a:picLocks noChangeAspect="1"/>
+          </p:cNvPicPr>
+          <p:nvPr/>
+        </p:nvPicPr>
+        <p:blipFill>
+          <a:blip r:embed="rId5">
+            <a:alphaModFix/>
+          </a:blip>
+          <a:stretch>
+            <a:fillRect/>
+          </a:stretch>
+        </p:blipFill>
+        <p:spPr>
+          <a:xfrm>
+            <a:off x="6476838" y="3202699"/>
+            <a:ext cx="342891" cy="319251"/>
+          </a:xfrm>
+          <a:prstGeom prst="rect">
+            <a:avLst/>
+          </a:prstGeom>
+        </p:spPr>
+      </p:pic>
+      <p:sp>
+        <p:nvSpPr>
+          <p:cNvPr id="21" name="TextBox 20">
+            <a:extLst>
+              <a:ext uri="{FF2B5EF4-FFF2-40B4-BE49-F238E27FC236}">
+                <a16:creationId xmlns:a16="http://schemas.microsoft.com/office/drawing/2014/main" id="{64EB84B2-1EB4-8917-5AF8-AEC19023E272}"/>
+              </a:ext>
+            </a:extLst>
+          </p:cNvPr>
+          <p:cNvSpPr txBox="1"/>
+          <p:nvPr/>
+        </p:nvSpPr>
+        <p:spPr>
+          <a:xfrm>
+            <a:off x="6972125" y="3170669"/>
+            <a:ext cx="1308307" cy="383310"/>
+          </a:xfrm>
+          <a:prstGeom prst="rect">
+            <a:avLst/>
+          </a:prstGeom>
+          <a:noFill/>
+        </p:spPr>
+        <p:txBody>
+          <a:bodyPr wrap="none" lIns="73152" tIns="54864" rIns="73152" bIns="54864" anchor="ctr">
+            <a:spAutoFit/>
+          </a:bodyPr>
+          <a:lstStyle/>
+          <a:p>
+            <a:pPr algn="l">
+              <a:lnSpc>
+                <a:spcPts val="2340"/>
+              </a:lnSpc>
+              <a:spcBef>
+                <a:spcPts val="0"/>
+              </a:spcBef>
+              <a:spcAft>
+                <a:spcPts val="520"/>
+              </a:spcAft>
+            </a:pPr>
+            <a:r>
+              <a:rPr sz="1600" b="1" err="1">
+                <a:solidFill>
+                  <a:srgbClr val="FFFFFF"/>
+                </a:solidFill>
+                <a:latin typeface="Roboto"/>
+              </a:rPr>
+              <a:t>Sécurisation</a:t>
+            </a:r>
+            <a:endParaRPr sz="1600" b="1">
+              <a:solidFill>
+                <a:srgbClr val="FFFFFF"/>
+              </a:solidFill>
+              <a:latin typeface="Roboto"/>
+            </a:endParaRPr>
+          </a:p>
+        </p:txBody>
+      </p:sp>
+      <p:sp>
+        <p:nvSpPr>
+          <p:cNvPr id="22" name="TextBox 21">
+            <a:extLst>
+              <a:ext uri="{FF2B5EF4-FFF2-40B4-BE49-F238E27FC236}">
+                <a16:creationId xmlns:a16="http://schemas.microsoft.com/office/drawing/2014/main" id="{FEA66FCD-D91F-6009-6E46-62D7FF378E45}"/>
+              </a:ext>
+            </a:extLst>
+          </p:cNvPr>
+          <p:cNvSpPr txBox="1"/>
+          <p:nvPr/>
+        </p:nvSpPr>
+        <p:spPr>
+          <a:xfrm>
+            <a:off x="6972125" y="3608098"/>
+            <a:ext cx="4381390" cy="861005"/>
+          </a:xfrm>
+          <a:prstGeom prst="rect">
+            <a:avLst/>
+          </a:prstGeom>
+          <a:noFill/>
+        </p:spPr>
+        <p:txBody>
+          <a:bodyPr wrap="square" lIns="73152" tIns="54864" rIns="73152" bIns="54864" anchor="ctr">
+            <a:spAutoFit/>
+          </a:bodyPr>
+          <a:lstStyle/>
+          <a:p>
+            <a:pPr algn="l">
+              <a:lnSpc>
+                <a:spcPts val="1950"/>
+              </a:lnSpc>
+              <a:spcBef>
+                <a:spcPts val="0"/>
+              </a:spcBef>
+              <a:spcAft>
+                <a:spcPts val="0"/>
+              </a:spcAft>
+            </a:pPr>
+            <a:r>
+              <a:rPr sz="1400" b="0" dirty="0">
+                <a:solidFill>
+                  <a:srgbClr val="D1D5DB"/>
+                </a:solidFill>
+                <a:latin typeface="Roboto"/>
+              </a:rPr>
+              <a:t>Données </a:t>
+            </a:r>
+            <a:r>
+              <a:rPr sz="1400" b="0" dirty="0" err="1">
+                <a:solidFill>
+                  <a:srgbClr val="D1D5DB"/>
+                </a:solidFill>
+                <a:latin typeface="Roboto"/>
+              </a:rPr>
+              <a:t>anonymisées</a:t>
+            </a:r>
+            <a:r>
+              <a:rPr sz="1400" b="0" dirty="0">
+                <a:solidFill>
+                  <a:srgbClr val="D1D5DB"/>
+                </a:solidFill>
+                <a:latin typeface="Roboto"/>
+              </a:rPr>
+              <a:t> (</a:t>
+            </a:r>
+            <a:r>
+              <a:rPr sz="1400" b="0" dirty="0" err="1">
+                <a:solidFill>
+                  <a:srgbClr val="D1D5DB"/>
+                </a:solidFill>
+                <a:latin typeface="Roboto"/>
+              </a:rPr>
+              <a:t>EmployeeID</a:t>
+            </a:r>
+            <a:r>
+              <a:rPr sz="1400" b="0" dirty="0">
+                <a:solidFill>
+                  <a:srgbClr val="D1D5DB"/>
+                </a:solidFill>
+                <a:latin typeface="Roboto"/>
+              </a:rPr>
+              <a:t>), </a:t>
+            </a:r>
+            <a:r>
+              <a:rPr sz="1400" b="0" dirty="0" err="1">
+                <a:solidFill>
+                  <a:srgbClr val="D1D5DB"/>
+                </a:solidFill>
+                <a:latin typeface="Roboto"/>
+              </a:rPr>
+              <a:t>accès</a:t>
+            </a:r>
+            <a:r>
+              <a:rPr sz="1400" b="0" dirty="0">
+                <a:solidFill>
+                  <a:srgbClr val="D1D5DB"/>
+                </a:solidFill>
+                <a:latin typeface="Roboto"/>
+              </a:rPr>
+              <a:t> </a:t>
+            </a:r>
+            <a:r>
+              <a:rPr sz="1400" b="0" dirty="0" err="1">
+                <a:solidFill>
+                  <a:srgbClr val="D1D5DB"/>
+                </a:solidFill>
+                <a:latin typeface="Roboto"/>
+              </a:rPr>
+              <a:t>restreint</a:t>
+            </a:r>
+            <a:r>
+              <a:rPr sz="1400" b="0" dirty="0">
+                <a:solidFill>
+                  <a:srgbClr val="D1D5DB"/>
+                </a:solidFill>
+                <a:latin typeface="Roboto"/>
+              </a:rPr>
+              <a:t>, </a:t>
+            </a:r>
+            <a:r>
+              <a:rPr sz="1400" b="0" dirty="0" err="1">
+                <a:solidFill>
+                  <a:srgbClr val="D1D5DB"/>
+                </a:solidFill>
+                <a:latin typeface="Roboto"/>
+              </a:rPr>
+              <a:t>conforme</a:t>
+            </a:r>
+            <a:r>
+              <a:rPr lang="fr-FR" sz="1400" b="0" dirty="0">
+                <a:solidFill>
+                  <a:srgbClr val="D1D5DB"/>
+                </a:solidFill>
+                <a:latin typeface="Roboto"/>
+              </a:rPr>
+              <a:t> au réglementation</a:t>
+            </a:r>
+            <a:r>
+              <a:rPr sz="1400" b="0" dirty="0">
+                <a:solidFill>
+                  <a:srgbClr val="D1D5DB"/>
+                </a:solidFill>
+                <a:latin typeface="Roboto"/>
+              </a:rPr>
+              <a:t>, </a:t>
+            </a:r>
+            <a:r>
+              <a:rPr sz="1400" b="0" dirty="0" err="1">
+                <a:solidFill>
+                  <a:srgbClr val="D1D5DB"/>
+                </a:solidFill>
+                <a:latin typeface="Roboto"/>
+              </a:rPr>
+              <a:t>seuil</a:t>
+            </a:r>
+            <a:r>
+              <a:rPr sz="1400" b="0" dirty="0">
+                <a:solidFill>
+                  <a:srgbClr val="D1D5DB"/>
+                </a:solidFill>
+                <a:latin typeface="Roboto"/>
+              </a:rPr>
+              <a:t> minimal 50 </a:t>
+            </a:r>
+            <a:r>
+              <a:rPr sz="1400" b="0" dirty="0" err="1">
+                <a:solidFill>
+                  <a:srgbClr val="D1D5DB"/>
+                </a:solidFill>
+                <a:latin typeface="Roboto"/>
+              </a:rPr>
+              <a:t>individus</a:t>
+            </a:r>
+            <a:r>
+              <a:rPr sz="1400" b="0" dirty="0">
+                <a:solidFill>
+                  <a:srgbClr val="D1D5DB"/>
+                </a:solidFill>
+                <a:latin typeface="Roboto"/>
+              </a:rPr>
+              <a:t> par sous-</a:t>
+            </a:r>
+            <a:r>
+              <a:rPr sz="1400" b="0" dirty="0" err="1">
+                <a:solidFill>
+                  <a:srgbClr val="D1D5DB"/>
+                </a:solidFill>
+                <a:latin typeface="Roboto"/>
+              </a:rPr>
+              <a:t>groupe</a:t>
+            </a:r>
+            <a:endParaRPr sz="1400" b="0" dirty="0">
+              <a:solidFill>
+                <a:srgbClr val="D1D5DB"/>
+              </a:solidFill>
+              <a:latin typeface="Roboto"/>
+            </a:endParaRPr>
+          </a:p>
+        </p:txBody>
+      </p:sp>
+      <p:sp>
+        <p:nvSpPr>
+          <p:cNvPr id="23" name="Rounded Rectangle 22">
+            <a:extLst>
+              <a:ext uri="{FF2B5EF4-FFF2-40B4-BE49-F238E27FC236}">
+                <a16:creationId xmlns:a16="http://schemas.microsoft.com/office/drawing/2014/main" id="{8B8E7A97-4C12-FD16-6B1D-5F37DEFFE0A1}"/>
+              </a:ext>
+            </a:extLst>
+          </p:cNvPr>
+          <p:cNvSpPr/>
+          <p:nvPr/>
+        </p:nvSpPr>
+        <p:spPr>
+          <a:xfrm>
+            <a:off x="609584" y="4886325"/>
+            <a:ext cx="10972525" cy="1085850"/>
+          </a:xfrm>
+          <a:prstGeom prst="roundRect">
+            <a:avLst>
+              <a:gd name="adj" fmla="val 21052"/>
+            </a:avLst>
+          </a:prstGeom>
+          <a:solidFill>
+            <a:srgbClr val="FFFFFF">
+              <a:alpha val="5000"/>
+            </a:srgbClr>
+          </a:solidFill>
+          <a:ln>
+            <a:noFill/>
+          </a:ln>
+        </p:spPr>
+        <p:style>
+          <a:lnRef idx="1">
+            <a:schemeClr val="accent1"/>
+          </a:lnRef>
+          <a:fillRef idx="3">
+            <a:schemeClr val="accent1"/>
+          </a:fillRef>
+          <a:effectRef idx="2">
+            <a:schemeClr val="accent1"/>
+          </a:effectRef>
+          <a:fontRef idx="minor">
+            <a:schemeClr val="lt1"/>
+          </a:fontRef>
+        </p:style>
+        <p:txBody>
+          <a:bodyPr rtlCol="0" anchor="ctr"/>
+          <a:lstStyle/>
+          <a:p>
+            <a:pPr algn="ctr"/>
+            <a:endParaRPr/>
+          </a:p>
+        </p:txBody>
+      </p:sp>
+      <p:sp>
+        <p:nvSpPr>
+          <p:cNvPr id="24" name="Round Same Side Corner Rectangle 23">
+            <a:extLst>
+              <a:ext uri="{FF2B5EF4-FFF2-40B4-BE49-F238E27FC236}">
+                <a16:creationId xmlns:a16="http://schemas.microsoft.com/office/drawing/2014/main" id="{2F43DFFB-0AEA-3E21-158E-DDFE4B7254DF}"/>
+              </a:ext>
+            </a:extLst>
+          </p:cNvPr>
+          <p:cNvSpPr/>
+          <p:nvPr/>
+        </p:nvSpPr>
+        <p:spPr>
+          <a:xfrm rot="16200000">
+            <a:off x="132699" y="5363210"/>
+            <a:ext cx="1085850" cy="132080"/>
+          </a:xfrm>
+          <a:prstGeom prst="round2SameRect">
+            <a:avLst>
+              <a:gd name="adj1" fmla="val 50000"/>
+              <a:gd name="adj2" fmla="val 0"/>
+            </a:avLst>
+          </a:prstGeom>
+          <a:solidFill>
+            <a:srgbClr val="22C55E"/>
+          </a:solidFill>
+          <a:ln>
+            <a:noFill/>
+          </a:ln>
+        </p:spPr>
+        <p:style>
+          <a:lnRef idx="1">
+            <a:schemeClr val="accent1"/>
+          </a:lnRef>
+          <a:fillRef idx="3">
+            <a:schemeClr val="accent1"/>
+          </a:fillRef>
+          <a:effectRef idx="2">
+            <a:schemeClr val="accent1"/>
+          </a:effectRef>
+          <a:fontRef idx="minor">
+            <a:schemeClr val="lt1"/>
+          </a:fontRef>
+        </p:style>
+        <p:txBody>
+          <a:bodyPr rtlCol="0" anchor="ctr"/>
+          <a:lstStyle/>
+          <a:p>
+            <a:pPr algn="ctr"/>
+            <a:endParaRPr/>
+          </a:p>
+        </p:txBody>
+      </p:sp>
+      <p:pic>
+        <p:nvPicPr>
+          <p:cNvPr id="25" name="Picture 24" descr="image.png">
+            <a:extLst>
+              <a:ext uri="{FF2B5EF4-FFF2-40B4-BE49-F238E27FC236}">
+                <a16:creationId xmlns:a16="http://schemas.microsoft.com/office/drawing/2014/main" id="{56CD3AC6-8166-8773-E869-D81112EB99CB}"/>
+              </a:ext>
+            </a:extLst>
+          </p:cNvPr>
+          <p:cNvPicPr>
+            <a:picLocks noChangeAspect="1"/>
+          </p:cNvPicPr>
+          <p:nvPr/>
+        </p:nvPicPr>
+        <p:blipFill>
+          <a:blip r:embed="rId6">
+            <a:alphaModFix/>
+          </a:blip>
+          <a:stretch>
+            <a:fillRect/>
+          </a:stretch>
+        </p:blipFill>
+        <p:spPr>
+          <a:xfrm>
+            <a:off x="876278" y="5125599"/>
+            <a:ext cx="342891" cy="245350"/>
+          </a:xfrm>
+          <a:prstGeom prst="rect">
+            <a:avLst/>
+          </a:prstGeom>
+        </p:spPr>
+      </p:pic>
+      <p:sp>
+        <p:nvSpPr>
+          <p:cNvPr id="26" name="TextBox 25">
+            <a:extLst>
+              <a:ext uri="{FF2B5EF4-FFF2-40B4-BE49-F238E27FC236}">
+                <a16:creationId xmlns:a16="http://schemas.microsoft.com/office/drawing/2014/main" id="{BFC1ECCF-65FD-E9A2-F5FA-DFB8D03D8AE9}"/>
+              </a:ext>
+            </a:extLst>
+          </p:cNvPr>
+          <p:cNvSpPr txBox="1"/>
+          <p:nvPr/>
+        </p:nvSpPr>
+        <p:spPr>
+          <a:xfrm>
+            <a:off x="1371565" y="5056620"/>
+            <a:ext cx="2188356" cy="383310"/>
+          </a:xfrm>
+          <a:prstGeom prst="rect">
+            <a:avLst/>
+          </a:prstGeom>
+          <a:noFill/>
+        </p:spPr>
+        <p:txBody>
+          <a:bodyPr wrap="none" lIns="73152" tIns="54864" rIns="73152" bIns="54864" anchor="ctr">
+            <a:spAutoFit/>
+          </a:bodyPr>
+          <a:lstStyle/>
+          <a:p>
+            <a:pPr algn="l">
+              <a:lnSpc>
+                <a:spcPts val="2340"/>
+              </a:lnSpc>
+              <a:spcBef>
+                <a:spcPts val="0"/>
+              </a:spcBef>
+              <a:spcAft>
+                <a:spcPts val="520"/>
+              </a:spcAft>
+            </a:pPr>
+            <a:r>
+              <a:rPr sz="1600" b="1" err="1">
+                <a:solidFill>
+                  <a:srgbClr val="FFFFFF"/>
+                </a:solidFill>
+                <a:latin typeface="Roboto"/>
+              </a:rPr>
+              <a:t>Coût</a:t>
+            </a:r>
+            <a:r>
+              <a:rPr sz="1600" b="1">
+                <a:solidFill>
+                  <a:srgbClr val="FFFFFF"/>
+                </a:solidFill>
+                <a:latin typeface="Roboto"/>
+              </a:rPr>
+              <a:t> </a:t>
+            </a:r>
+            <a:r>
+              <a:rPr sz="1600" b="1" err="1">
+                <a:solidFill>
+                  <a:srgbClr val="FFFFFF"/>
+                </a:solidFill>
+                <a:latin typeface="Roboto"/>
+              </a:rPr>
+              <a:t>environnemental</a:t>
+            </a:r>
+            <a:endParaRPr sz="1600" b="1">
+              <a:solidFill>
+                <a:srgbClr val="FFFFFF"/>
+              </a:solidFill>
+              <a:latin typeface="Roboto"/>
+            </a:endParaRPr>
+          </a:p>
+        </p:txBody>
+      </p:sp>
+      <p:sp>
+        <p:nvSpPr>
+          <p:cNvPr id="27" name="TextBox 26">
+            <a:extLst>
+              <a:ext uri="{FF2B5EF4-FFF2-40B4-BE49-F238E27FC236}">
+                <a16:creationId xmlns:a16="http://schemas.microsoft.com/office/drawing/2014/main" id="{3FBD0BBA-2C4D-02E3-A4CA-FB976CC1FCFC}"/>
+              </a:ext>
+            </a:extLst>
+          </p:cNvPr>
+          <p:cNvSpPr txBox="1"/>
+          <p:nvPr/>
+        </p:nvSpPr>
+        <p:spPr>
+          <a:xfrm>
+            <a:off x="1371565" y="5464777"/>
+            <a:ext cx="6498830" cy="348044"/>
+          </a:xfrm>
+          <a:prstGeom prst="rect">
+            <a:avLst/>
+          </a:prstGeom>
+          <a:noFill/>
+        </p:spPr>
+        <p:txBody>
+          <a:bodyPr wrap="none" lIns="73152" tIns="54864" rIns="73152" bIns="54864" anchor="ctr">
+            <a:spAutoFit/>
+          </a:bodyPr>
+          <a:lstStyle/>
+          <a:p>
+            <a:pPr algn="l">
+              <a:lnSpc>
+                <a:spcPts val="1950"/>
+              </a:lnSpc>
+              <a:spcBef>
+                <a:spcPts val="0"/>
+              </a:spcBef>
+              <a:spcAft>
+                <a:spcPts val="0"/>
+              </a:spcAft>
+            </a:pPr>
+            <a:r>
+              <a:rPr sz="1400" b="0" err="1">
+                <a:solidFill>
+                  <a:srgbClr val="D1D5DB"/>
+                </a:solidFill>
+                <a:latin typeface="Roboto"/>
+              </a:rPr>
+              <a:t>Modèles</a:t>
+            </a:r>
+            <a:r>
+              <a:rPr sz="1400" b="0">
+                <a:solidFill>
+                  <a:srgbClr val="D1D5DB"/>
+                </a:solidFill>
+                <a:latin typeface="Roboto"/>
+              </a:rPr>
+              <a:t> </a:t>
+            </a:r>
+            <a:r>
+              <a:rPr sz="1400" b="0" err="1">
+                <a:solidFill>
+                  <a:srgbClr val="D1D5DB"/>
+                </a:solidFill>
+                <a:latin typeface="Roboto"/>
+              </a:rPr>
+              <a:t>légers</a:t>
+            </a:r>
+            <a:r>
+              <a:rPr sz="1400" b="0">
+                <a:solidFill>
+                  <a:srgbClr val="D1D5DB"/>
+                </a:solidFill>
+                <a:latin typeface="Roboto"/>
+              </a:rPr>
+              <a:t> (scikit-learn), pas de deep learning, </a:t>
+            </a:r>
+            <a:r>
+              <a:rPr sz="1400" b="0" err="1">
+                <a:solidFill>
+                  <a:srgbClr val="D1D5DB"/>
+                </a:solidFill>
+                <a:latin typeface="Roboto"/>
+              </a:rPr>
+              <a:t>empreinte</a:t>
+            </a:r>
+            <a:r>
+              <a:rPr sz="1400" b="0">
+                <a:solidFill>
+                  <a:srgbClr val="D1D5DB"/>
+                </a:solidFill>
+                <a:latin typeface="Roboto"/>
+              </a:rPr>
+              <a:t> </a:t>
+            </a:r>
+            <a:r>
+              <a:rPr sz="1400" b="0" err="1">
+                <a:solidFill>
+                  <a:srgbClr val="D1D5DB"/>
+                </a:solidFill>
+                <a:latin typeface="Roboto"/>
+              </a:rPr>
+              <a:t>carbone</a:t>
+            </a:r>
+            <a:r>
+              <a:rPr sz="1400" b="0">
+                <a:solidFill>
+                  <a:srgbClr val="D1D5DB"/>
+                </a:solidFill>
+                <a:latin typeface="Roboto"/>
+              </a:rPr>
+              <a:t> </a:t>
+            </a:r>
+            <a:r>
+              <a:rPr sz="1400" b="0" err="1">
+                <a:solidFill>
+                  <a:srgbClr val="D1D5DB"/>
+                </a:solidFill>
+                <a:latin typeface="Roboto"/>
+              </a:rPr>
+              <a:t>minimale</a:t>
+            </a:r>
+            <a:endParaRPr sz="1400" b="0">
+              <a:solidFill>
+                <a:srgbClr val="D1D5DB"/>
+              </a:solidFill>
+              <a:latin typeface="Roboto"/>
+            </a:endParaRPr>
+          </a:p>
+        </p:txBody>
+      </p:sp>
+      <p:sp>
+        <p:nvSpPr>
+          <p:cNvPr id="32" name="TextBox 1">
+            <a:extLst>
+              <a:ext uri="{FF2B5EF4-FFF2-40B4-BE49-F238E27FC236}">
+                <a16:creationId xmlns:a16="http://schemas.microsoft.com/office/drawing/2014/main" id="{6FEB23CF-AD0D-6C7A-74DA-8A099B909A57}"/>
+              </a:ext>
+            </a:extLst>
+          </p:cNvPr>
+          <p:cNvSpPr txBox="1"/>
+          <p:nvPr/>
+        </p:nvSpPr>
+        <p:spPr>
+          <a:xfrm>
             <a:off x="609584" y="190084"/>
-            <a:ext cx="1744324" cy="475771"/>
+            <a:ext cx="1830886" cy="475771"/>
           </a:xfrm>
           <a:prstGeom prst="rect">
             <a:avLst/>
@@ -27283,7 +27791,7 @@
               </a:spcAft>
             </a:pPr>
             <a:r>
-              <a:rPr lang="fr-FR" sz="3200" b="1">
+              <a:rPr sz="3200" b="1" dirty="0" err="1">
                 <a:solidFill>
                   <a:srgbClr val="FFFFFF"/>
                 </a:solidFill>
@@ -27291,7 +27799,16 @@
               </a:rPr>
               <a:t>Éthique</a:t>
             </a:r>
-            <a:endParaRPr sz="3200" b="1">
+            <a:r>
+              <a:rPr lang="fr-FR" sz="3200" b="1" dirty="0">
+                <a:solidFill>
+                  <a:srgbClr val="FFFFFF"/>
+                </a:solidFill>
+                <a:latin typeface="Poppins"/>
+              </a:rPr>
+              <a:t> </a:t>
+            </a:r>
+            <a:endParaRPr sz="3200" b="1" dirty="0">
               <a:solidFill>
                 <a:srgbClr val="FFFFFF"/>
               </a:solidFill>
@@ -27302,10 +27819,10 @@
       </p:sp>
       <p:sp>
         <p:nvSpPr>
-          <p:cNvPr id="54" name="Rectangle 53">
-            <a:extLst>
-              <a:ext uri="{FF2B5EF4-FFF2-40B4-BE49-F238E27FC236}">
-                <a16:creationId xmlns:a16="http://schemas.microsoft.com/office/drawing/2014/main" id="{2758EEF4-87EE-267B-0CAF-0B2B5F0F36FB}"/>
+          <p:cNvPr id="33" name="Rectangle 32">
+            <a:extLst>
+              <a:ext uri="{FF2B5EF4-FFF2-40B4-BE49-F238E27FC236}">
+                <a16:creationId xmlns:a16="http://schemas.microsoft.com/office/drawing/2014/main" id="{E1EEEEA8-7821-1F06-4E61-5A90BBEC6566}"/>
               </a:ext>
             </a:extLst>
           </p:cNvPr>
@@ -27361,74 +27878,12 @@
           </a:p>
         </p:txBody>
       </p:sp>
-      <p:pic>
-        <p:nvPicPr>
-          <p:cNvPr id="60" name="Image 59" descr="Une image contenant texte, carte de visite, capture d’écran, Police&#10;&#10;Le contenu généré par l’IA peut être incorrect.">
-            <a:extLst>
-              <a:ext uri="{FF2B5EF4-FFF2-40B4-BE49-F238E27FC236}">
-                <a16:creationId xmlns:a16="http://schemas.microsoft.com/office/drawing/2014/main" id="{71225803-AD11-63BE-189B-610521803870}"/>
-              </a:ext>
-            </a:extLst>
-          </p:cNvPr>
-          <p:cNvPicPr>
-            <a:picLocks noChangeAspect="1"/>
-          </p:cNvPicPr>
-          <p:nvPr/>
-        </p:nvPicPr>
-        <p:blipFill>
-          <a:blip r:embed="rId3"/>
-          <a:srcRect l="895" t="18999" r="3436" b="46107"/>
-          <a:stretch>
-            <a:fillRect/>
-          </a:stretch>
-        </p:blipFill>
-        <p:spPr>
-          <a:xfrm>
-            <a:off x="290623" y="2126512"/>
-            <a:ext cx="11610754" cy="1936883"/>
-          </a:xfrm>
-          <a:prstGeom prst="rect">
-            <a:avLst/>
-          </a:prstGeom>
-        </p:spPr>
-      </p:pic>
-      <p:pic>
-        <p:nvPicPr>
-          <p:cNvPr id="61" name="Image 60" descr="Une image contenant texte, carte de visite, capture d’écran, Police&#10;&#10;Le contenu généré par l’IA peut être incorrect.">
-            <a:extLst>
-              <a:ext uri="{FF2B5EF4-FFF2-40B4-BE49-F238E27FC236}">
-                <a16:creationId xmlns:a16="http://schemas.microsoft.com/office/drawing/2014/main" id="{9779992A-729A-BAF3-59B7-CBC2485CC28F}"/>
-              </a:ext>
-            </a:extLst>
-          </p:cNvPr>
-          <p:cNvPicPr>
-            <a:picLocks noChangeAspect="1"/>
-          </p:cNvPicPr>
-          <p:nvPr/>
-        </p:nvPicPr>
-        <p:blipFill>
-          <a:blip r:embed="rId3"/>
-          <a:srcRect l="1309" t="67935" r="3721" b="8708"/>
-          <a:stretch>
-            <a:fillRect/>
-          </a:stretch>
-        </p:blipFill>
-        <p:spPr>
-          <a:xfrm>
-            <a:off x="290623" y="4042797"/>
-            <a:ext cx="11610754" cy="1294166"/>
-          </a:xfrm>
-          <a:prstGeom prst="rect">
-            <a:avLst/>
-          </a:prstGeom>
-        </p:spPr>
-      </p:pic>
-      <p:sp>
-        <p:nvSpPr>
-          <p:cNvPr id="3" name="Rounded Rectangle 37">
-            <a:extLst>
-              <a:ext uri="{FF2B5EF4-FFF2-40B4-BE49-F238E27FC236}">
-                <a16:creationId xmlns:a16="http://schemas.microsoft.com/office/drawing/2014/main" id="{882D8B7E-10D4-95FC-258F-7B44FA4A7056}"/>
+      <p:sp>
+        <p:nvSpPr>
+          <p:cNvPr id="2" name="Rounded Rectangle 37">
+            <a:extLst>
+              <a:ext uri="{FF2B5EF4-FFF2-40B4-BE49-F238E27FC236}">
+                <a16:creationId xmlns:a16="http://schemas.microsoft.com/office/drawing/2014/main" id="{24BA7E6C-A4F9-3FF4-6CC4-BA33E9D64A36}"/>
               </a:ext>
             </a:extLst>
           </p:cNvPr>
@@ -27477,10 +27932,10 @@
       </p:sp>
       <p:sp>
         <p:nvSpPr>
-          <p:cNvPr id="4" name="TextBox 38">
-            <a:extLst>
-              <a:ext uri="{FF2B5EF4-FFF2-40B4-BE49-F238E27FC236}">
-                <a16:creationId xmlns:a16="http://schemas.microsoft.com/office/drawing/2014/main" id="{3C21B583-0A1F-1A4E-4EE5-DF7CCAF9B594}"/>
+          <p:cNvPr id="34" name="TextBox 38">
+            <a:extLst>
+              <a:ext uri="{FF2B5EF4-FFF2-40B4-BE49-F238E27FC236}">
+                <a16:creationId xmlns:a16="http://schemas.microsoft.com/office/drawing/2014/main" id="{FFBF0572-DFA9-FCE0-7E6C-E3BA28335B2D}"/>
               </a:ext>
             </a:extLst>
           </p:cNvPr>
@@ -27515,7 +27970,7 @@
               </a:spcAft>
             </a:pPr>
             <a:r>
-              <a:rPr lang="fr-FR" sz="1674" b="1">
+              <a:rPr lang="fr-FR" sz="1674" b="1" dirty="0">
                 <a:solidFill>
                   <a:srgbClr val="FFFFFF"/>
                 </a:solidFill>
@@ -27523,7 +27978,7 @@
               </a:rPr>
               <a:t>35</a:t>
             </a:r>
-            <a:endParaRPr sz="1674" b="1">
+            <a:endParaRPr sz="1674" b="1" dirty="0">
               <a:solidFill>
                 <a:srgbClr val="FFFFFF"/>
               </a:solidFill>
@@ -27533,6 +27988,11 @@
         </p:txBody>
       </p:sp>
     </p:spTree>
+    <p:extLst>
+      <p:ext uri="{BB962C8B-B14F-4D97-AF65-F5344CB8AC3E}">
+        <p14:creationId xmlns:p14="http://schemas.microsoft.com/office/powerpoint/2010/main" val="3539182063"/>
+      </p:ext>
+    </p:extLst>
   </p:cSld>
   <p:clrMapOvr>
     <a:masterClrMapping/>
@@ -27559,10 +28019,70 @@
       </p:grpSpPr>
       <p:sp>
         <p:nvSpPr>
-          <p:cNvPr id="3" name="Rounded Rectangle 2">
-            <a:extLst>
-              <a:ext uri="{FF2B5EF4-FFF2-40B4-BE49-F238E27FC236}">
-                <a16:creationId xmlns:a16="http://schemas.microsoft.com/office/drawing/2014/main" id="{1ECA997D-D45A-8B7C-D1CD-6DD020F14D5B}"/>
+          <p:cNvPr id="4" name="TextBox 4">
+            <a:extLst>
+              <a:ext uri="{FF2B5EF4-FFF2-40B4-BE49-F238E27FC236}">
+                <a16:creationId xmlns:a16="http://schemas.microsoft.com/office/drawing/2014/main" id="{D97D5083-4B09-5F73-626F-2EC2B9122AE7}"/>
+              </a:ext>
+            </a:extLst>
+          </p:cNvPr>
+          <p:cNvSpPr txBox="1"/>
+          <p:nvPr/>
+        </p:nvSpPr>
+        <p:spPr>
+          <a:xfrm>
+            <a:off x="5665311" y="3101627"/>
+            <a:ext cx="861070" cy="807144"/>
+          </a:xfrm>
+          <a:prstGeom prst="rect">
+            <a:avLst/>
+          </a:prstGeom>
+          <a:noFill/>
+        </p:spPr>
+        <p:txBody>
+          <a:bodyPr wrap="none" lIns="73152" tIns="54864" rIns="73152" bIns="54864" anchor="ctr">
+            <a:spAutoFit/>
+          </a:bodyPr>
+          <a:lstStyle/>
+          <a:p>
+            <a:pPr algn="ctr">
+              <a:lnSpc>
+                <a:spcPts val="5850"/>
+              </a:lnSpc>
+              <a:spcBef>
+                <a:spcPts val="0"/>
+              </a:spcBef>
+              <a:spcAft>
+                <a:spcPts val="0"/>
+              </a:spcAft>
+            </a:pPr>
+            <a:r>
+              <a:rPr lang="fr-FR" sz="3588" b="1">
+                <a:solidFill>
+                  <a:srgbClr val="FFFFFF"/>
+                </a:solidFill>
+                <a:latin typeface="Poppins"/>
+              </a:rPr>
+              <a:t>09</a:t>
+            </a:r>
+            <a:r>
+              <a:rPr sz="3588" b="1">
+                <a:solidFill>
+                  <a:srgbClr val="FFFFFF"/>
+                </a:solidFill>
+                <a:latin typeface="Poppins"/>
+              </a:rPr>
+              <a:t>.</a:t>
+            </a:r>
+          </a:p>
+        </p:txBody>
+      </p:sp>
+      <p:sp>
+        <p:nvSpPr>
+          <p:cNvPr id="5" name="Rectangle 4">
+            <a:extLst>
+              <a:ext uri="{FF2B5EF4-FFF2-40B4-BE49-F238E27FC236}">
+                <a16:creationId xmlns:a16="http://schemas.microsoft.com/office/drawing/2014/main" id="{E0790512-E0F4-61B1-C9A7-DAC95CCCEA3A}"/>
               </a:ext>
             </a:extLst>
           </p:cNvPr>
@@ -27571,19 +28091,30 @@
         </p:nvSpPr>
         <p:spPr>
           <a:xfrm>
-            <a:off x="609584" y="1114425"/>
-            <a:ext cx="5371965" cy="1657350"/>
-          </a:xfrm>
-          <a:prstGeom prst="roundRect">
-            <a:avLst>
-              <a:gd name="adj" fmla="val 13793"/>
-            </a:avLst>
-          </a:prstGeom>
-          <a:solidFill>
-            <a:srgbClr val="FFFFFF">
-              <a:alpha val="5000"/>
-            </a:srgbClr>
-          </a:solidFill>
+            <a:off x="4876678" y="4876800"/>
+            <a:ext cx="2438339" cy="38100"/>
+          </a:xfrm>
+          <a:prstGeom prst="rect">
+            <a:avLst/>
+          </a:prstGeom>
+          <a:gradFill rotWithShape="1">
+            <a:gsLst>
+              <a:gs pos="0">
+                <a:srgbClr val="000000">
+                  <a:alpha val="0"/>
+                </a:srgbClr>
+              </a:gs>
+              <a:gs pos="50000">
+                <a:srgbClr val="0288D1"/>
+              </a:gs>
+              <a:gs pos="100000">
+                <a:srgbClr val="000000">
+                  <a:alpha val="0"/>
+                </a:srgbClr>
+              </a:gs>
+            </a:gsLst>
+            <a:lin ang="10800000" scaled="0"/>
+          </a:gradFill>
           <a:ln>
             <a:noFill/>
           </a:ln>
@@ -27613,63 +28144,61 @@
       </p:sp>
       <p:sp>
         <p:nvSpPr>
-          <p:cNvPr id="4" name="Round Same Side Corner Rectangle 3">
-            <a:extLst>
-              <a:ext uri="{FF2B5EF4-FFF2-40B4-BE49-F238E27FC236}">
-                <a16:creationId xmlns:a16="http://schemas.microsoft.com/office/drawing/2014/main" id="{31C36D48-E167-CC2A-174D-466019753571}"/>
-              </a:ext>
-            </a:extLst>
-          </p:cNvPr>
-          <p:cNvSpPr/>
-          <p:nvPr/>
-        </p:nvSpPr>
-        <p:spPr>
-          <a:xfrm rot="16200000">
-            <a:off x="-153051" y="1877060"/>
-            <a:ext cx="1657350" cy="132080"/>
-          </a:xfrm>
-          <a:prstGeom prst="round2SameRect">
-            <a:avLst>
-              <a:gd name="adj1" fmla="val 50000"/>
-              <a:gd name="adj2" fmla="val 0"/>
-            </a:avLst>
-          </a:prstGeom>
-          <a:solidFill>
-            <a:srgbClr val="14B8A6"/>
-          </a:solidFill>
-          <a:ln>
-            <a:noFill/>
-          </a:ln>
-        </p:spPr>
-        <p:style>
-          <a:lnRef idx="1">
-            <a:schemeClr val="accent1"/>
-          </a:lnRef>
-          <a:fillRef idx="3">
-            <a:schemeClr val="accent1"/>
-          </a:fillRef>
-          <a:effectRef idx="2">
-            <a:schemeClr val="accent1"/>
-          </a:effectRef>
-          <a:fontRef idx="minor">
-            <a:schemeClr val="lt1"/>
-          </a:fontRef>
-        </p:style>
-        <p:txBody>
-          <a:bodyPr rtlCol="0" anchor="ctr"/>
-          <a:lstStyle/>
-          <a:p>
-            <a:pPr algn="ctr"/>
-            <a:endParaRPr/>
+          <p:cNvPr id="6" name="TextBox 5">
+            <a:extLst>
+              <a:ext uri="{FF2B5EF4-FFF2-40B4-BE49-F238E27FC236}">
+                <a16:creationId xmlns:a16="http://schemas.microsoft.com/office/drawing/2014/main" id="{E1DF722C-8F7E-96D5-E247-9EBF04FF451B}"/>
+              </a:ext>
+            </a:extLst>
+          </p:cNvPr>
+          <p:cNvSpPr txBox="1"/>
+          <p:nvPr/>
+        </p:nvSpPr>
+        <p:spPr>
+          <a:xfrm>
+            <a:off x="4677111" y="4035769"/>
+            <a:ext cx="2827954" cy="624786"/>
+          </a:xfrm>
+          <a:prstGeom prst="rect">
+            <a:avLst/>
+          </a:prstGeom>
+          <a:noFill/>
+        </p:spPr>
+        <p:txBody>
+          <a:bodyPr wrap="none" lIns="73152" tIns="54864" rIns="73152" bIns="54864" anchor="ctr">
+            <a:spAutoFit/>
+          </a:bodyPr>
+          <a:lstStyle/>
+          <a:p>
+            <a:pPr algn="ctr">
+              <a:lnSpc>
+                <a:spcPts val="4030"/>
+              </a:lnSpc>
+              <a:spcBef>
+                <a:spcPts val="0"/>
+              </a:spcBef>
+              <a:spcAft>
+                <a:spcPts val="1560"/>
+              </a:spcAft>
+            </a:pPr>
+            <a:r>
+              <a:rPr lang="fr-FR" sz="3600" b="1">
+                <a:solidFill>
+                  <a:srgbClr val="0288D1"/>
+                </a:solidFill>
+                <a:latin typeface="Poppins"/>
+              </a:rPr>
+              <a:t>Conclusion</a:t>
+            </a:r>
           </a:p>
         </p:txBody>
       </p:sp>
       <p:pic>
         <p:nvPicPr>
-          <p:cNvPr id="5" name="Picture 4" descr="image.png">
-            <a:extLst>
-              <a:ext uri="{FF2B5EF4-FFF2-40B4-BE49-F238E27FC236}">
-                <a16:creationId xmlns:a16="http://schemas.microsoft.com/office/drawing/2014/main" id="{35EF93B1-683E-0509-41BB-0802ED6C3EBC}"/>
+          <p:cNvPr id="13" name="Picture 30" descr="image.png">
+            <a:extLst>
+              <a:ext uri="{FF2B5EF4-FFF2-40B4-BE49-F238E27FC236}">
+                <a16:creationId xmlns:a16="http://schemas.microsoft.com/office/drawing/2014/main" id="{265D4966-1012-4032-A2B2-E37DAD3481AD}"/>
               </a:ext>
             </a:extLst>
           </p:cNvPr>
@@ -27688,8 +28217,8 @@
         </p:blipFill>
         <p:spPr>
           <a:xfrm>
-            <a:off x="876278" y="1364045"/>
-            <a:ext cx="342891" cy="224658"/>
+            <a:off x="5688461" y="2001328"/>
+            <a:ext cx="805252" cy="602857"/>
           </a:xfrm>
           <a:prstGeom prst="rect">
             <a:avLst/>
@@ -27698,1990 +28227,10 @@
       </p:pic>
       <p:sp>
         <p:nvSpPr>
-          <p:cNvPr id="6" name="TextBox 5">
-            <a:extLst>
-              <a:ext uri="{FF2B5EF4-FFF2-40B4-BE49-F238E27FC236}">
-                <a16:creationId xmlns:a16="http://schemas.microsoft.com/office/drawing/2014/main" id="{5314BAA2-76B9-D406-5E3B-32458CC82B51}"/>
-              </a:ext>
-            </a:extLst>
-          </p:cNvPr>
-          <p:cNvSpPr txBox="1"/>
-          <p:nvPr/>
-        </p:nvSpPr>
-        <p:spPr>
-          <a:xfrm>
-            <a:off x="1371565" y="1284720"/>
-            <a:ext cx="1426929" cy="383310"/>
-          </a:xfrm>
-          <a:prstGeom prst="rect">
-            <a:avLst/>
-          </a:prstGeom>
-          <a:noFill/>
-        </p:spPr>
-        <p:txBody>
-          <a:bodyPr wrap="none" lIns="73152" tIns="54864" rIns="73152" bIns="54864" anchor="ctr">
-            <a:spAutoFit/>
-          </a:bodyPr>
-          <a:lstStyle/>
-          <a:p>
-            <a:pPr algn="l">
-              <a:lnSpc>
-                <a:spcPts val="2340"/>
-              </a:lnSpc>
-              <a:spcBef>
-                <a:spcPts val="0"/>
-              </a:spcBef>
-              <a:spcAft>
-                <a:spcPts val="520"/>
-              </a:spcAft>
-            </a:pPr>
-            <a:r>
-              <a:rPr sz="1600" b="1">
-                <a:solidFill>
-                  <a:srgbClr val="FFFFFF"/>
-                </a:solidFill>
-                <a:latin typeface="Roboto"/>
-              </a:rPr>
-              <a:t>Transparence</a:t>
-            </a:r>
-          </a:p>
-        </p:txBody>
-      </p:sp>
-      <p:sp>
-        <p:nvSpPr>
-          <p:cNvPr id="7" name="TextBox 6">
-            <a:extLst>
-              <a:ext uri="{FF2B5EF4-FFF2-40B4-BE49-F238E27FC236}">
-                <a16:creationId xmlns:a16="http://schemas.microsoft.com/office/drawing/2014/main" id="{9E5AECDA-2E4C-173E-B16F-B579E9442E4A}"/>
-              </a:ext>
-            </a:extLst>
-          </p:cNvPr>
-          <p:cNvSpPr txBox="1"/>
-          <p:nvPr/>
-        </p:nvSpPr>
-        <p:spPr>
-          <a:xfrm>
-            <a:off x="1371565" y="1707512"/>
-            <a:ext cx="4381390" cy="604524"/>
-          </a:xfrm>
-          <a:prstGeom prst="rect">
-            <a:avLst/>
-          </a:prstGeom>
-          <a:noFill/>
-        </p:spPr>
-        <p:txBody>
-          <a:bodyPr wrap="square" lIns="73152" tIns="54864" rIns="73152" bIns="54864" anchor="ctr">
-            <a:spAutoFit/>
-          </a:bodyPr>
-          <a:lstStyle/>
-          <a:p>
-            <a:pPr algn="l">
-              <a:lnSpc>
-                <a:spcPts val="1950"/>
-              </a:lnSpc>
-              <a:spcBef>
-                <a:spcPts val="0"/>
-              </a:spcBef>
-              <a:spcAft>
-                <a:spcPts val="0"/>
-              </a:spcAft>
-            </a:pPr>
-            <a:r>
-              <a:rPr sz="1400" b="0" err="1">
-                <a:solidFill>
-                  <a:srgbClr val="D1D5DB"/>
-                </a:solidFill>
-                <a:latin typeface="Roboto"/>
-              </a:rPr>
-              <a:t>Modèles</a:t>
-            </a:r>
-            <a:r>
-              <a:rPr sz="1400" b="0">
-                <a:solidFill>
-                  <a:srgbClr val="D1D5DB"/>
-                </a:solidFill>
-                <a:latin typeface="Roboto"/>
-              </a:rPr>
-              <a:t> </a:t>
-            </a:r>
-            <a:r>
-              <a:rPr sz="1400" b="0" err="1">
-                <a:solidFill>
-                  <a:srgbClr val="D1D5DB"/>
-                </a:solidFill>
-                <a:latin typeface="Roboto"/>
-              </a:rPr>
-              <a:t>explicables</a:t>
-            </a:r>
-            <a:r>
-              <a:rPr sz="1400" b="0">
-                <a:solidFill>
-                  <a:srgbClr val="D1D5DB"/>
-                </a:solidFill>
-                <a:latin typeface="Roboto"/>
-              </a:rPr>
-              <a:t>, documentation </a:t>
-            </a:r>
-            <a:r>
-              <a:rPr sz="1400" b="0" err="1">
-                <a:solidFill>
-                  <a:srgbClr val="D1D5DB"/>
-                </a:solidFill>
-                <a:latin typeface="Roboto"/>
-              </a:rPr>
-              <a:t>complète</a:t>
-            </a:r>
-            <a:r>
-              <a:rPr sz="1400" b="0">
-                <a:solidFill>
-                  <a:srgbClr val="D1D5DB"/>
-                </a:solidFill>
-                <a:latin typeface="Roboto"/>
-              </a:rPr>
-              <a:t>, </a:t>
-            </a:r>
-            <a:r>
-              <a:rPr sz="1400" b="0" err="1">
-                <a:solidFill>
-                  <a:srgbClr val="D1D5DB"/>
-                </a:solidFill>
-                <a:latin typeface="Roboto"/>
-              </a:rPr>
-              <a:t>corrélation</a:t>
-            </a:r>
-            <a:r>
-              <a:rPr sz="1400" b="0">
-                <a:solidFill>
-                  <a:srgbClr val="D1D5DB"/>
-                </a:solidFill>
-                <a:latin typeface="Roboto"/>
-              </a:rPr>
-              <a:t> ≠ </a:t>
-            </a:r>
-            <a:r>
-              <a:rPr sz="1400" b="0" err="1">
-                <a:solidFill>
-                  <a:srgbClr val="D1D5DB"/>
-                </a:solidFill>
-                <a:latin typeface="Roboto"/>
-              </a:rPr>
-              <a:t>causalité</a:t>
-            </a:r>
-            <a:endParaRPr sz="1400" b="0">
-              <a:solidFill>
-                <a:srgbClr val="D1D5DB"/>
-              </a:solidFill>
-              <a:latin typeface="Roboto"/>
-            </a:endParaRPr>
-          </a:p>
-        </p:txBody>
-      </p:sp>
-      <p:sp>
-        <p:nvSpPr>
-          <p:cNvPr id="8" name="Rounded Rectangle 7">
-            <a:extLst>
-              <a:ext uri="{FF2B5EF4-FFF2-40B4-BE49-F238E27FC236}">
-                <a16:creationId xmlns:a16="http://schemas.microsoft.com/office/drawing/2014/main" id="{3CBC1501-EDC1-FA8E-073B-F0FDA8572244}"/>
-              </a:ext>
-            </a:extLst>
-          </p:cNvPr>
-          <p:cNvSpPr/>
-          <p:nvPr/>
-        </p:nvSpPr>
-        <p:spPr>
-          <a:xfrm>
-            <a:off x="6210144" y="1114425"/>
-            <a:ext cx="5371965" cy="1657350"/>
-          </a:xfrm>
-          <a:prstGeom prst="roundRect">
-            <a:avLst>
-              <a:gd name="adj" fmla="val 13793"/>
-            </a:avLst>
-          </a:prstGeom>
-          <a:solidFill>
-            <a:srgbClr val="FFFFFF">
-              <a:alpha val="5000"/>
-            </a:srgbClr>
-          </a:solidFill>
-          <a:ln>
-            <a:noFill/>
-          </a:ln>
-        </p:spPr>
-        <p:style>
-          <a:lnRef idx="1">
-            <a:schemeClr val="accent1"/>
-          </a:lnRef>
-          <a:fillRef idx="3">
-            <a:schemeClr val="accent1"/>
-          </a:fillRef>
-          <a:effectRef idx="2">
-            <a:schemeClr val="accent1"/>
-          </a:effectRef>
-          <a:fontRef idx="minor">
-            <a:schemeClr val="lt1"/>
-          </a:fontRef>
-        </p:style>
-        <p:txBody>
-          <a:bodyPr rtlCol="0" anchor="ctr"/>
-          <a:lstStyle/>
-          <a:p>
-            <a:pPr algn="ctr"/>
-            <a:endParaRPr/>
-          </a:p>
-        </p:txBody>
-      </p:sp>
-      <p:sp>
-        <p:nvSpPr>
-          <p:cNvPr id="9" name="Round Same Side Corner Rectangle 8">
-            <a:extLst>
-              <a:ext uri="{FF2B5EF4-FFF2-40B4-BE49-F238E27FC236}">
-                <a16:creationId xmlns:a16="http://schemas.microsoft.com/office/drawing/2014/main" id="{F65E2879-F219-026E-49DF-917EF095B492}"/>
-              </a:ext>
-            </a:extLst>
-          </p:cNvPr>
-          <p:cNvSpPr/>
-          <p:nvPr/>
-        </p:nvSpPr>
-        <p:spPr>
-          <a:xfrm rot="16200000">
-            <a:off x="5447509" y="1877060"/>
-            <a:ext cx="1657350" cy="132080"/>
-          </a:xfrm>
-          <a:prstGeom prst="round2SameRect">
-            <a:avLst>
-              <a:gd name="adj1" fmla="val 50000"/>
-              <a:gd name="adj2" fmla="val 0"/>
-            </a:avLst>
-          </a:prstGeom>
-          <a:solidFill>
-            <a:srgbClr val="F97316"/>
-          </a:solidFill>
-          <a:ln>
-            <a:noFill/>
-          </a:ln>
-        </p:spPr>
-        <p:style>
-          <a:lnRef idx="1">
-            <a:schemeClr val="accent1"/>
-          </a:lnRef>
-          <a:fillRef idx="3">
-            <a:schemeClr val="accent1"/>
-          </a:fillRef>
-          <a:effectRef idx="2">
-            <a:schemeClr val="accent1"/>
-          </a:effectRef>
-          <a:fontRef idx="minor">
-            <a:schemeClr val="lt1"/>
-          </a:fontRef>
-        </p:style>
-        <p:txBody>
-          <a:bodyPr rtlCol="0" anchor="ctr"/>
-          <a:lstStyle/>
-          <a:p>
-            <a:pPr algn="ctr"/>
-            <a:endParaRPr/>
-          </a:p>
-        </p:txBody>
-      </p:sp>
-      <p:pic>
-        <p:nvPicPr>
-          <p:cNvPr id="10" name="Picture 9" descr="image.png">
-            <a:extLst>
-              <a:ext uri="{FF2B5EF4-FFF2-40B4-BE49-F238E27FC236}">
-                <a16:creationId xmlns:a16="http://schemas.microsoft.com/office/drawing/2014/main" id="{0B1A5C51-5B1C-F7D9-FE96-8927BC1BCF56}"/>
-              </a:ext>
-            </a:extLst>
-          </p:cNvPr>
-          <p:cNvPicPr>
-            <a:picLocks noChangeAspect="1"/>
-          </p:cNvPicPr>
-          <p:nvPr/>
-        </p:nvPicPr>
-        <p:blipFill>
-          <a:blip r:embed="rId3">
-            <a:alphaModFix/>
-          </a:blip>
-          <a:stretch>
-            <a:fillRect/>
-          </a:stretch>
-        </p:blipFill>
-        <p:spPr>
-          <a:xfrm>
-            <a:off x="6476838" y="1316749"/>
-            <a:ext cx="342891" cy="319251"/>
-          </a:xfrm>
-          <a:prstGeom prst="rect">
-            <a:avLst/>
-          </a:prstGeom>
-        </p:spPr>
-      </p:pic>
-      <p:sp>
-        <p:nvSpPr>
-          <p:cNvPr id="11" name="TextBox 10">
-            <a:extLst>
-              <a:ext uri="{FF2B5EF4-FFF2-40B4-BE49-F238E27FC236}">
-                <a16:creationId xmlns:a16="http://schemas.microsoft.com/office/drawing/2014/main" id="{0D6C5A4F-DFC3-ACE5-4E41-DF30F6E9D273}"/>
-              </a:ext>
-            </a:extLst>
-          </p:cNvPr>
-          <p:cNvSpPr txBox="1"/>
-          <p:nvPr/>
-        </p:nvSpPr>
-        <p:spPr>
-          <a:xfrm>
-            <a:off x="6972125" y="1284720"/>
-            <a:ext cx="1491049" cy="383310"/>
-          </a:xfrm>
-          <a:prstGeom prst="rect">
-            <a:avLst/>
-          </a:prstGeom>
-          <a:noFill/>
-        </p:spPr>
-        <p:txBody>
-          <a:bodyPr wrap="none" lIns="73152" tIns="54864" rIns="73152" bIns="54864" anchor="ctr">
-            <a:spAutoFit/>
-          </a:bodyPr>
-          <a:lstStyle/>
-          <a:p>
-            <a:pPr algn="l">
-              <a:lnSpc>
-                <a:spcPts val="2340"/>
-              </a:lnSpc>
-              <a:spcBef>
-                <a:spcPts val="0"/>
-              </a:spcBef>
-              <a:spcAft>
-                <a:spcPts val="520"/>
-              </a:spcAft>
-            </a:pPr>
-            <a:r>
-              <a:rPr sz="1600" b="1">
-                <a:solidFill>
-                  <a:srgbClr val="FFFFFF"/>
-                </a:solidFill>
-                <a:latin typeface="Roboto"/>
-              </a:rPr>
-              <a:t>Discrimination</a:t>
-            </a:r>
-          </a:p>
-        </p:txBody>
-      </p:sp>
-      <p:sp>
-        <p:nvSpPr>
-          <p:cNvPr id="12" name="TextBox 11">
-            <a:extLst>
-              <a:ext uri="{FF2B5EF4-FFF2-40B4-BE49-F238E27FC236}">
-                <a16:creationId xmlns:a16="http://schemas.microsoft.com/office/drawing/2014/main" id="{7165182E-404C-C024-E65C-E53C40F571CE}"/>
-              </a:ext>
-            </a:extLst>
-          </p:cNvPr>
-          <p:cNvSpPr txBox="1"/>
-          <p:nvPr/>
-        </p:nvSpPr>
-        <p:spPr>
-          <a:xfrm>
-            <a:off x="6972125" y="1722147"/>
-            <a:ext cx="4381390" cy="861005"/>
-          </a:xfrm>
-          <a:prstGeom prst="rect">
-            <a:avLst/>
-          </a:prstGeom>
-          <a:noFill/>
-        </p:spPr>
-        <p:txBody>
-          <a:bodyPr wrap="square" lIns="73152" tIns="54864" rIns="73152" bIns="54864" anchor="ctr">
-            <a:spAutoFit/>
-          </a:bodyPr>
-          <a:lstStyle/>
-          <a:p>
-            <a:pPr algn="l">
-              <a:lnSpc>
-                <a:spcPts val="1950"/>
-              </a:lnSpc>
-              <a:spcBef>
-                <a:spcPts val="0"/>
-              </a:spcBef>
-              <a:spcAft>
-                <a:spcPts val="0"/>
-              </a:spcAft>
-            </a:pPr>
-            <a:r>
-              <a:rPr sz="1400" b="0">
-                <a:solidFill>
-                  <a:srgbClr val="D1D5DB"/>
-                </a:solidFill>
-                <a:latin typeface="Roboto"/>
-              </a:rPr>
-              <a:t>Audit fairness par sous-</a:t>
-            </a:r>
-            <a:r>
-              <a:rPr sz="1400" b="0" err="1">
-                <a:solidFill>
-                  <a:srgbClr val="D1D5DB"/>
-                </a:solidFill>
-                <a:latin typeface="Roboto"/>
-              </a:rPr>
-              <a:t>groupes</a:t>
-            </a:r>
-            <a:r>
-              <a:rPr sz="1400" b="0">
-                <a:solidFill>
-                  <a:srgbClr val="D1D5DB"/>
-                </a:solidFill>
-                <a:latin typeface="Roboto"/>
-              </a:rPr>
-              <a:t> (</a:t>
-            </a:r>
-            <a:r>
-              <a:rPr sz="1400" b="0" err="1">
-                <a:solidFill>
-                  <a:srgbClr val="D1D5DB"/>
-                </a:solidFill>
-                <a:latin typeface="Roboto"/>
-              </a:rPr>
-              <a:t>célibataires</a:t>
-            </a:r>
-            <a:r>
-              <a:rPr sz="1400" b="0">
-                <a:solidFill>
-                  <a:srgbClr val="D1D5DB"/>
-                </a:solidFill>
-                <a:latin typeface="Roboto"/>
-              </a:rPr>
-              <a:t> 25.5% vs </a:t>
-            </a:r>
-            <a:r>
-              <a:rPr sz="1400" b="0" err="1">
-                <a:solidFill>
-                  <a:srgbClr val="D1D5DB"/>
-                </a:solidFill>
-                <a:latin typeface="Roboto"/>
-              </a:rPr>
-              <a:t>mariés</a:t>
-            </a:r>
-            <a:r>
-              <a:rPr sz="1400" b="0">
-                <a:solidFill>
-                  <a:srgbClr val="D1D5DB"/>
-                </a:solidFill>
-                <a:latin typeface="Roboto"/>
-              </a:rPr>
-              <a:t> 12.5% attrition), tests avec/sans variables </a:t>
-            </a:r>
-            <a:r>
-              <a:rPr sz="1400" b="0" err="1">
-                <a:solidFill>
-                  <a:srgbClr val="D1D5DB"/>
-                </a:solidFill>
-                <a:latin typeface="Roboto"/>
-              </a:rPr>
-              <a:t>sensibles</a:t>
-            </a:r>
-            <a:endParaRPr sz="1400" b="0">
-              <a:solidFill>
-                <a:srgbClr val="D1D5DB"/>
-              </a:solidFill>
-              <a:latin typeface="Roboto"/>
-            </a:endParaRPr>
-          </a:p>
-        </p:txBody>
-      </p:sp>
-      <p:sp>
-        <p:nvSpPr>
-          <p:cNvPr id="13" name="Rounded Rectangle 12">
-            <a:extLst>
-              <a:ext uri="{FF2B5EF4-FFF2-40B4-BE49-F238E27FC236}">
-                <a16:creationId xmlns:a16="http://schemas.microsoft.com/office/drawing/2014/main" id="{2536A1F7-E26E-E455-F125-A88CDFDF0BC4}"/>
-              </a:ext>
-            </a:extLst>
-          </p:cNvPr>
-          <p:cNvSpPr/>
-          <p:nvPr/>
-        </p:nvSpPr>
-        <p:spPr>
-          <a:xfrm>
-            <a:off x="609584" y="3000375"/>
-            <a:ext cx="5371965" cy="1657350"/>
-          </a:xfrm>
-          <a:prstGeom prst="roundRect">
-            <a:avLst>
-              <a:gd name="adj" fmla="val 13793"/>
-            </a:avLst>
-          </a:prstGeom>
-          <a:solidFill>
-            <a:srgbClr val="FFFFFF">
-              <a:alpha val="5000"/>
-            </a:srgbClr>
-          </a:solidFill>
-          <a:ln>
-            <a:noFill/>
-          </a:ln>
-        </p:spPr>
-        <p:style>
-          <a:lnRef idx="1">
-            <a:schemeClr val="accent1"/>
-          </a:lnRef>
-          <a:fillRef idx="3">
-            <a:schemeClr val="accent1"/>
-          </a:fillRef>
-          <a:effectRef idx="2">
-            <a:schemeClr val="accent1"/>
-          </a:effectRef>
-          <a:fontRef idx="minor">
-            <a:schemeClr val="lt1"/>
-          </a:fontRef>
-        </p:style>
-        <p:txBody>
-          <a:bodyPr rtlCol="0" anchor="ctr"/>
-          <a:lstStyle/>
-          <a:p>
-            <a:pPr algn="ctr"/>
-            <a:endParaRPr/>
-          </a:p>
-        </p:txBody>
-      </p:sp>
-      <p:sp>
-        <p:nvSpPr>
-          <p:cNvPr id="14" name="Round Same Side Corner Rectangle 13">
-            <a:extLst>
-              <a:ext uri="{FF2B5EF4-FFF2-40B4-BE49-F238E27FC236}">
-                <a16:creationId xmlns:a16="http://schemas.microsoft.com/office/drawing/2014/main" id="{94D4AB43-45D4-A890-B03C-819E056FB1B1}"/>
-              </a:ext>
-            </a:extLst>
-          </p:cNvPr>
-          <p:cNvSpPr/>
-          <p:nvPr/>
-        </p:nvSpPr>
-        <p:spPr>
-          <a:xfrm rot="16200000">
-            <a:off x="-153051" y="3763010"/>
-            <a:ext cx="1657350" cy="132080"/>
-          </a:xfrm>
-          <a:prstGeom prst="round2SameRect">
-            <a:avLst>
-              <a:gd name="adj1" fmla="val 50000"/>
-              <a:gd name="adj2" fmla="val 0"/>
-            </a:avLst>
-          </a:prstGeom>
-          <a:solidFill>
-            <a:srgbClr val="A855F7"/>
-          </a:solidFill>
-          <a:ln>
-            <a:noFill/>
-          </a:ln>
-        </p:spPr>
-        <p:style>
-          <a:lnRef idx="1">
-            <a:schemeClr val="accent1"/>
-          </a:lnRef>
-          <a:fillRef idx="3">
-            <a:schemeClr val="accent1"/>
-          </a:fillRef>
-          <a:effectRef idx="2">
-            <a:schemeClr val="accent1"/>
-          </a:effectRef>
-          <a:fontRef idx="minor">
-            <a:schemeClr val="lt1"/>
-          </a:fontRef>
-        </p:style>
-        <p:txBody>
-          <a:bodyPr rtlCol="0" anchor="ctr"/>
-          <a:lstStyle/>
-          <a:p>
-            <a:pPr algn="ctr"/>
-            <a:endParaRPr/>
-          </a:p>
-        </p:txBody>
-      </p:sp>
-      <p:pic>
-        <p:nvPicPr>
-          <p:cNvPr id="15" name="Picture 14" descr="image.png">
-            <a:extLst>
-              <a:ext uri="{FF2B5EF4-FFF2-40B4-BE49-F238E27FC236}">
-                <a16:creationId xmlns:a16="http://schemas.microsoft.com/office/drawing/2014/main" id="{391ACEF2-A7C4-A4BD-972E-637F8BC70F5D}"/>
-              </a:ext>
-            </a:extLst>
-          </p:cNvPr>
-          <p:cNvPicPr>
-            <a:picLocks noChangeAspect="1"/>
-          </p:cNvPicPr>
-          <p:nvPr/>
-        </p:nvPicPr>
-        <p:blipFill>
-          <a:blip r:embed="rId4">
-            <a:alphaModFix/>
-          </a:blip>
-          <a:stretch>
-            <a:fillRect/>
-          </a:stretch>
-        </p:blipFill>
-        <p:spPr>
-          <a:xfrm>
-            <a:off x="876278" y="3229303"/>
-            <a:ext cx="342891" cy="266043"/>
-          </a:xfrm>
-          <a:prstGeom prst="rect">
-            <a:avLst/>
-          </a:prstGeom>
-        </p:spPr>
-      </p:pic>
-      <p:sp>
-        <p:nvSpPr>
-          <p:cNvPr id="16" name="TextBox 15">
-            <a:extLst>
-              <a:ext uri="{FF2B5EF4-FFF2-40B4-BE49-F238E27FC236}">
-                <a16:creationId xmlns:a16="http://schemas.microsoft.com/office/drawing/2014/main" id="{AFFFF5CB-A902-BA05-B90D-03505B8C1A9C}"/>
-              </a:ext>
-            </a:extLst>
-          </p:cNvPr>
-          <p:cNvSpPr txBox="1"/>
-          <p:nvPr/>
-        </p:nvSpPr>
-        <p:spPr>
-          <a:xfrm>
-            <a:off x="1371565" y="3170669"/>
-            <a:ext cx="1757148" cy="383310"/>
-          </a:xfrm>
-          <a:prstGeom prst="rect">
-            <a:avLst/>
-          </a:prstGeom>
-          <a:noFill/>
-        </p:spPr>
-        <p:txBody>
-          <a:bodyPr wrap="none" lIns="73152" tIns="54864" rIns="73152" bIns="54864" anchor="ctr">
-            <a:spAutoFit/>
-          </a:bodyPr>
-          <a:lstStyle/>
-          <a:p>
-            <a:pPr algn="l">
-              <a:lnSpc>
-                <a:spcPts val="2340"/>
-              </a:lnSpc>
-              <a:spcBef>
-                <a:spcPts val="0"/>
-              </a:spcBef>
-              <a:spcAft>
-                <a:spcPts val="520"/>
-              </a:spcAft>
-            </a:pPr>
-            <a:r>
-              <a:rPr sz="1600" b="1" err="1">
-                <a:solidFill>
-                  <a:srgbClr val="FFFFFF"/>
-                </a:solidFill>
-                <a:latin typeface="Roboto"/>
-              </a:rPr>
-              <a:t>Déshumanisation</a:t>
-            </a:r>
-            <a:endParaRPr sz="1600" b="1">
-              <a:solidFill>
-                <a:srgbClr val="FFFFFF"/>
-              </a:solidFill>
-              <a:latin typeface="Roboto"/>
-            </a:endParaRPr>
-          </a:p>
-        </p:txBody>
-      </p:sp>
-      <p:sp>
-        <p:nvSpPr>
-          <p:cNvPr id="17" name="TextBox 16">
-            <a:extLst>
-              <a:ext uri="{FF2B5EF4-FFF2-40B4-BE49-F238E27FC236}">
-                <a16:creationId xmlns:a16="http://schemas.microsoft.com/office/drawing/2014/main" id="{7B1D4B2A-790F-04CB-9E7E-70CF85DB7569}"/>
-              </a:ext>
-            </a:extLst>
-          </p:cNvPr>
-          <p:cNvSpPr txBox="1"/>
-          <p:nvPr/>
-        </p:nvSpPr>
-        <p:spPr>
-          <a:xfrm>
-            <a:off x="1371565" y="3736338"/>
-            <a:ext cx="4381390" cy="604524"/>
-          </a:xfrm>
-          <a:prstGeom prst="rect">
-            <a:avLst/>
-          </a:prstGeom>
-          <a:noFill/>
-        </p:spPr>
-        <p:txBody>
-          <a:bodyPr wrap="square" lIns="73152" tIns="54864" rIns="73152" bIns="54864" anchor="ctr">
-            <a:spAutoFit/>
-          </a:bodyPr>
-          <a:lstStyle/>
-          <a:p>
-            <a:pPr algn="l">
-              <a:lnSpc>
-                <a:spcPts val="1950"/>
-              </a:lnSpc>
-              <a:spcBef>
-                <a:spcPts val="0"/>
-              </a:spcBef>
-              <a:spcAft>
-                <a:spcPts val="0"/>
-              </a:spcAft>
-            </a:pPr>
-            <a:r>
-              <a:rPr sz="1400" b="0" err="1">
-                <a:solidFill>
-                  <a:srgbClr val="D1D5DB"/>
-                </a:solidFill>
-                <a:latin typeface="Roboto"/>
-              </a:rPr>
-              <a:t>Outil</a:t>
-            </a:r>
-            <a:r>
-              <a:rPr sz="1400" b="0">
-                <a:solidFill>
-                  <a:srgbClr val="D1D5DB"/>
-                </a:solidFill>
-                <a:latin typeface="Roboto"/>
-              </a:rPr>
-              <a:t> </a:t>
-            </a:r>
-            <a:r>
-              <a:rPr sz="1400" b="0" err="1">
-                <a:solidFill>
-                  <a:srgbClr val="D1D5DB"/>
-                </a:solidFill>
-                <a:latin typeface="Roboto"/>
-              </a:rPr>
-              <a:t>d'aide</a:t>
-            </a:r>
-            <a:r>
-              <a:rPr sz="1400" b="0">
-                <a:solidFill>
-                  <a:srgbClr val="D1D5DB"/>
-                </a:solidFill>
-                <a:latin typeface="Roboto"/>
-              </a:rPr>
-              <a:t> à la </a:t>
-            </a:r>
-            <a:r>
-              <a:rPr sz="1400" b="0" err="1">
-                <a:solidFill>
-                  <a:srgbClr val="D1D5DB"/>
-                </a:solidFill>
-                <a:latin typeface="Roboto"/>
-              </a:rPr>
-              <a:t>décision</a:t>
-            </a:r>
-            <a:r>
-              <a:rPr sz="1400" b="0">
-                <a:solidFill>
-                  <a:srgbClr val="D1D5DB"/>
-                </a:solidFill>
-                <a:latin typeface="Roboto"/>
-              </a:rPr>
-              <a:t> </a:t>
-            </a:r>
-            <a:r>
-              <a:rPr sz="1400" b="0" err="1">
-                <a:solidFill>
-                  <a:srgbClr val="D1D5DB"/>
-                </a:solidFill>
-                <a:latin typeface="Roboto"/>
-              </a:rPr>
-              <a:t>uniquement</a:t>
-            </a:r>
-            <a:r>
-              <a:rPr sz="1400" b="0">
-                <a:solidFill>
-                  <a:srgbClr val="D1D5DB"/>
-                </a:solidFill>
-                <a:latin typeface="Roboto"/>
-              </a:rPr>
-              <a:t>, revue humaine </a:t>
-            </a:r>
-            <a:r>
-              <a:rPr sz="1400" b="0" err="1">
-                <a:solidFill>
-                  <a:srgbClr val="D1D5DB"/>
-                </a:solidFill>
-                <a:latin typeface="Roboto"/>
-              </a:rPr>
-              <a:t>obligatoire</a:t>
-            </a:r>
-            <a:r>
-              <a:rPr sz="1400" b="0">
-                <a:solidFill>
-                  <a:srgbClr val="D1D5DB"/>
-                </a:solidFill>
-                <a:latin typeface="Roboto"/>
-              </a:rPr>
-              <a:t>, </a:t>
-            </a:r>
-            <a:r>
-              <a:rPr sz="1400" b="0" err="1">
-                <a:solidFill>
-                  <a:srgbClr val="D1D5DB"/>
-                </a:solidFill>
-                <a:latin typeface="Roboto"/>
-              </a:rPr>
-              <a:t>aucun</a:t>
-            </a:r>
-            <a:r>
-              <a:rPr sz="1400" b="0">
-                <a:solidFill>
-                  <a:srgbClr val="D1D5DB"/>
-                </a:solidFill>
-                <a:latin typeface="Roboto"/>
-              </a:rPr>
-              <a:t> scoring </a:t>
-            </a:r>
-            <a:r>
-              <a:rPr sz="1400" b="0" err="1">
-                <a:solidFill>
-                  <a:srgbClr val="D1D5DB"/>
-                </a:solidFill>
-                <a:latin typeface="Roboto"/>
-              </a:rPr>
-              <a:t>individuel</a:t>
-            </a:r>
-            <a:r>
-              <a:rPr sz="1400" b="0">
-                <a:solidFill>
-                  <a:srgbClr val="D1D5DB"/>
-                </a:solidFill>
-                <a:latin typeface="Roboto"/>
-              </a:rPr>
-              <a:t> communiqué</a:t>
-            </a:r>
-          </a:p>
-        </p:txBody>
-      </p:sp>
-      <p:sp>
-        <p:nvSpPr>
-          <p:cNvPr id="18" name="Rounded Rectangle 17">
-            <a:extLst>
-              <a:ext uri="{FF2B5EF4-FFF2-40B4-BE49-F238E27FC236}">
-                <a16:creationId xmlns:a16="http://schemas.microsoft.com/office/drawing/2014/main" id="{223B4F0F-DBB5-DB1B-1236-60F907391A00}"/>
-              </a:ext>
-            </a:extLst>
-          </p:cNvPr>
-          <p:cNvSpPr/>
-          <p:nvPr/>
-        </p:nvSpPr>
-        <p:spPr>
-          <a:xfrm>
-            <a:off x="6210144" y="3000375"/>
-            <a:ext cx="5371965" cy="1657350"/>
-          </a:xfrm>
-          <a:prstGeom prst="roundRect">
-            <a:avLst>
-              <a:gd name="adj" fmla="val 13793"/>
-            </a:avLst>
-          </a:prstGeom>
-          <a:solidFill>
-            <a:srgbClr val="FFFFFF">
-              <a:alpha val="5000"/>
-            </a:srgbClr>
-          </a:solidFill>
-          <a:ln>
-            <a:noFill/>
-          </a:ln>
-        </p:spPr>
-        <p:style>
-          <a:lnRef idx="1">
-            <a:schemeClr val="accent1"/>
-          </a:lnRef>
-          <a:fillRef idx="3">
-            <a:schemeClr val="accent1"/>
-          </a:fillRef>
-          <a:effectRef idx="2">
-            <a:schemeClr val="accent1"/>
-          </a:effectRef>
-          <a:fontRef idx="minor">
-            <a:schemeClr val="lt1"/>
-          </a:fontRef>
-        </p:style>
-        <p:txBody>
-          <a:bodyPr rtlCol="0" anchor="ctr"/>
-          <a:lstStyle/>
-          <a:p>
-            <a:pPr algn="ctr"/>
-            <a:endParaRPr/>
-          </a:p>
-        </p:txBody>
-      </p:sp>
-      <p:sp>
-        <p:nvSpPr>
-          <p:cNvPr id="19" name="Round Same Side Corner Rectangle 18">
-            <a:extLst>
-              <a:ext uri="{FF2B5EF4-FFF2-40B4-BE49-F238E27FC236}">
-                <a16:creationId xmlns:a16="http://schemas.microsoft.com/office/drawing/2014/main" id="{34DCD1DC-560D-F137-A4A1-753037B53E64}"/>
-              </a:ext>
-            </a:extLst>
-          </p:cNvPr>
-          <p:cNvSpPr/>
-          <p:nvPr/>
-        </p:nvSpPr>
-        <p:spPr>
-          <a:xfrm rot="16200000">
-            <a:off x="5447509" y="3763010"/>
-            <a:ext cx="1657350" cy="132080"/>
-          </a:xfrm>
-          <a:prstGeom prst="round2SameRect">
-            <a:avLst>
-              <a:gd name="adj1" fmla="val 50000"/>
-              <a:gd name="adj2" fmla="val 0"/>
-            </a:avLst>
-          </a:prstGeom>
-          <a:solidFill>
-            <a:srgbClr val="3B82F6"/>
-          </a:solidFill>
-          <a:ln>
-            <a:noFill/>
-          </a:ln>
-        </p:spPr>
-        <p:style>
-          <a:lnRef idx="1">
-            <a:schemeClr val="accent1"/>
-          </a:lnRef>
-          <a:fillRef idx="3">
-            <a:schemeClr val="accent1"/>
-          </a:fillRef>
-          <a:effectRef idx="2">
-            <a:schemeClr val="accent1"/>
-          </a:effectRef>
-          <a:fontRef idx="minor">
-            <a:schemeClr val="lt1"/>
-          </a:fontRef>
-        </p:style>
-        <p:txBody>
-          <a:bodyPr rtlCol="0" anchor="ctr"/>
-          <a:lstStyle/>
-          <a:p>
-            <a:pPr algn="ctr"/>
-            <a:endParaRPr/>
-          </a:p>
-        </p:txBody>
-      </p:sp>
-      <p:pic>
-        <p:nvPicPr>
-          <p:cNvPr id="20" name="Picture 19" descr="image.png">
-            <a:extLst>
-              <a:ext uri="{FF2B5EF4-FFF2-40B4-BE49-F238E27FC236}">
-                <a16:creationId xmlns:a16="http://schemas.microsoft.com/office/drawing/2014/main" id="{A4F037B6-F7C1-CFE2-28CC-430937C5FC7D}"/>
-              </a:ext>
-            </a:extLst>
-          </p:cNvPr>
-          <p:cNvPicPr>
-            <a:picLocks noChangeAspect="1"/>
-          </p:cNvPicPr>
-          <p:nvPr/>
-        </p:nvPicPr>
-        <p:blipFill>
-          <a:blip r:embed="rId5">
-            <a:alphaModFix/>
-          </a:blip>
-          <a:stretch>
-            <a:fillRect/>
-          </a:stretch>
-        </p:blipFill>
-        <p:spPr>
-          <a:xfrm>
-            <a:off x="6476838" y="3202699"/>
-            <a:ext cx="342891" cy="319251"/>
-          </a:xfrm>
-          <a:prstGeom prst="rect">
-            <a:avLst/>
-          </a:prstGeom>
-        </p:spPr>
-      </p:pic>
-      <p:sp>
-        <p:nvSpPr>
-          <p:cNvPr id="21" name="TextBox 20">
-            <a:extLst>
-              <a:ext uri="{FF2B5EF4-FFF2-40B4-BE49-F238E27FC236}">
-                <a16:creationId xmlns:a16="http://schemas.microsoft.com/office/drawing/2014/main" id="{64EB84B2-1EB4-8917-5AF8-AEC19023E272}"/>
-              </a:ext>
-            </a:extLst>
-          </p:cNvPr>
-          <p:cNvSpPr txBox="1"/>
-          <p:nvPr/>
-        </p:nvSpPr>
-        <p:spPr>
-          <a:xfrm>
-            <a:off x="6972125" y="3170669"/>
-            <a:ext cx="1308307" cy="383310"/>
-          </a:xfrm>
-          <a:prstGeom prst="rect">
-            <a:avLst/>
-          </a:prstGeom>
-          <a:noFill/>
-        </p:spPr>
-        <p:txBody>
-          <a:bodyPr wrap="none" lIns="73152" tIns="54864" rIns="73152" bIns="54864" anchor="ctr">
-            <a:spAutoFit/>
-          </a:bodyPr>
-          <a:lstStyle/>
-          <a:p>
-            <a:pPr algn="l">
-              <a:lnSpc>
-                <a:spcPts val="2340"/>
-              </a:lnSpc>
-              <a:spcBef>
-                <a:spcPts val="0"/>
-              </a:spcBef>
-              <a:spcAft>
-                <a:spcPts val="520"/>
-              </a:spcAft>
-            </a:pPr>
-            <a:r>
-              <a:rPr sz="1600" b="1" err="1">
-                <a:solidFill>
-                  <a:srgbClr val="FFFFFF"/>
-                </a:solidFill>
-                <a:latin typeface="Roboto"/>
-              </a:rPr>
-              <a:t>Sécurisation</a:t>
-            </a:r>
-            <a:endParaRPr sz="1600" b="1">
-              <a:solidFill>
-                <a:srgbClr val="FFFFFF"/>
-              </a:solidFill>
-              <a:latin typeface="Roboto"/>
-            </a:endParaRPr>
-          </a:p>
-        </p:txBody>
-      </p:sp>
-      <p:sp>
-        <p:nvSpPr>
-          <p:cNvPr id="22" name="TextBox 21">
-            <a:extLst>
-              <a:ext uri="{FF2B5EF4-FFF2-40B4-BE49-F238E27FC236}">
-                <a16:creationId xmlns:a16="http://schemas.microsoft.com/office/drawing/2014/main" id="{FEA66FCD-D91F-6009-6E46-62D7FF378E45}"/>
-              </a:ext>
-            </a:extLst>
-          </p:cNvPr>
-          <p:cNvSpPr txBox="1"/>
-          <p:nvPr/>
-        </p:nvSpPr>
-        <p:spPr>
-          <a:xfrm>
-            <a:off x="6972125" y="3608098"/>
-            <a:ext cx="4381390" cy="861005"/>
-          </a:xfrm>
-          <a:prstGeom prst="rect">
-            <a:avLst/>
-          </a:prstGeom>
-          <a:noFill/>
-        </p:spPr>
-        <p:txBody>
-          <a:bodyPr wrap="square" lIns="73152" tIns="54864" rIns="73152" bIns="54864" anchor="ctr">
-            <a:spAutoFit/>
-          </a:bodyPr>
-          <a:lstStyle/>
-          <a:p>
-            <a:pPr algn="l">
-              <a:lnSpc>
-                <a:spcPts val="1950"/>
-              </a:lnSpc>
-              <a:spcBef>
-                <a:spcPts val="0"/>
-              </a:spcBef>
-              <a:spcAft>
-                <a:spcPts val="0"/>
-              </a:spcAft>
-            </a:pPr>
-            <a:r>
-              <a:rPr sz="1400" b="0">
-                <a:solidFill>
-                  <a:srgbClr val="D1D5DB"/>
-                </a:solidFill>
-                <a:latin typeface="Roboto"/>
-              </a:rPr>
-              <a:t>Données </a:t>
-            </a:r>
-            <a:r>
-              <a:rPr sz="1400" b="0" err="1">
-                <a:solidFill>
-                  <a:srgbClr val="D1D5DB"/>
-                </a:solidFill>
-                <a:latin typeface="Roboto"/>
-              </a:rPr>
-              <a:t>anonymisées</a:t>
-            </a:r>
-            <a:r>
-              <a:rPr sz="1400" b="0">
-                <a:solidFill>
-                  <a:srgbClr val="D1D5DB"/>
-                </a:solidFill>
-                <a:latin typeface="Roboto"/>
-              </a:rPr>
-              <a:t> (</a:t>
-            </a:r>
-            <a:r>
-              <a:rPr sz="1400" b="0" err="1">
-                <a:solidFill>
-                  <a:srgbClr val="D1D5DB"/>
-                </a:solidFill>
-                <a:latin typeface="Roboto"/>
-              </a:rPr>
-              <a:t>EmployeeID</a:t>
-            </a:r>
-            <a:r>
-              <a:rPr sz="1400" b="0">
-                <a:solidFill>
-                  <a:srgbClr val="D1D5DB"/>
-                </a:solidFill>
-                <a:latin typeface="Roboto"/>
-              </a:rPr>
-              <a:t>), </a:t>
-            </a:r>
-            <a:r>
-              <a:rPr sz="1400" b="0" err="1">
-                <a:solidFill>
-                  <a:srgbClr val="D1D5DB"/>
-                </a:solidFill>
-                <a:latin typeface="Roboto"/>
-              </a:rPr>
-              <a:t>accès</a:t>
-            </a:r>
-            <a:r>
-              <a:rPr sz="1400" b="0">
-                <a:solidFill>
-                  <a:srgbClr val="D1D5DB"/>
-                </a:solidFill>
-                <a:latin typeface="Roboto"/>
-              </a:rPr>
-              <a:t> </a:t>
-            </a:r>
-            <a:r>
-              <a:rPr sz="1400" b="0" err="1">
-                <a:solidFill>
-                  <a:srgbClr val="D1D5DB"/>
-                </a:solidFill>
-                <a:latin typeface="Roboto"/>
-              </a:rPr>
-              <a:t>restreint</a:t>
-            </a:r>
-            <a:r>
-              <a:rPr sz="1400" b="0">
-                <a:solidFill>
-                  <a:srgbClr val="D1D5DB"/>
-                </a:solidFill>
-                <a:latin typeface="Roboto"/>
-              </a:rPr>
-              <a:t>, </a:t>
-            </a:r>
-            <a:r>
-              <a:rPr sz="1400" b="0" err="1">
-                <a:solidFill>
-                  <a:srgbClr val="D1D5DB"/>
-                </a:solidFill>
-                <a:latin typeface="Roboto"/>
-              </a:rPr>
-              <a:t>conforme</a:t>
-            </a:r>
-            <a:r>
-              <a:rPr sz="1400" b="0">
-                <a:solidFill>
-                  <a:srgbClr val="D1D5DB"/>
-                </a:solidFill>
-                <a:latin typeface="Roboto"/>
-              </a:rPr>
-              <a:t> RGPD, </a:t>
-            </a:r>
-            <a:r>
-              <a:rPr sz="1400" b="0" err="1">
-                <a:solidFill>
-                  <a:srgbClr val="D1D5DB"/>
-                </a:solidFill>
-                <a:latin typeface="Roboto"/>
-              </a:rPr>
-              <a:t>seuil</a:t>
-            </a:r>
-            <a:r>
-              <a:rPr sz="1400" b="0">
-                <a:solidFill>
-                  <a:srgbClr val="D1D5DB"/>
-                </a:solidFill>
-                <a:latin typeface="Roboto"/>
-              </a:rPr>
-              <a:t> minimal 50 </a:t>
-            </a:r>
-            <a:r>
-              <a:rPr sz="1400" b="0" err="1">
-                <a:solidFill>
-                  <a:srgbClr val="D1D5DB"/>
-                </a:solidFill>
-                <a:latin typeface="Roboto"/>
-              </a:rPr>
-              <a:t>individus</a:t>
-            </a:r>
-            <a:r>
-              <a:rPr sz="1400" b="0">
-                <a:solidFill>
-                  <a:srgbClr val="D1D5DB"/>
-                </a:solidFill>
-                <a:latin typeface="Roboto"/>
-              </a:rPr>
-              <a:t> par sous-</a:t>
-            </a:r>
-            <a:r>
-              <a:rPr sz="1400" b="0" err="1">
-                <a:solidFill>
-                  <a:srgbClr val="D1D5DB"/>
-                </a:solidFill>
-                <a:latin typeface="Roboto"/>
-              </a:rPr>
-              <a:t>groupe</a:t>
-            </a:r>
-            <a:endParaRPr sz="1400" b="0">
-              <a:solidFill>
-                <a:srgbClr val="D1D5DB"/>
-              </a:solidFill>
-              <a:latin typeface="Roboto"/>
-            </a:endParaRPr>
-          </a:p>
-        </p:txBody>
-      </p:sp>
-      <p:sp>
-        <p:nvSpPr>
-          <p:cNvPr id="23" name="Rounded Rectangle 22">
-            <a:extLst>
-              <a:ext uri="{FF2B5EF4-FFF2-40B4-BE49-F238E27FC236}">
-                <a16:creationId xmlns:a16="http://schemas.microsoft.com/office/drawing/2014/main" id="{8B8E7A97-4C12-FD16-6B1D-5F37DEFFE0A1}"/>
-              </a:ext>
-            </a:extLst>
-          </p:cNvPr>
-          <p:cNvSpPr/>
-          <p:nvPr/>
-        </p:nvSpPr>
-        <p:spPr>
-          <a:xfrm>
-            <a:off x="609584" y="4886325"/>
-            <a:ext cx="10972525" cy="1085850"/>
-          </a:xfrm>
-          <a:prstGeom prst="roundRect">
-            <a:avLst>
-              <a:gd name="adj" fmla="val 21052"/>
-            </a:avLst>
-          </a:prstGeom>
-          <a:solidFill>
-            <a:srgbClr val="FFFFFF">
-              <a:alpha val="5000"/>
-            </a:srgbClr>
-          </a:solidFill>
-          <a:ln>
-            <a:noFill/>
-          </a:ln>
-        </p:spPr>
-        <p:style>
-          <a:lnRef idx="1">
-            <a:schemeClr val="accent1"/>
-          </a:lnRef>
-          <a:fillRef idx="3">
-            <a:schemeClr val="accent1"/>
-          </a:fillRef>
-          <a:effectRef idx="2">
-            <a:schemeClr val="accent1"/>
-          </a:effectRef>
-          <a:fontRef idx="minor">
-            <a:schemeClr val="lt1"/>
-          </a:fontRef>
-        </p:style>
-        <p:txBody>
-          <a:bodyPr rtlCol="0" anchor="ctr"/>
-          <a:lstStyle/>
-          <a:p>
-            <a:pPr algn="ctr"/>
-            <a:endParaRPr/>
-          </a:p>
-        </p:txBody>
-      </p:sp>
-      <p:sp>
-        <p:nvSpPr>
-          <p:cNvPr id="24" name="Round Same Side Corner Rectangle 23">
-            <a:extLst>
-              <a:ext uri="{FF2B5EF4-FFF2-40B4-BE49-F238E27FC236}">
-                <a16:creationId xmlns:a16="http://schemas.microsoft.com/office/drawing/2014/main" id="{2F43DFFB-0AEA-3E21-158E-DDFE4B7254DF}"/>
-              </a:ext>
-            </a:extLst>
-          </p:cNvPr>
-          <p:cNvSpPr/>
-          <p:nvPr/>
-        </p:nvSpPr>
-        <p:spPr>
-          <a:xfrm rot="16200000">
-            <a:off x="132699" y="5363210"/>
-            <a:ext cx="1085850" cy="132080"/>
-          </a:xfrm>
-          <a:prstGeom prst="round2SameRect">
-            <a:avLst>
-              <a:gd name="adj1" fmla="val 50000"/>
-              <a:gd name="adj2" fmla="val 0"/>
-            </a:avLst>
-          </a:prstGeom>
-          <a:solidFill>
-            <a:srgbClr val="22C55E"/>
-          </a:solidFill>
-          <a:ln>
-            <a:noFill/>
-          </a:ln>
-        </p:spPr>
-        <p:style>
-          <a:lnRef idx="1">
-            <a:schemeClr val="accent1"/>
-          </a:lnRef>
-          <a:fillRef idx="3">
-            <a:schemeClr val="accent1"/>
-          </a:fillRef>
-          <a:effectRef idx="2">
-            <a:schemeClr val="accent1"/>
-          </a:effectRef>
-          <a:fontRef idx="minor">
-            <a:schemeClr val="lt1"/>
-          </a:fontRef>
-        </p:style>
-        <p:txBody>
-          <a:bodyPr rtlCol="0" anchor="ctr"/>
-          <a:lstStyle/>
-          <a:p>
-            <a:pPr algn="ctr"/>
-            <a:endParaRPr/>
-          </a:p>
-        </p:txBody>
-      </p:sp>
-      <p:pic>
-        <p:nvPicPr>
-          <p:cNvPr id="25" name="Picture 24" descr="image.png">
-            <a:extLst>
-              <a:ext uri="{FF2B5EF4-FFF2-40B4-BE49-F238E27FC236}">
-                <a16:creationId xmlns:a16="http://schemas.microsoft.com/office/drawing/2014/main" id="{56CD3AC6-8166-8773-E869-D81112EB99CB}"/>
-              </a:ext>
-            </a:extLst>
-          </p:cNvPr>
-          <p:cNvPicPr>
-            <a:picLocks noChangeAspect="1"/>
-          </p:cNvPicPr>
-          <p:nvPr/>
-        </p:nvPicPr>
-        <p:blipFill>
-          <a:blip r:embed="rId6">
-            <a:alphaModFix/>
-          </a:blip>
-          <a:stretch>
-            <a:fillRect/>
-          </a:stretch>
-        </p:blipFill>
-        <p:spPr>
-          <a:xfrm>
-            <a:off x="876278" y="5125599"/>
-            <a:ext cx="342891" cy="245350"/>
-          </a:xfrm>
-          <a:prstGeom prst="rect">
-            <a:avLst/>
-          </a:prstGeom>
-        </p:spPr>
-      </p:pic>
-      <p:sp>
-        <p:nvSpPr>
-          <p:cNvPr id="26" name="TextBox 25">
-            <a:extLst>
-              <a:ext uri="{FF2B5EF4-FFF2-40B4-BE49-F238E27FC236}">
-                <a16:creationId xmlns:a16="http://schemas.microsoft.com/office/drawing/2014/main" id="{BFC1ECCF-65FD-E9A2-F5FA-DFB8D03D8AE9}"/>
-              </a:ext>
-            </a:extLst>
-          </p:cNvPr>
-          <p:cNvSpPr txBox="1"/>
-          <p:nvPr/>
-        </p:nvSpPr>
-        <p:spPr>
-          <a:xfrm>
-            <a:off x="1371565" y="5056620"/>
-            <a:ext cx="2188356" cy="383310"/>
-          </a:xfrm>
-          <a:prstGeom prst="rect">
-            <a:avLst/>
-          </a:prstGeom>
-          <a:noFill/>
-        </p:spPr>
-        <p:txBody>
-          <a:bodyPr wrap="none" lIns="73152" tIns="54864" rIns="73152" bIns="54864" anchor="ctr">
-            <a:spAutoFit/>
-          </a:bodyPr>
-          <a:lstStyle/>
-          <a:p>
-            <a:pPr algn="l">
-              <a:lnSpc>
-                <a:spcPts val="2340"/>
-              </a:lnSpc>
-              <a:spcBef>
-                <a:spcPts val="0"/>
-              </a:spcBef>
-              <a:spcAft>
-                <a:spcPts val="520"/>
-              </a:spcAft>
-            </a:pPr>
-            <a:r>
-              <a:rPr sz="1600" b="1" err="1">
-                <a:solidFill>
-                  <a:srgbClr val="FFFFFF"/>
-                </a:solidFill>
-                <a:latin typeface="Roboto"/>
-              </a:rPr>
-              <a:t>Coût</a:t>
-            </a:r>
-            <a:r>
-              <a:rPr sz="1600" b="1">
-                <a:solidFill>
-                  <a:srgbClr val="FFFFFF"/>
-                </a:solidFill>
-                <a:latin typeface="Roboto"/>
-              </a:rPr>
-              <a:t> </a:t>
-            </a:r>
-            <a:r>
-              <a:rPr sz="1600" b="1" err="1">
-                <a:solidFill>
-                  <a:srgbClr val="FFFFFF"/>
-                </a:solidFill>
-                <a:latin typeface="Roboto"/>
-              </a:rPr>
-              <a:t>environnemental</a:t>
-            </a:r>
-            <a:endParaRPr sz="1600" b="1">
-              <a:solidFill>
-                <a:srgbClr val="FFFFFF"/>
-              </a:solidFill>
-              <a:latin typeface="Roboto"/>
-            </a:endParaRPr>
-          </a:p>
-        </p:txBody>
-      </p:sp>
-      <p:sp>
-        <p:nvSpPr>
-          <p:cNvPr id="27" name="TextBox 26">
-            <a:extLst>
-              <a:ext uri="{FF2B5EF4-FFF2-40B4-BE49-F238E27FC236}">
-                <a16:creationId xmlns:a16="http://schemas.microsoft.com/office/drawing/2014/main" id="{3FBD0BBA-2C4D-02E3-A4CA-FB976CC1FCFC}"/>
-              </a:ext>
-            </a:extLst>
-          </p:cNvPr>
-          <p:cNvSpPr txBox="1"/>
-          <p:nvPr/>
-        </p:nvSpPr>
-        <p:spPr>
-          <a:xfrm>
-            <a:off x="1371565" y="5464777"/>
-            <a:ext cx="6498830" cy="348044"/>
-          </a:xfrm>
-          <a:prstGeom prst="rect">
-            <a:avLst/>
-          </a:prstGeom>
-          <a:noFill/>
-        </p:spPr>
-        <p:txBody>
-          <a:bodyPr wrap="none" lIns="73152" tIns="54864" rIns="73152" bIns="54864" anchor="ctr">
-            <a:spAutoFit/>
-          </a:bodyPr>
-          <a:lstStyle/>
-          <a:p>
-            <a:pPr algn="l">
-              <a:lnSpc>
-                <a:spcPts val="1950"/>
-              </a:lnSpc>
-              <a:spcBef>
-                <a:spcPts val="0"/>
-              </a:spcBef>
-              <a:spcAft>
-                <a:spcPts val="0"/>
-              </a:spcAft>
-            </a:pPr>
-            <a:r>
-              <a:rPr sz="1400" b="0" err="1">
-                <a:solidFill>
-                  <a:srgbClr val="D1D5DB"/>
-                </a:solidFill>
-                <a:latin typeface="Roboto"/>
-              </a:rPr>
-              <a:t>Modèles</a:t>
-            </a:r>
-            <a:r>
-              <a:rPr sz="1400" b="0">
-                <a:solidFill>
-                  <a:srgbClr val="D1D5DB"/>
-                </a:solidFill>
-                <a:latin typeface="Roboto"/>
-              </a:rPr>
-              <a:t> </a:t>
-            </a:r>
-            <a:r>
-              <a:rPr sz="1400" b="0" err="1">
-                <a:solidFill>
-                  <a:srgbClr val="D1D5DB"/>
-                </a:solidFill>
-                <a:latin typeface="Roboto"/>
-              </a:rPr>
-              <a:t>légers</a:t>
-            </a:r>
-            <a:r>
-              <a:rPr sz="1400" b="0">
-                <a:solidFill>
-                  <a:srgbClr val="D1D5DB"/>
-                </a:solidFill>
-                <a:latin typeface="Roboto"/>
-              </a:rPr>
-              <a:t> (scikit-learn), pas de deep learning, </a:t>
-            </a:r>
-            <a:r>
-              <a:rPr sz="1400" b="0" err="1">
-                <a:solidFill>
-                  <a:srgbClr val="D1D5DB"/>
-                </a:solidFill>
-                <a:latin typeface="Roboto"/>
-              </a:rPr>
-              <a:t>empreinte</a:t>
-            </a:r>
-            <a:r>
-              <a:rPr sz="1400" b="0">
-                <a:solidFill>
-                  <a:srgbClr val="D1D5DB"/>
-                </a:solidFill>
-                <a:latin typeface="Roboto"/>
-              </a:rPr>
-              <a:t> </a:t>
-            </a:r>
-            <a:r>
-              <a:rPr sz="1400" b="0" err="1">
-                <a:solidFill>
-                  <a:srgbClr val="D1D5DB"/>
-                </a:solidFill>
-                <a:latin typeface="Roboto"/>
-              </a:rPr>
-              <a:t>carbone</a:t>
-            </a:r>
-            <a:r>
-              <a:rPr sz="1400" b="0">
-                <a:solidFill>
-                  <a:srgbClr val="D1D5DB"/>
-                </a:solidFill>
-                <a:latin typeface="Roboto"/>
-              </a:rPr>
-              <a:t> </a:t>
-            </a:r>
-            <a:r>
-              <a:rPr sz="1400" b="0" err="1">
-                <a:solidFill>
-                  <a:srgbClr val="D1D5DB"/>
-                </a:solidFill>
-                <a:latin typeface="Roboto"/>
-              </a:rPr>
-              <a:t>minimale</a:t>
-            </a:r>
-            <a:endParaRPr sz="1400" b="0">
-              <a:solidFill>
-                <a:srgbClr val="D1D5DB"/>
-              </a:solidFill>
-              <a:latin typeface="Roboto"/>
-            </a:endParaRPr>
-          </a:p>
-        </p:txBody>
-      </p:sp>
-      <p:sp>
-        <p:nvSpPr>
-          <p:cNvPr id="28" name="Rounded Rectangle 27">
-            <a:extLst>
-              <a:ext uri="{FF2B5EF4-FFF2-40B4-BE49-F238E27FC236}">
-                <a16:creationId xmlns:a16="http://schemas.microsoft.com/office/drawing/2014/main" id="{51EABA22-DF3C-4D8E-CCD1-A862866B4F96}"/>
-              </a:ext>
-            </a:extLst>
-          </p:cNvPr>
-          <p:cNvSpPr/>
-          <p:nvPr/>
-        </p:nvSpPr>
-        <p:spPr>
-          <a:xfrm>
-            <a:off x="609584" y="6200775"/>
-            <a:ext cx="10972525" cy="571500"/>
-          </a:xfrm>
-          <a:prstGeom prst="roundRect">
-            <a:avLst>
-              <a:gd name="adj" fmla="val 26666"/>
-            </a:avLst>
-          </a:prstGeom>
-          <a:solidFill>
-            <a:srgbClr val="FFFFFF">
-              <a:alpha val="10000"/>
-            </a:srgbClr>
-          </a:solidFill>
-          <a:ln>
-            <a:noFill/>
-          </a:ln>
-        </p:spPr>
-        <p:style>
-          <a:lnRef idx="1">
-            <a:schemeClr val="accent1"/>
-          </a:lnRef>
-          <a:fillRef idx="3">
-            <a:schemeClr val="accent1"/>
-          </a:fillRef>
-          <a:effectRef idx="2">
-            <a:schemeClr val="accent1"/>
-          </a:effectRef>
-          <a:fontRef idx="minor">
-            <a:schemeClr val="lt1"/>
-          </a:fontRef>
-        </p:style>
-        <p:txBody>
-          <a:bodyPr rtlCol="0" anchor="ctr"/>
-          <a:lstStyle/>
-          <a:p>
-            <a:pPr algn="ctr"/>
-            <a:endParaRPr/>
-          </a:p>
-        </p:txBody>
-      </p:sp>
-      <p:sp>
-        <p:nvSpPr>
-          <p:cNvPr id="29" name="Round Same Side Corner Rectangle 28">
-            <a:extLst>
-              <a:ext uri="{FF2B5EF4-FFF2-40B4-BE49-F238E27FC236}">
-                <a16:creationId xmlns:a16="http://schemas.microsoft.com/office/drawing/2014/main" id="{E344264B-D73B-8A63-D3CA-5261BCBB16D2}"/>
-              </a:ext>
-            </a:extLst>
-          </p:cNvPr>
-          <p:cNvSpPr/>
-          <p:nvPr/>
-        </p:nvSpPr>
-        <p:spPr>
-          <a:xfrm rot="16200000">
-            <a:off x="389874" y="6420485"/>
-            <a:ext cx="571500" cy="132080"/>
-          </a:xfrm>
-          <a:prstGeom prst="round2SameRect">
-            <a:avLst>
-              <a:gd name="adj1" fmla="val 50000"/>
-              <a:gd name="adj2" fmla="val 0"/>
-            </a:avLst>
-          </a:prstGeom>
-          <a:solidFill>
-            <a:srgbClr val="2DD4BF"/>
-          </a:solidFill>
-          <a:ln>
-            <a:noFill/>
-          </a:ln>
-        </p:spPr>
-        <p:style>
-          <a:lnRef idx="1">
-            <a:schemeClr val="accent1"/>
-          </a:lnRef>
-          <a:fillRef idx="3">
-            <a:schemeClr val="accent1"/>
-          </a:fillRef>
-          <a:effectRef idx="2">
-            <a:schemeClr val="accent1"/>
-          </a:effectRef>
-          <a:fontRef idx="minor">
-            <a:schemeClr val="lt1"/>
-          </a:fontRef>
-        </p:style>
-        <p:txBody>
-          <a:bodyPr rtlCol="0" anchor="ctr"/>
-          <a:lstStyle/>
-          <a:p>
-            <a:pPr algn="ctr"/>
-            <a:endParaRPr/>
-          </a:p>
-        </p:txBody>
-      </p:sp>
-      <p:pic>
-        <p:nvPicPr>
-          <p:cNvPr id="30" name="Picture 29" descr="image.png">
-            <a:extLst>
-              <a:ext uri="{FF2B5EF4-FFF2-40B4-BE49-F238E27FC236}">
-                <a16:creationId xmlns:a16="http://schemas.microsoft.com/office/drawing/2014/main" id="{EC4B2BA5-FC25-8BFE-091C-1D26FA5968B6}"/>
-              </a:ext>
-            </a:extLst>
-          </p:cNvPr>
-          <p:cNvPicPr>
-            <a:picLocks noChangeAspect="1"/>
-          </p:cNvPicPr>
-          <p:nvPr/>
-        </p:nvPicPr>
-        <p:blipFill>
-          <a:blip r:embed="rId7">
-            <a:alphaModFix/>
-          </a:blip>
-          <a:stretch>
-            <a:fillRect/>
-          </a:stretch>
-        </p:blipFill>
-        <p:spPr>
-          <a:xfrm>
-            <a:off x="800079" y="6399679"/>
-            <a:ext cx="190495" cy="173691"/>
-          </a:xfrm>
-          <a:prstGeom prst="rect">
-            <a:avLst/>
-          </a:prstGeom>
-        </p:spPr>
-      </p:pic>
-      <p:sp>
-        <p:nvSpPr>
-          <p:cNvPr id="31" name="TextBox 30">
-            <a:extLst>
-              <a:ext uri="{FF2B5EF4-FFF2-40B4-BE49-F238E27FC236}">
-                <a16:creationId xmlns:a16="http://schemas.microsoft.com/office/drawing/2014/main" id="{8A28A70D-0B8A-44A9-2F78-2594EF61C39A}"/>
-              </a:ext>
-            </a:extLst>
-          </p:cNvPr>
-          <p:cNvSpPr txBox="1"/>
-          <p:nvPr/>
-        </p:nvSpPr>
-        <p:spPr>
-          <a:xfrm>
-            <a:off x="1104872" y="6326884"/>
-            <a:ext cx="5221238" cy="328808"/>
-          </a:xfrm>
-          <a:prstGeom prst="rect">
-            <a:avLst/>
-          </a:prstGeom>
-          <a:noFill/>
-        </p:spPr>
-        <p:txBody>
-          <a:bodyPr wrap="none" lIns="73152" tIns="54864" rIns="73152" bIns="54864" anchor="ctr">
-            <a:spAutoFit/>
-          </a:bodyPr>
-          <a:lstStyle/>
-          <a:p>
-            <a:pPr algn="l">
-              <a:lnSpc>
-                <a:spcPts val="1755"/>
-              </a:lnSpc>
-              <a:spcBef>
-                <a:spcPts val="0"/>
-              </a:spcBef>
-              <a:spcAft>
-                <a:spcPts val="0"/>
-              </a:spcAft>
-            </a:pPr>
-            <a:r>
-              <a:rPr sz="1400" b="0" err="1">
-                <a:solidFill>
-                  <a:srgbClr val="E5E7EB"/>
-                </a:solidFill>
-                <a:latin typeface="Roboto"/>
-              </a:rPr>
-              <a:t>Conformité</a:t>
-            </a:r>
-            <a:r>
-              <a:rPr sz="1400" b="0">
-                <a:solidFill>
-                  <a:srgbClr val="E5E7EB"/>
-                </a:solidFill>
-                <a:latin typeface="Roboto"/>
-              </a:rPr>
-              <a:t> UE : 7 exigences </a:t>
-            </a:r>
-            <a:r>
-              <a:rPr sz="1400" b="0" err="1">
-                <a:solidFill>
-                  <a:srgbClr val="E5E7EB"/>
-                </a:solidFill>
-                <a:latin typeface="Roboto"/>
-              </a:rPr>
-              <a:t>d'IA</a:t>
-            </a:r>
-            <a:r>
-              <a:rPr sz="1400" b="0">
-                <a:solidFill>
-                  <a:srgbClr val="E5E7EB"/>
-                </a:solidFill>
-                <a:latin typeface="Roboto"/>
-              </a:rPr>
-              <a:t> </a:t>
-            </a:r>
-            <a:r>
-              <a:rPr sz="1400" b="0" err="1">
-                <a:solidFill>
-                  <a:srgbClr val="E5E7EB"/>
-                </a:solidFill>
-                <a:latin typeface="Roboto"/>
-              </a:rPr>
-              <a:t>digne</a:t>
-            </a:r>
-            <a:r>
-              <a:rPr sz="1400" b="0">
-                <a:solidFill>
-                  <a:srgbClr val="E5E7EB"/>
-                </a:solidFill>
-                <a:latin typeface="Roboto"/>
-              </a:rPr>
-              <a:t> de </a:t>
-            </a:r>
-            <a:r>
-              <a:rPr sz="1400" b="0" err="1">
-                <a:solidFill>
-                  <a:srgbClr val="E5E7EB"/>
-                </a:solidFill>
-                <a:latin typeface="Roboto"/>
-              </a:rPr>
-              <a:t>confiance</a:t>
-            </a:r>
-            <a:r>
-              <a:rPr sz="1400" b="0">
-                <a:solidFill>
-                  <a:srgbClr val="E5E7EB"/>
-                </a:solidFill>
-                <a:latin typeface="Roboto"/>
-              </a:rPr>
-              <a:t> </a:t>
-            </a:r>
-            <a:r>
-              <a:rPr sz="1400" b="0" err="1">
-                <a:solidFill>
-                  <a:srgbClr val="E5E7EB"/>
-                </a:solidFill>
-                <a:latin typeface="Roboto"/>
-              </a:rPr>
-              <a:t>respectées</a:t>
-            </a:r>
-            <a:endParaRPr sz="1400" b="0">
-              <a:solidFill>
-                <a:srgbClr val="E5E7EB"/>
-              </a:solidFill>
-              <a:latin typeface="Roboto"/>
-            </a:endParaRPr>
-          </a:p>
-        </p:txBody>
-      </p:sp>
-      <p:sp>
-        <p:nvSpPr>
-          <p:cNvPr id="32" name="TextBox 1">
-            <a:extLst>
-              <a:ext uri="{FF2B5EF4-FFF2-40B4-BE49-F238E27FC236}">
-                <a16:creationId xmlns:a16="http://schemas.microsoft.com/office/drawing/2014/main" id="{6FEB23CF-AD0D-6C7A-74DA-8A099B909A57}"/>
-              </a:ext>
-            </a:extLst>
-          </p:cNvPr>
-          <p:cNvSpPr txBox="1"/>
-          <p:nvPr/>
-        </p:nvSpPr>
-        <p:spPr>
-          <a:xfrm>
-            <a:off x="609584" y="190084"/>
-            <a:ext cx="3624647" cy="475771"/>
-          </a:xfrm>
-          <a:prstGeom prst="rect">
-            <a:avLst/>
-          </a:prstGeom>
-          <a:noFill/>
-        </p:spPr>
-        <p:txBody>
-          <a:bodyPr wrap="none" lIns="73152" tIns="54864" rIns="73152" bIns="54864" anchor="ctr">
-            <a:spAutoFit/>
-          </a:bodyPr>
-          <a:lstStyle/>
-          <a:p>
-            <a:pPr algn="l">
-              <a:lnSpc>
-                <a:spcPts val="2600"/>
-              </a:lnSpc>
-              <a:spcBef>
-                <a:spcPts val="0"/>
-              </a:spcBef>
-              <a:spcAft>
-                <a:spcPts val="0"/>
-              </a:spcAft>
-            </a:pPr>
-            <a:r>
-              <a:rPr sz="3200" b="1" err="1">
-                <a:solidFill>
-                  <a:srgbClr val="FFFFFF"/>
-                </a:solidFill>
-                <a:latin typeface="Poppins"/>
-              </a:rPr>
-              <a:t>Éthique</a:t>
-            </a:r>
-            <a:r>
-              <a:rPr lang="fr-FR" sz="3200" b="1">
-                <a:solidFill>
-                  <a:srgbClr val="FFFFFF"/>
-                </a:solidFill>
-                <a:latin typeface="Poppins"/>
-              </a:rPr>
-              <a:t> - Détails</a:t>
-            </a:r>
-            <a:endParaRPr sz="3200" b="1">
-              <a:solidFill>
-                <a:srgbClr val="FFFFFF"/>
-              </a:solidFill>
-              <a:latin typeface="Poppins"/>
-            </a:endParaRPr>
-          </a:p>
-        </p:txBody>
-      </p:sp>
-      <p:sp>
-        <p:nvSpPr>
-          <p:cNvPr id="33" name="Rectangle 32">
-            <a:extLst>
-              <a:ext uri="{FF2B5EF4-FFF2-40B4-BE49-F238E27FC236}">
-                <a16:creationId xmlns:a16="http://schemas.microsoft.com/office/drawing/2014/main" id="{E1EEEEA8-7821-1F06-4E61-5A90BBEC6566}"/>
-              </a:ext>
-            </a:extLst>
-          </p:cNvPr>
-          <p:cNvSpPr/>
-          <p:nvPr/>
-        </p:nvSpPr>
-        <p:spPr>
-          <a:xfrm>
-            <a:off x="0" y="688967"/>
-            <a:ext cx="12161520" cy="0"/>
-          </a:xfrm>
-          <a:prstGeom prst="rect">
-            <a:avLst/>
-          </a:prstGeom>
-          <a:solidFill>
-            <a:srgbClr val="20555F"/>
-          </a:solidFill>
-          <a:ln>
-            <a:solidFill>
-              <a:srgbClr val="20555F"/>
-            </a:solidFill>
-          </a:ln>
-        </p:spPr>
-        <p:style>
-          <a:lnRef idx="1">
-            <a:schemeClr val="accent1"/>
-          </a:lnRef>
-          <a:fillRef idx="3">
-            <a:schemeClr val="accent1"/>
-          </a:fillRef>
-          <a:effectRef idx="2">
-            <a:schemeClr val="accent1"/>
-          </a:effectRef>
-          <a:fontRef idx="minor">
-            <a:schemeClr val="lt1"/>
-          </a:fontRef>
-        </p:style>
-        <p:txBody>
-          <a:bodyPr rtlCol="0" anchor="ctr"/>
-          <a:lstStyle/>
-          <a:p>
-            <a:pPr algn="ctr"/>
-            <a:endParaRPr sz="4000">
-              <a:ln>
-                <a:solidFill>
-                  <a:srgbClr val="20555F"/>
-                </a:solidFill>
-              </a:ln>
-              <a:solidFill>
-                <a:srgbClr val="20555F"/>
-              </a:solidFill>
-            </a:endParaRPr>
-          </a:p>
-        </p:txBody>
-      </p:sp>
-      <p:sp>
-        <p:nvSpPr>
           <p:cNvPr id="2" name="Rounded Rectangle 37">
             <a:extLst>
               <a:ext uri="{FF2B5EF4-FFF2-40B4-BE49-F238E27FC236}">
-                <a16:creationId xmlns:a16="http://schemas.microsoft.com/office/drawing/2014/main" id="{24BA7E6C-A4F9-3FF4-6CC4-BA33E9D64A36}"/>
+                <a16:creationId xmlns:a16="http://schemas.microsoft.com/office/drawing/2014/main" id="{AC7B41C7-8BA5-438C-3D9B-0443CDFE61DA}"/>
               </a:ext>
             </a:extLst>
           </p:cNvPr>
@@ -29730,10 +28279,10 @@
       </p:sp>
       <p:sp>
         <p:nvSpPr>
-          <p:cNvPr id="34" name="TextBox 38">
-            <a:extLst>
-              <a:ext uri="{FF2B5EF4-FFF2-40B4-BE49-F238E27FC236}">
-                <a16:creationId xmlns:a16="http://schemas.microsoft.com/office/drawing/2014/main" id="{FFBF0572-DFA9-FCE0-7E6C-E3BA28335B2D}"/>
+          <p:cNvPr id="3" name="TextBox 38">
+            <a:extLst>
+              <a:ext uri="{FF2B5EF4-FFF2-40B4-BE49-F238E27FC236}">
+                <a16:creationId xmlns:a16="http://schemas.microsoft.com/office/drawing/2014/main" id="{D5656451-96D0-E04B-7656-B8E87F3B59B7}"/>
               </a:ext>
             </a:extLst>
           </p:cNvPr>
@@ -29768,7 +28317,7 @@
               </a:spcAft>
             </a:pPr>
             <a:r>
-              <a:rPr lang="fr-FR" sz="1674" b="1">
+              <a:rPr lang="fr-FR" sz="1674" b="1" dirty="0">
                 <a:solidFill>
                   <a:srgbClr val="FFFFFF"/>
                 </a:solidFill>
@@ -29776,7 +28325,7 @@
               </a:rPr>
               <a:t>36</a:t>
             </a:r>
-            <a:endParaRPr sz="1674" b="1">
+            <a:endParaRPr sz="1674" b="1" dirty="0">
               <a:solidFill>
                 <a:srgbClr val="FFFFFF"/>
               </a:solidFill>
@@ -29788,7 +28337,7 @@
     </p:spTree>
     <p:extLst>
       <p:ext uri="{BB962C8B-B14F-4D97-AF65-F5344CB8AC3E}">
-        <p14:creationId xmlns:p14="http://schemas.microsoft.com/office/powerpoint/2010/main" val="3539182063"/>
+        <p14:creationId xmlns:p14="http://schemas.microsoft.com/office/powerpoint/2010/main" val="252828556"/>
       </p:ext>
     </p:extLst>
   </p:cSld>
@@ -29817,353 +28366,6 @@
       </p:grpSpPr>
       <p:sp>
         <p:nvSpPr>
-          <p:cNvPr id="4" name="TextBox 4">
-            <a:extLst>
-              <a:ext uri="{FF2B5EF4-FFF2-40B4-BE49-F238E27FC236}">
-                <a16:creationId xmlns:a16="http://schemas.microsoft.com/office/drawing/2014/main" id="{D97D5083-4B09-5F73-626F-2EC2B9122AE7}"/>
-              </a:ext>
-            </a:extLst>
-          </p:cNvPr>
-          <p:cNvSpPr txBox="1"/>
-          <p:nvPr/>
-        </p:nvSpPr>
-        <p:spPr>
-          <a:xfrm>
-            <a:off x="5665311" y="3101627"/>
-            <a:ext cx="861070" cy="807144"/>
-          </a:xfrm>
-          <a:prstGeom prst="rect">
-            <a:avLst/>
-          </a:prstGeom>
-          <a:noFill/>
-        </p:spPr>
-        <p:txBody>
-          <a:bodyPr wrap="none" lIns="73152" tIns="54864" rIns="73152" bIns="54864" anchor="ctr">
-            <a:spAutoFit/>
-          </a:bodyPr>
-          <a:lstStyle/>
-          <a:p>
-            <a:pPr algn="ctr">
-              <a:lnSpc>
-                <a:spcPts val="5850"/>
-              </a:lnSpc>
-              <a:spcBef>
-                <a:spcPts val="0"/>
-              </a:spcBef>
-              <a:spcAft>
-                <a:spcPts val="0"/>
-              </a:spcAft>
-            </a:pPr>
-            <a:r>
-              <a:rPr lang="fr-FR" sz="3588" b="1">
-                <a:solidFill>
-                  <a:srgbClr val="FFFFFF"/>
-                </a:solidFill>
-                <a:latin typeface="Poppins"/>
-              </a:rPr>
-              <a:t>09</a:t>
-            </a:r>
-            <a:r>
-              <a:rPr sz="3588" b="1">
-                <a:solidFill>
-                  <a:srgbClr val="FFFFFF"/>
-                </a:solidFill>
-                <a:latin typeface="Poppins"/>
-              </a:rPr>
-              <a:t>.</a:t>
-            </a:r>
-          </a:p>
-        </p:txBody>
-      </p:sp>
-      <p:sp>
-        <p:nvSpPr>
-          <p:cNvPr id="5" name="Rectangle 4">
-            <a:extLst>
-              <a:ext uri="{FF2B5EF4-FFF2-40B4-BE49-F238E27FC236}">
-                <a16:creationId xmlns:a16="http://schemas.microsoft.com/office/drawing/2014/main" id="{E0790512-E0F4-61B1-C9A7-DAC95CCCEA3A}"/>
-              </a:ext>
-            </a:extLst>
-          </p:cNvPr>
-          <p:cNvSpPr/>
-          <p:nvPr/>
-        </p:nvSpPr>
-        <p:spPr>
-          <a:xfrm>
-            <a:off x="4876678" y="4876800"/>
-            <a:ext cx="2438339" cy="38100"/>
-          </a:xfrm>
-          <a:prstGeom prst="rect">
-            <a:avLst/>
-          </a:prstGeom>
-          <a:gradFill rotWithShape="1">
-            <a:gsLst>
-              <a:gs pos="0">
-                <a:srgbClr val="000000">
-                  <a:alpha val="0"/>
-                </a:srgbClr>
-              </a:gs>
-              <a:gs pos="50000">
-                <a:srgbClr val="0288D1"/>
-              </a:gs>
-              <a:gs pos="100000">
-                <a:srgbClr val="000000">
-                  <a:alpha val="0"/>
-                </a:srgbClr>
-              </a:gs>
-            </a:gsLst>
-            <a:lin ang="10800000" scaled="0"/>
-          </a:gradFill>
-          <a:ln>
-            <a:noFill/>
-          </a:ln>
-        </p:spPr>
-        <p:style>
-          <a:lnRef idx="1">
-            <a:schemeClr val="accent1"/>
-          </a:lnRef>
-          <a:fillRef idx="3">
-            <a:schemeClr val="accent1"/>
-          </a:fillRef>
-          <a:effectRef idx="2">
-            <a:schemeClr val="accent1"/>
-          </a:effectRef>
-          <a:fontRef idx="minor">
-            <a:schemeClr val="lt1"/>
-          </a:fontRef>
-        </p:style>
-        <p:txBody>
-          <a:bodyPr rtlCol="0" anchor="ctr"/>
-          <a:lstStyle/>
-          <a:p>
-            <a:pPr algn="ctr"/>
-            <a:endParaRPr/>
-          </a:p>
-        </p:txBody>
-      </p:sp>
-      <p:sp>
-        <p:nvSpPr>
-          <p:cNvPr id="6" name="TextBox 5">
-            <a:extLst>
-              <a:ext uri="{FF2B5EF4-FFF2-40B4-BE49-F238E27FC236}">
-                <a16:creationId xmlns:a16="http://schemas.microsoft.com/office/drawing/2014/main" id="{E1DF722C-8F7E-96D5-E247-9EBF04FF451B}"/>
-              </a:ext>
-            </a:extLst>
-          </p:cNvPr>
-          <p:cNvSpPr txBox="1"/>
-          <p:nvPr/>
-        </p:nvSpPr>
-        <p:spPr>
-          <a:xfrm>
-            <a:off x="4677111" y="4035769"/>
-            <a:ext cx="2827954" cy="624786"/>
-          </a:xfrm>
-          <a:prstGeom prst="rect">
-            <a:avLst/>
-          </a:prstGeom>
-          <a:noFill/>
-        </p:spPr>
-        <p:txBody>
-          <a:bodyPr wrap="none" lIns="73152" tIns="54864" rIns="73152" bIns="54864" anchor="ctr">
-            <a:spAutoFit/>
-          </a:bodyPr>
-          <a:lstStyle/>
-          <a:p>
-            <a:pPr algn="ctr">
-              <a:lnSpc>
-                <a:spcPts val="4030"/>
-              </a:lnSpc>
-              <a:spcBef>
-                <a:spcPts val="0"/>
-              </a:spcBef>
-              <a:spcAft>
-                <a:spcPts val="1560"/>
-              </a:spcAft>
-            </a:pPr>
-            <a:r>
-              <a:rPr lang="fr-FR" sz="3600" b="1">
-                <a:solidFill>
-                  <a:srgbClr val="0288D1"/>
-                </a:solidFill>
-                <a:latin typeface="Poppins"/>
-              </a:rPr>
-              <a:t>Conclusion</a:t>
-            </a:r>
-          </a:p>
-        </p:txBody>
-      </p:sp>
-      <p:pic>
-        <p:nvPicPr>
-          <p:cNvPr id="13" name="Picture 30" descr="image.png">
-            <a:extLst>
-              <a:ext uri="{FF2B5EF4-FFF2-40B4-BE49-F238E27FC236}">
-                <a16:creationId xmlns:a16="http://schemas.microsoft.com/office/drawing/2014/main" id="{265D4966-1012-4032-A2B2-E37DAD3481AD}"/>
-              </a:ext>
-            </a:extLst>
-          </p:cNvPr>
-          <p:cNvPicPr>
-            <a:picLocks noChangeAspect="1"/>
-          </p:cNvPicPr>
-          <p:nvPr/>
-        </p:nvPicPr>
-        <p:blipFill>
-          <a:blip r:embed="rId2">
-            <a:alphaModFix/>
-          </a:blip>
-          <a:stretch>
-            <a:fillRect/>
-          </a:stretch>
-        </p:blipFill>
-        <p:spPr>
-          <a:xfrm>
-            <a:off x="5688461" y="2001328"/>
-            <a:ext cx="805252" cy="602857"/>
-          </a:xfrm>
-          <a:prstGeom prst="rect">
-            <a:avLst/>
-          </a:prstGeom>
-        </p:spPr>
-      </p:pic>
-      <p:sp>
-        <p:nvSpPr>
-          <p:cNvPr id="2" name="Rounded Rectangle 37">
-            <a:extLst>
-              <a:ext uri="{FF2B5EF4-FFF2-40B4-BE49-F238E27FC236}">
-                <a16:creationId xmlns:a16="http://schemas.microsoft.com/office/drawing/2014/main" id="{AC7B41C7-8BA5-438C-3D9B-0443CDFE61DA}"/>
-              </a:ext>
-            </a:extLst>
-          </p:cNvPr>
-          <p:cNvSpPr/>
-          <p:nvPr/>
-        </p:nvSpPr>
-        <p:spPr>
-          <a:xfrm>
-            <a:off x="11592183" y="6269798"/>
-            <a:ext cx="420590" cy="424880"/>
-          </a:xfrm>
-          <a:prstGeom prst="roundRect">
-            <a:avLst>
-              <a:gd name="adj" fmla="val 50000"/>
-            </a:avLst>
-          </a:prstGeom>
-          <a:solidFill>
-            <a:srgbClr val="0288D1"/>
-          </a:solidFill>
-          <a:ln>
-            <a:noFill/>
-          </a:ln>
-        </p:spPr>
-        <p:style>
-          <a:lnRef idx="1">
-            <a:schemeClr val="accent1"/>
-          </a:lnRef>
-          <a:fillRef idx="3">
-            <a:schemeClr val="accent1"/>
-          </a:fillRef>
-          <a:effectRef idx="2">
-            <a:schemeClr val="accent1"/>
-          </a:effectRef>
-          <a:fontRef idx="minor">
-            <a:schemeClr val="lt1"/>
-          </a:fontRef>
-        </p:style>
-        <p:txBody>
-          <a:bodyPr rtlCol="0" anchor="ctr"/>
-          <a:lstStyle/>
-          <a:p>
-            <a:pPr algn="ctr"/>
-            <a:endParaRPr/>
-          </a:p>
-        </p:txBody>
-      </p:sp>
-      <p:sp>
-        <p:nvSpPr>
-          <p:cNvPr id="3" name="TextBox 38">
-            <a:extLst>
-              <a:ext uri="{FF2B5EF4-FFF2-40B4-BE49-F238E27FC236}">
-                <a16:creationId xmlns:a16="http://schemas.microsoft.com/office/drawing/2014/main" id="{D5656451-96D0-E04B-7656-B8E87F3B59B7}"/>
-              </a:ext>
-            </a:extLst>
-          </p:cNvPr>
-          <p:cNvSpPr txBox="1"/>
-          <p:nvPr/>
-        </p:nvSpPr>
-        <p:spPr>
-          <a:xfrm>
-            <a:off x="11610471" y="6242366"/>
-            <a:ext cx="420590" cy="424880"/>
-          </a:xfrm>
-          <a:prstGeom prst="rect">
-            <a:avLst/>
-          </a:prstGeom>
-          <a:noFill/>
-        </p:spPr>
-        <p:txBody>
-          <a:bodyPr wrap="square" lIns="73152" tIns="54864" rIns="73152" bIns="54864" anchor="ctr">
-            <a:spAutoFit/>
-          </a:bodyPr>
-          <a:lstStyle/>
-          <a:p>
-            <a:pPr algn="l">
-              <a:lnSpc>
-                <a:spcPts val="2730"/>
-              </a:lnSpc>
-              <a:spcBef>
-                <a:spcPts val="0"/>
-              </a:spcBef>
-              <a:spcAft>
-                <a:spcPts val="0"/>
-              </a:spcAft>
-            </a:pPr>
-            <a:r>
-              <a:rPr lang="fr-FR" sz="1674" b="1">
-                <a:solidFill>
-                  <a:srgbClr val="FFFFFF"/>
-                </a:solidFill>
-                <a:latin typeface="Roboto Slab"/>
-              </a:rPr>
-              <a:t>37</a:t>
-            </a:r>
-            <a:endParaRPr sz="1674" b="1">
-              <a:solidFill>
-                <a:srgbClr val="FFFFFF"/>
-              </a:solidFill>
-              <a:latin typeface="Roboto Slab"/>
-            </a:endParaRPr>
-          </a:p>
-        </p:txBody>
-      </p:sp>
-    </p:spTree>
-    <p:extLst>
-      <p:ext uri="{BB962C8B-B14F-4D97-AF65-F5344CB8AC3E}">
-        <p14:creationId xmlns:p14="http://schemas.microsoft.com/office/powerpoint/2010/main" val="252828556"/>
-      </p:ext>
-    </p:extLst>
-  </p:cSld>
-  <p:clrMapOvr>
-    <a:masterClrMapping/>
-  </p:clrMapOvr>
-</p:sld>
-</file>
-
-<file path=ppt/slides/slide38.xml><?xml version="1.0" encoding="utf-8"?>
-<p:sld xmlns:a="http://schemas.openxmlformats.org/drawingml/2006/main" xmlns:r="http://schemas.openxmlformats.org/officeDocument/2006/relationships" xmlns:p="http://schemas.openxmlformats.org/presentationml/2006/main">
-  <p:cSld>
-    <p:spTree>
-      <p:nvGrpSpPr>
-        <p:cNvPr id="1" name=""/>
-        <p:cNvGrpSpPr/>
-        <p:nvPr/>
-      </p:nvGrpSpPr>
-      <p:grpSpPr>
-        <a:xfrm>
-          <a:off x="0" y="0"/>
-          <a:ext cx="0" cy="0"/>
-          <a:chOff x="0" y="0"/>
-          <a:chExt cx="0" cy="0"/>
-        </a:xfrm>
-      </p:grpSpPr>
-      <p:sp>
-        <p:nvSpPr>
           <p:cNvPr id="2" name="TextBox 1"/>
           <p:cNvSpPr txBox="1"/>
           <p:nvPr/>
@@ -31083,15 +29285,15 @@
               </a:spcAft>
             </a:pPr>
             <a:r>
-              <a:rPr lang="fr-FR" sz="1674" b="1">
+              <a:rPr lang="fr-FR" sz="1674" b="1" dirty="0">
                 <a:solidFill>
                   <a:srgbClr val="FFFFFF"/>
                 </a:solidFill>
                 <a:latin typeface="Roboto Slab"/>
               </a:rPr>
-              <a:t>38</a:t>
-            </a:r>
-            <a:endParaRPr sz="1674" b="1">
+              <a:t>37</a:t>
+            </a:r>
+            <a:endParaRPr sz="1674" b="1" dirty="0">
               <a:solidFill>
                 <a:srgbClr val="FFFFFF"/>
               </a:solidFill>
@@ -31108,7 +29310,7 @@
 </p:sld>
 </file>
 
-<file path=ppt/slides/slide39.xml><?xml version="1.0" encoding="utf-8"?>
+<file path=ppt/slides/slide38.xml><?xml version="1.0" encoding="utf-8"?>
 <p:sld xmlns:a="http://schemas.openxmlformats.org/drawingml/2006/main" xmlns:r="http://schemas.openxmlformats.org/officeDocument/2006/relationships" xmlns:p="http://schemas.openxmlformats.org/presentationml/2006/main">
   <p:cSld>
     <p:spTree>
@@ -34466,15 +32668,15 @@
               </a:spcAft>
             </a:pPr>
             <a:r>
-              <a:rPr lang="fr-FR" sz="1674" b="1">
+              <a:rPr lang="fr-FR" sz="1674" b="1" dirty="0">
                 <a:solidFill>
                   <a:srgbClr val="FFFFFF"/>
                 </a:solidFill>
                 <a:latin typeface="Roboto Slab"/>
               </a:rPr>
-              <a:t>39</a:t>
-            </a:r>
-            <a:endParaRPr sz="1674" b="1">
+              <a:t>38</a:t>
+            </a:r>
+            <a:endParaRPr sz="1674" b="1" dirty="0">
               <a:solidFill>
                 <a:srgbClr val="FFFFFF"/>
               </a:solidFill>
@@ -34487,6 +32689,359 @@
     <p:extLst>
       <p:ext uri="{BB962C8B-B14F-4D97-AF65-F5344CB8AC3E}">
         <p14:creationId xmlns:p14="http://schemas.microsoft.com/office/powerpoint/2010/main" val="620693965"/>
+      </p:ext>
+    </p:extLst>
+  </p:cSld>
+  <p:clrMapOvr>
+    <a:masterClrMapping/>
+  </p:clrMapOvr>
+</p:sld>
+</file>
+
+<file path=ppt/slides/slide39.xml><?xml version="1.0" encoding="utf-8"?>
+<p:sld xmlns:a="http://schemas.openxmlformats.org/drawingml/2006/main" xmlns:r="http://schemas.openxmlformats.org/officeDocument/2006/relationships" xmlns:p="http://schemas.openxmlformats.org/presentationml/2006/main">
+  <p:cSld>
+    <p:spTree>
+      <p:nvGrpSpPr>
+        <p:cNvPr id="1" name="">
+          <a:extLst>
+            <a:ext uri="{FF2B5EF4-FFF2-40B4-BE49-F238E27FC236}">
+              <a16:creationId xmlns:a16="http://schemas.microsoft.com/office/drawing/2014/main" id="{D5EBB2DF-C50D-DAFF-95EC-545815F979DB}"/>
+            </a:ext>
+          </a:extLst>
+        </p:cNvPr>
+        <p:cNvGrpSpPr/>
+        <p:nvPr/>
+      </p:nvGrpSpPr>
+      <p:grpSpPr>
+        <a:xfrm>
+          <a:off x="0" y="0"/>
+          <a:ext cx="0" cy="0"/>
+          <a:chOff x="0" y="0"/>
+          <a:chExt cx="0" cy="0"/>
+        </a:xfrm>
+      </p:grpSpPr>
+      <p:sp>
+        <p:nvSpPr>
+          <p:cNvPr id="4" name="TextBox 4">
+            <a:extLst>
+              <a:ext uri="{FF2B5EF4-FFF2-40B4-BE49-F238E27FC236}">
+                <a16:creationId xmlns:a16="http://schemas.microsoft.com/office/drawing/2014/main" id="{9207273D-43CE-4BA0-CAF3-8A56CD57562F}"/>
+              </a:ext>
+            </a:extLst>
+          </p:cNvPr>
+          <p:cNvSpPr txBox="1"/>
+          <p:nvPr/>
+        </p:nvSpPr>
+        <p:spPr>
+          <a:xfrm>
+            <a:off x="5720615" y="3101627"/>
+            <a:ext cx="750462" cy="807144"/>
+          </a:xfrm>
+          <a:prstGeom prst="rect">
+            <a:avLst/>
+          </a:prstGeom>
+          <a:noFill/>
+        </p:spPr>
+        <p:txBody>
+          <a:bodyPr wrap="none" lIns="73152" tIns="54864" rIns="73152" bIns="54864" anchor="ctr">
+            <a:spAutoFit/>
+          </a:bodyPr>
+          <a:lstStyle/>
+          <a:p>
+            <a:pPr algn="ctr">
+              <a:lnSpc>
+                <a:spcPts val="5850"/>
+              </a:lnSpc>
+              <a:spcBef>
+                <a:spcPts val="0"/>
+              </a:spcBef>
+              <a:spcAft>
+                <a:spcPts val="0"/>
+              </a:spcAft>
+            </a:pPr>
+            <a:r>
+              <a:rPr lang="fr-FR" sz="3588" b="1" dirty="0">
+                <a:solidFill>
+                  <a:srgbClr val="FFFFFF"/>
+                </a:solidFill>
+                <a:latin typeface="Poppins"/>
+              </a:rPr>
+              <a:t>10</a:t>
+            </a:r>
+            <a:r>
+              <a:rPr sz="3588" b="1" dirty="0">
+                <a:solidFill>
+                  <a:srgbClr val="FFFFFF"/>
+                </a:solidFill>
+                <a:latin typeface="Poppins"/>
+              </a:rPr>
+              <a:t>.</a:t>
+            </a:r>
+          </a:p>
+        </p:txBody>
+      </p:sp>
+      <p:sp>
+        <p:nvSpPr>
+          <p:cNvPr id="5" name="Rectangle 4">
+            <a:extLst>
+              <a:ext uri="{FF2B5EF4-FFF2-40B4-BE49-F238E27FC236}">
+                <a16:creationId xmlns:a16="http://schemas.microsoft.com/office/drawing/2014/main" id="{FBAB9832-038C-E62E-E63E-41C101B539EA}"/>
+              </a:ext>
+            </a:extLst>
+          </p:cNvPr>
+          <p:cNvSpPr/>
+          <p:nvPr/>
+        </p:nvSpPr>
+        <p:spPr>
+          <a:xfrm>
+            <a:off x="4876678" y="4876800"/>
+            <a:ext cx="2438339" cy="38100"/>
+          </a:xfrm>
+          <a:prstGeom prst="rect">
+            <a:avLst/>
+          </a:prstGeom>
+          <a:gradFill rotWithShape="1">
+            <a:gsLst>
+              <a:gs pos="0">
+                <a:srgbClr val="000000">
+                  <a:alpha val="0"/>
+                </a:srgbClr>
+              </a:gs>
+              <a:gs pos="50000">
+                <a:srgbClr val="0288D1"/>
+              </a:gs>
+              <a:gs pos="100000">
+                <a:srgbClr val="000000">
+                  <a:alpha val="0"/>
+                </a:srgbClr>
+              </a:gs>
+            </a:gsLst>
+            <a:lin ang="10800000" scaled="0"/>
+          </a:gradFill>
+          <a:ln>
+            <a:noFill/>
+          </a:ln>
+        </p:spPr>
+        <p:style>
+          <a:lnRef idx="1">
+            <a:schemeClr val="accent1"/>
+          </a:lnRef>
+          <a:fillRef idx="3">
+            <a:schemeClr val="accent1"/>
+          </a:fillRef>
+          <a:effectRef idx="2">
+            <a:schemeClr val="accent1"/>
+          </a:effectRef>
+          <a:fontRef idx="minor">
+            <a:schemeClr val="lt1"/>
+          </a:fontRef>
+        </p:style>
+        <p:txBody>
+          <a:bodyPr rtlCol="0" anchor="ctr"/>
+          <a:lstStyle/>
+          <a:p>
+            <a:pPr algn="ctr"/>
+            <a:endParaRPr/>
+          </a:p>
+        </p:txBody>
+      </p:sp>
+      <p:sp>
+        <p:nvSpPr>
+          <p:cNvPr id="6" name="TextBox 5">
+            <a:extLst>
+              <a:ext uri="{FF2B5EF4-FFF2-40B4-BE49-F238E27FC236}">
+                <a16:creationId xmlns:a16="http://schemas.microsoft.com/office/drawing/2014/main" id="{47D280AD-3F8A-FE10-8C22-91891F356B71}"/>
+              </a:ext>
+            </a:extLst>
+          </p:cNvPr>
+          <p:cNvSpPr txBox="1"/>
+          <p:nvPr/>
+        </p:nvSpPr>
+        <p:spPr>
+          <a:xfrm>
+            <a:off x="4218655" y="4035769"/>
+            <a:ext cx="3744872" cy="624786"/>
+          </a:xfrm>
+          <a:prstGeom prst="rect">
+            <a:avLst/>
+          </a:prstGeom>
+          <a:noFill/>
+        </p:spPr>
+        <p:txBody>
+          <a:bodyPr wrap="none" lIns="73152" tIns="54864" rIns="73152" bIns="54864" anchor="ctr">
+            <a:spAutoFit/>
+          </a:bodyPr>
+          <a:lstStyle/>
+          <a:p>
+            <a:pPr algn="ctr">
+              <a:lnSpc>
+                <a:spcPts val="4030"/>
+              </a:lnSpc>
+              <a:spcBef>
+                <a:spcPts val="0"/>
+              </a:spcBef>
+              <a:spcAft>
+                <a:spcPts val="1560"/>
+              </a:spcAft>
+            </a:pPr>
+            <a:r>
+              <a:rPr lang="fr-FR" sz="3600" b="1" dirty="0">
+                <a:solidFill>
+                  <a:srgbClr val="0288D1"/>
+                </a:solidFill>
+                <a:latin typeface="Poppins"/>
+              </a:rPr>
+              <a:t>Démonstration</a:t>
+            </a:r>
+          </a:p>
+        </p:txBody>
+      </p:sp>
+      <p:pic>
+        <p:nvPicPr>
+          <p:cNvPr id="13" name="Picture 30" descr="image.png">
+            <a:extLst>
+              <a:ext uri="{FF2B5EF4-FFF2-40B4-BE49-F238E27FC236}">
+                <a16:creationId xmlns:a16="http://schemas.microsoft.com/office/drawing/2014/main" id="{603315C7-C085-69DC-196E-B8265AA14A31}"/>
+              </a:ext>
+            </a:extLst>
+          </p:cNvPr>
+          <p:cNvPicPr>
+            <a:picLocks noChangeAspect="1"/>
+          </p:cNvPicPr>
+          <p:nvPr/>
+        </p:nvPicPr>
+        <p:blipFill>
+          <a:blip r:embed="rId2">
+            <a:alphaModFix/>
+          </a:blip>
+          <a:stretch>
+            <a:fillRect/>
+          </a:stretch>
+        </p:blipFill>
+        <p:spPr>
+          <a:xfrm>
+            <a:off x="5688461" y="2001328"/>
+            <a:ext cx="805252" cy="602857"/>
+          </a:xfrm>
+          <a:prstGeom prst="rect">
+            <a:avLst/>
+          </a:prstGeom>
+        </p:spPr>
+      </p:pic>
+      <p:sp>
+        <p:nvSpPr>
+          <p:cNvPr id="2" name="Rounded Rectangle 37">
+            <a:extLst>
+              <a:ext uri="{FF2B5EF4-FFF2-40B4-BE49-F238E27FC236}">
+                <a16:creationId xmlns:a16="http://schemas.microsoft.com/office/drawing/2014/main" id="{B2BA3337-82FE-A845-3003-0F5DD2826AEF}"/>
+              </a:ext>
+            </a:extLst>
+          </p:cNvPr>
+          <p:cNvSpPr/>
+          <p:nvPr/>
+        </p:nvSpPr>
+        <p:spPr>
+          <a:xfrm>
+            <a:off x="11592183" y="6269798"/>
+            <a:ext cx="420590" cy="424880"/>
+          </a:xfrm>
+          <a:prstGeom prst="roundRect">
+            <a:avLst>
+              <a:gd name="adj" fmla="val 50000"/>
+            </a:avLst>
+          </a:prstGeom>
+          <a:solidFill>
+            <a:srgbClr val="0288D1"/>
+          </a:solidFill>
+          <a:ln>
+            <a:noFill/>
+          </a:ln>
+        </p:spPr>
+        <p:style>
+          <a:lnRef idx="1">
+            <a:schemeClr val="accent1"/>
+          </a:lnRef>
+          <a:fillRef idx="3">
+            <a:schemeClr val="accent1"/>
+          </a:fillRef>
+          <a:effectRef idx="2">
+            <a:schemeClr val="accent1"/>
+          </a:effectRef>
+          <a:fontRef idx="minor">
+            <a:schemeClr val="lt1"/>
+          </a:fontRef>
+        </p:style>
+        <p:txBody>
+          <a:bodyPr rtlCol="0" anchor="ctr"/>
+          <a:lstStyle/>
+          <a:p>
+            <a:pPr algn="ctr"/>
+            <a:endParaRPr/>
+          </a:p>
+        </p:txBody>
+      </p:sp>
+      <p:sp>
+        <p:nvSpPr>
+          <p:cNvPr id="3" name="TextBox 38">
+            <a:extLst>
+              <a:ext uri="{FF2B5EF4-FFF2-40B4-BE49-F238E27FC236}">
+                <a16:creationId xmlns:a16="http://schemas.microsoft.com/office/drawing/2014/main" id="{06ACF77D-001D-2A0A-734A-E213F477829D}"/>
+              </a:ext>
+            </a:extLst>
+          </p:cNvPr>
+          <p:cNvSpPr txBox="1"/>
+          <p:nvPr/>
+        </p:nvSpPr>
+        <p:spPr>
+          <a:xfrm>
+            <a:off x="11610471" y="6242366"/>
+            <a:ext cx="420590" cy="424880"/>
+          </a:xfrm>
+          <a:prstGeom prst="rect">
+            <a:avLst/>
+          </a:prstGeom>
+          <a:noFill/>
+        </p:spPr>
+        <p:txBody>
+          <a:bodyPr wrap="square" lIns="73152" tIns="54864" rIns="73152" bIns="54864" anchor="ctr">
+            <a:spAutoFit/>
+          </a:bodyPr>
+          <a:lstStyle/>
+          <a:p>
+            <a:pPr algn="l">
+              <a:lnSpc>
+                <a:spcPts val="2730"/>
+              </a:lnSpc>
+              <a:spcBef>
+                <a:spcPts val="0"/>
+              </a:spcBef>
+              <a:spcAft>
+                <a:spcPts val="0"/>
+              </a:spcAft>
+            </a:pPr>
+            <a:r>
+              <a:rPr lang="fr-FR" sz="1674" b="1" dirty="0">
+                <a:solidFill>
+                  <a:srgbClr val="FFFFFF"/>
+                </a:solidFill>
+                <a:latin typeface="Roboto Slab"/>
+              </a:rPr>
+              <a:t>39</a:t>
+            </a:r>
+            <a:endParaRPr sz="1674" b="1" dirty="0">
+              <a:solidFill>
+                <a:srgbClr val="FFFFFF"/>
+              </a:solidFill>
+              <a:latin typeface="Roboto Slab"/>
+            </a:endParaRPr>
+          </a:p>
+        </p:txBody>
+      </p:sp>
+    </p:spTree>
+    <p:extLst>
+      <p:ext uri="{BB962C8B-B14F-4D97-AF65-F5344CB8AC3E}">
+        <p14:creationId xmlns:p14="http://schemas.microsoft.com/office/powerpoint/2010/main" val="1400356636"/>
       </p:ext>
     </p:extLst>
   </p:cSld>
@@ -45373,16 +43928,16 @@
 <file path=customXml/itemProps2.xml><?xml version="1.0" encoding="utf-8"?>
 <ds:datastoreItem xmlns:ds="http://schemas.openxmlformats.org/officeDocument/2006/customXml" ds:itemID="{6E8BE11B-E310-4D95-B768-DCF3B1CAECC6}">
   <ds:schemaRefs>
+    <ds:schemaRef ds:uri="http://purl.org/dc/dcmitype/"/>
+    <ds:schemaRef ds:uri="http://purl.org/dc/elements/1.1/"/>
     <ds:schemaRef ds:uri="http://schemas.microsoft.com/office/2006/metadata/properties"/>
     <ds:schemaRef ds:uri="http://schemas.microsoft.com/office/2006/documentManagement/types"/>
     <ds:schemaRef ds:uri="http://purl.org/dc/terms/"/>
-    <ds:schemaRef ds:uri="http://purl.org/dc/dcmitype/"/>
-    <ds:schemaRef ds:uri="http://purl.org/dc/elements/1.1/"/>
     <ds:schemaRef ds:uri="http://schemas.microsoft.com/office/infopath/2007/PartnerControls"/>
-    <ds:schemaRef ds:uri="http://www.w3.org/XML/1998/namespace"/>
     <ds:schemaRef ds:uri="http://schemas.openxmlformats.org/package/2006/metadata/core-properties"/>
     <ds:schemaRef ds:uri="2f3603e6-7258-4cc9-9231-e4997ee3b391"/>
     <ds:schemaRef ds:uri="105ebccb-a3a5-46e6-9cf1-2caf1cc7f79d"/>
+    <ds:schemaRef ds:uri="http://www.w3.org/XML/1998/namespace"/>
   </ds:schemaRefs>
 </ds:datastoreItem>
 </file>
